--- a/zebraish-christian-onboarding-en.pptx
+++ b/zebraish-christian-onboarding-en.pptx
@@ -3555,7 +3555,7 @@
     <p:bg>
       <p:bgPr>
         <a:solidFill>
-          <a:srgbClr val="141720"/>
+          <a:srgbClr val="0B0D12"/>
         </a:solidFill>
         <a:effectLst/>
       </p:bgPr>
@@ -3569,207 +3569,227 @@
       <p:grpSpPr/>
       <p:sp>
         <p:nvSpPr>
-          <p:cNvPr id="2" name="Rectangle 1"/>
-          <p:cNvSpPr/>
-          <p:nvPr/>
-        </p:nvSpPr>
-        <p:spPr>
-          <a:xfrm>
-            <a:off x="0" y="0"/>
-            <a:ext cx="164592" cy="6858000"/>
-          </a:xfrm>
-          <a:prstGeom prst="rect">
-            <a:avLst/>
-          </a:prstGeom>
-          <a:solidFill>
-            <a:srgbClr val="1D68C0"/>
-          </a:solidFill>
-          <a:ln>
-            <a:noFill/>
+          <p:cNvPr id="2" name="TextBox 1"/>
+          <p:cNvSpPr txBox="1"/>
+          <p:nvPr/>
+        </p:nvSpPr>
+        <p:spPr>
+          <a:xfrm>
+            <a:off x="685800" y="502920"/>
+            <a:ext cx="7315200" cy="365760"/>
+          </a:xfrm>
+          <a:prstGeom prst="rect">
+            <a:avLst/>
+          </a:prstGeom>
+          <a:noFill/>
+        </p:spPr>
+        <p:txBody>
+          <a:bodyPr wrap="square" anchor="t" lIns="0" rIns="0" tIns="0" bIns="0">
+            <a:spAutoFit/>
+          </a:bodyPr>
+          <a:lstStyle/>
+          <a:p>
+            <a:pPr algn="l">
+              <a:lnSpc>
+                <a:spcPct val="115000"/>
+              </a:lnSpc>
+            </a:pPr>
+            <a:r>
+              <a:rPr sz="1250" b="1">
+                <a:solidFill>
+                  <a:srgbClr val="4E9BF0"/>
+                </a:solidFill>
+                <a:latin typeface="Helvetica Neue"/>
+              </a:rPr>
+              <a:t>COMMISSION &amp; PAYMENTS</a:t>
+            </a:r>
+          </a:p>
+        </p:txBody>
+      </p:sp>
+      <p:sp>
+        <p:nvSpPr>
+          <p:cNvPr id="3" name="TextBox 2"/>
+          <p:cNvSpPr txBox="1"/>
+          <p:nvPr/>
+        </p:nvSpPr>
+        <p:spPr>
+          <a:xfrm>
+            <a:off x="685800" y="868680"/>
+            <a:ext cx="10515600" cy="914400"/>
+          </a:xfrm>
+          <a:prstGeom prst="rect">
+            <a:avLst/>
+          </a:prstGeom>
+          <a:noFill/>
+        </p:spPr>
+        <p:txBody>
+          <a:bodyPr wrap="square" anchor="t" lIns="0" rIns="0" tIns="0" bIns="0">
+            <a:spAutoFit/>
+          </a:bodyPr>
+          <a:lstStyle/>
+          <a:p>
+            <a:pPr algn="l">
+              <a:lnSpc>
+                <a:spcPct val="105000"/>
+              </a:lnSpc>
+            </a:pPr>
+            <a:r>
+              <a:rPr sz="2700" b="1">
+                <a:solidFill>
+                  <a:srgbClr val="FFFFFF"/>
+                </a:solidFill>
+                <a:latin typeface="Helvetica Neue"/>
+              </a:rPr>
+              <a:t>Client introductions — no referral code needed</a:t>
+            </a:r>
+          </a:p>
+        </p:txBody>
+      </p:sp>
+      <p:cxnSp>
+        <p:nvCxnSpPr>
+          <p:cNvPr id="4" name="Connector 3"/>
+          <p:cNvCxnSpPr/>
+          <p:nvPr/>
+        </p:nvCxnSpPr>
+        <p:spPr>
+          <a:xfrm>
+            <a:off x="685800" y="1691640"/>
+            <a:ext cx="10817352" cy="0"/>
+          </a:xfrm>
+          <a:prstGeom prst="line">
+            <a:avLst/>
+          </a:prstGeom>
+          <a:ln w="12700">
+            <a:solidFill>
+              <a:srgbClr val="2A2E3A"/>
+            </a:solidFill>
           </a:ln>
-          <a:effectLst/>
         </p:spPr>
         <p:style>
-          <a:lnRef idx="1">
+          <a:lnRef idx="2">
             <a:schemeClr val="accent1"/>
           </a:lnRef>
-          <a:fillRef idx="3">
+          <a:fillRef idx="0">
             <a:schemeClr val="accent1"/>
           </a:fillRef>
-          <a:effectRef idx="2">
+          <a:effectRef idx="1">
             <a:schemeClr val="accent1"/>
           </a:effectRef>
           <a:fontRef idx="minor">
-            <a:schemeClr val="lt1"/>
+            <a:schemeClr val="tx1"/>
           </a:fontRef>
         </p:style>
-        <p:txBody>
-          <a:bodyPr rtlCol="0" anchor="ctr"/>
-          <a:lstStyle/>
-          <a:p>
-            <a:pPr algn="ctr"/>
-          </a:p>
-        </p:txBody>
-      </p:sp>
-      <p:sp>
-        <p:nvSpPr>
-          <p:cNvPr id="3" name="TextBox 2"/>
-          <p:cNvSpPr txBox="1"/>
-          <p:nvPr/>
-        </p:nvSpPr>
-        <p:spPr>
-          <a:xfrm>
-            <a:off x="868680" y="2286000"/>
-            <a:ext cx="1828800" cy="1097280"/>
-          </a:xfrm>
-          <a:prstGeom prst="rect">
-            <a:avLst/>
-          </a:prstGeom>
-          <a:noFill/>
-        </p:spPr>
-        <p:txBody>
-          <a:bodyPr wrap="square" anchor="t" lIns="0" rIns="0" tIns="0" bIns="0">
-            <a:spAutoFit/>
-          </a:bodyPr>
-          <a:lstStyle/>
-          <a:p>
-            <a:pPr algn="l">
-              <a:lnSpc>
-                <a:spcPct val="115000"/>
-              </a:lnSpc>
-            </a:pPr>
-            <a:r>
-              <a:rPr sz="6400" b="1">
+      </p:cxnSp>
+      <p:sp>
+        <p:nvSpPr>
+          <p:cNvPr id="5" name="TextBox 4"/>
+          <p:cNvSpPr txBox="1"/>
+          <p:nvPr/>
+        </p:nvSpPr>
+        <p:spPr>
+          <a:xfrm>
+            <a:off x="685800" y="1965960"/>
+            <a:ext cx="10424160" cy="3931920"/>
+          </a:xfrm>
+          <a:prstGeom prst="rect">
+            <a:avLst/>
+          </a:prstGeom>
+          <a:noFill/>
+        </p:spPr>
+        <p:txBody>
+          <a:bodyPr wrap="square" lIns="0" rIns="0">
+            <a:spAutoFit/>
+          </a:bodyPr>
+          <a:lstStyle/>
+          <a:p>
+            <a:pPr>
+              <a:lnSpc>
+                <a:spcPct val="125000"/>
+              </a:lnSpc>
+              <a:spcAft>
+                <a:spcPts val="1000"/>
+              </a:spcAft>
+            </a:pPr>
+            <a:r>
+              <a:rPr sz="1550" b="1">
                 <a:solidFill>
                   <a:srgbClr val="4E9BF0"/>
                 </a:solidFill>
                 <a:latin typeface="Helvetica Neue"/>
               </a:rPr>
-              <a:t>03</a:t>
-            </a:r>
-          </a:p>
-        </p:txBody>
-      </p:sp>
-      <p:sp>
-        <p:nvSpPr>
-          <p:cNvPr id="4" name="TextBox 3"/>
-          <p:cNvSpPr txBox="1"/>
-          <p:nvPr/>
-        </p:nvSpPr>
-        <p:spPr>
-          <a:xfrm>
-            <a:off x="896112" y="2103120"/>
-            <a:ext cx="7315200" cy="365760"/>
-          </a:xfrm>
-          <a:prstGeom prst="rect">
-            <a:avLst/>
-          </a:prstGeom>
-          <a:noFill/>
-        </p:spPr>
-        <p:txBody>
-          <a:bodyPr wrap="square" anchor="t" lIns="0" rIns="0" tIns="0" bIns="0">
-            <a:spAutoFit/>
-          </a:bodyPr>
-          <a:lstStyle/>
-          <a:p>
-            <a:pPr algn="l">
-              <a:lnSpc>
-                <a:spcPct val="115000"/>
-              </a:lnSpc>
-            </a:pPr>
-            <a:r>
-              <a:rPr sz="1250" b="1">
+              <a:t>—  </a:t>
+            </a:r>
+            <a:r>
+              <a:rPr sz="1550">
+                <a:solidFill>
+                  <a:srgbClr val="FFFFFF"/>
+                </a:solidFill>
+                <a:latin typeface="Helvetica Neue"/>
+              </a:rPr>
+              <a:t>When you introduce a client, the project gets opened through the Zebraish Project &amp; Payment Portal (or you just tell Joshua directly and he opens it) — it gets a unique Project ID, like ZB-00017.</a:t>
+            </a:r>
+          </a:p>
+          <a:p>
+            <a:pPr>
+              <a:lnSpc>
+                <a:spcPct val="125000"/>
+              </a:lnSpc>
+              <a:spcAft>
+                <a:spcPts val="1000"/>
+              </a:spcAft>
+            </a:pPr>
+            <a:r>
+              <a:rPr sz="1550" b="1">
                 <a:solidFill>
                   <a:srgbClr val="4E9BF0"/>
                 </a:solidFill>
                 <a:latin typeface="Helvetica Neue"/>
               </a:rPr>
-              <a:t>COMMISSION &amp; PAYMENTS</a:t>
-            </a:r>
-          </a:p>
-        </p:txBody>
-      </p:sp>
-      <p:sp>
-        <p:nvSpPr>
-          <p:cNvPr id="5" name="TextBox 4"/>
-          <p:cNvSpPr txBox="1"/>
-          <p:nvPr/>
-        </p:nvSpPr>
-        <p:spPr>
-          <a:xfrm>
-            <a:off x="868680" y="3429000"/>
-            <a:ext cx="9875520" cy="1097280"/>
-          </a:xfrm>
-          <a:prstGeom prst="rect">
-            <a:avLst/>
-          </a:prstGeom>
-          <a:noFill/>
-        </p:spPr>
-        <p:txBody>
-          <a:bodyPr wrap="square" anchor="t" lIns="0" rIns="0" tIns="0" bIns="0">
-            <a:spAutoFit/>
-          </a:bodyPr>
-          <a:lstStyle/>
-          <a:p>
-            <a:pPr algn="l">
-              <a:lnSpc>
-                <a:spcPct val="115000"/>
-              </a:lnSpc>
-            </a:pPr>
-            <a:r>
-              <a:rPr sz="3400" b="1">
+              <a:t>—  </a:t>
+            </a:r>
+            <a:r>
+              <a:rPr sz="1550">
                 <a:solidFill>
                   <a:srgbClr val="FFFFFF"/>
                 </a:solidFill>
                 <a:latin typeface="Helvetica Neue"/>
               </a:rPr>
-              <a:t>How money moves</a:t>
-            </a:r>
-          </a:p>
-        </p:txBody>
-      </p:sp>
-      <p:sp>
-        <p:nvSpPr>
-          <p:cNvPr id="6" name="TextBox 5"/>
-          <p:cNvSpPr txBox="1"/>
-          <p:nvPr/>
-        </p:nvSpPr>
-        <p:spPr>
-          <a:xfrm>
-            <a:off x="868680" y="4251960"/>
-            <a:ext cx="8412480" cy="1097280"/>
-          </a:xfrm>
-          <a:prstGeom prst="rect">
-            <a:avLst/>
-          </a:prstGeom>
-          <a:noFill/>
-        </p:spPr>
-        <p:txBody>
-          <a:bodyPr wrap="square" anchor="t" lIns="0" rIns="0" tIns="0" bIns="0">
-            <a:spAutoFit/>
-          </a:bodyPr>
-          <a:lstStyle/>
-          <a:p>
-            <a:pPr algn="l">
-              <a:lnSpc>
-                <a:spcPct val="135000"/>
-              </a:lnSpc>
-            </a:pPr>
-            <a:r>
-              <a:rPr sz="1550" b="0">
-                <a:solidFill>
-                  <a:srgbClr val="A6ACBA"/>
-                </a:solidFill>
-                <a:latin typeface="Helvetica Neue"/>
-              </a:rPr>
-              <a:t>Client introductions, commission, and the weekly payout — in plain terms.</a:t>
+              <a:t>There's no personal referral code or link to manage or share.</a:t>
+            </a:r>
+          </a:p>
+          <a:p>
+            <a:pPr>
+              <a:lnSpc>
+                <a:spcPct val="125000"/>
+              </a:lnSpc>
+              <a:spcAft>
+                <a:spcPts val="1000"/>
+              </a:spcAft>
+            </a:pPr>
+            <a:r>
+              <a:rPr sz="1550" b="1">
+                <a:solidFill>
+                  <a:srgbClr val="4E9BF0"/>
+                </a:solidFill>
+                <a:latin typeface="Helvetica Neue"/>
+              </a:rPr>
+              <a:t>—  </a:t>
+            </a:r>
+            <a:r>
+              <a:rPr sz="1550">
+                <a:solidFill>
+                  <a:srgbClr val="FFFFFF"/>
+                </a:solidFill>
+                <a:latin typeface="Helvetica Neue"/>
+              </a:rPr>
+              <a:t>Commission isn't calculated by matching individual clients to you — it's based on all qualifying Zebraish payments received during your Term.</a:t>
             </a:r>
           </a:p>
         </p:txBody>
       </p:sp>
       <p:pic>
         <p:nvPicPr>
-          <p:cNvPr id="7" name="Picture 6" descr="logo-head.png"/>
+          <p:cNvPr id="6" name="Picture 5" descr="logo-head.png"/>
           <p:cNvPicPr>
             <a:picLocks noChangeAspect="1"/>
           </p:cNvPicPr>
@@ -3793,7 +3813,7 @@
       </p:pic>
       <p:sp>
         <p:nvSpPr>
-          <p:cNvPr id="8" name="TextBox 7"/>
+          <p:cNvPr id="7" name="TextBox 6"/>
           <p:cNvSpPr txBox="1"/>
           <p:nvPr/>
         </p:nvSpPr>
@@ -3832,7 +3852,7 @@
       </p:sp>
       <p:sp>
         <p:nvSpPr>
-          <p:cNvPr id="9" name="TextBox 8"/>
+          <p:cNvPr id="8" name="TextBox 7"/>
           <p:cNvSpPr txBox="1"/>
           <p:nvPr/>
         </p:nvSpPr>
@@ -3871,7 +3891,7 @@
       </p:sp>
       <p:cxnSp>
         <p:nvCxnSpPr>
-          <p:cNvPr id="10" name="Connector 9"/>
+          <p:cNvPr id="9" name="Connector 8"/>
           <p:cNvCxnSpPr/>
           <p:nvPr/>
         </p:nvCxnSpPr>
@@ -3993,7 +4013,7 @@
           <a:p>
             <a:pPr algn="l">
               <a:lnSpc>
-                <a:spcPct val="105000"/>
+                <a:spcPct val="115000"/>
               </a:lnSpc>
             </a:pPr>
             <a:r>
@@ -4003,7 +4023,7 @@
                 </a:solidFill>
                 <a:latin typeface="Helvetica Neue"/>
               </a:rPr>
-              <a:t>Client introductions — no referral code needed</a:t>
+              <a:t>Commission, at a glance</a:t>
             </a:r>
           </a:p>
         </p:txBody>
@@ -4051,108 +4071,318 @@
         </p:nvSpPr>
         <p:spPr>
           <a:xfrm>
-            <a:off x="685800" y="1965960"/>
-            <a:ext cx="10424160" cy="3931920"/>
-          </a:xfrm>
-          <a:prstGeom prst="rect">
-            <a:avLst/>
-          </a:prstGeom>
-          <a:noFill/>
-        </p:spPr>
-        <p:txBody>
-          <a:bodyPr wrap="square" lIns="0" rIns="0">
-            <a:spAutoFit/>
-          </a:bodyPr>
-          <a:lstStyle/>
-          <a:p>
-            <a:pPr>
-              <a:lnSpc>
-                <a:spcPct val="125000"/>
-              </a:lnSpc>
-              <a:spcAft>
-                <a:spcPts val="1000"/>
-              </a:spcAft>
-            </a:pPr>
-            <a:r>
-              <a:rPr sz="1550" b="1">
+            <a:off x="685800" y="2148840"/>
+            <a:ext cx="3605784" cy="1280160"/>
+          </a:xfrm>
+          <a:prstGeom prst="rect">
+            <a:avLst/>
+          </a:prstGeom>
+          <a:noFill/>
+        </p:spPr>
+        <p:txBody>
+          <a:bodyPr wrap="square" anchor="t" lIns="0" rIns="0" tIns="0" bIns="0">
+            <a:spAutoFit/>
+          </a:bodyPr>
+          <a:lstStyle/>
+          <a:p>
+            <a:pPr algn="l">
+              <a:lnSpc>
+                <a:spcPct val="115000"/>
+              </a:lnSpc>
+            </a:pPr>
+            <a:r>
+              <a:rPr sz="4600" b="1">
                 <a:solidFill>
                   <a:srgbClr val="4E9BF0"/>
                 </a:solidFill>
                 <a:latin typeface="Helvetica Neue"/>
               </a:rPr>
-              <a:t>—  </a:t>
-            </a:r>
-            <a:r>
-              <a:rPr sz="1550">
+              <a:t>10%</a:t>
+            </a:r>
+          </a:p>
+        </p:txBody>
+      </p:sp>
+      <p:sp>
+        <p:nvSpPr>
+          <p:cNvPr id="6" name="TextBox 5"/>
+          <p:cNvSpPr txBox="1"/>
+          <p:nvPr/>
+        </p:nvSpPr>
+        <p:spPr>
+          <a:xfrm>
+            <a:off x="685800" y="3246120"/>
+            <a:ext cx="3285744" cy="822960"/>
+          </a:xfrm>
+          <a:prstGeom prst="rect">
+            <a:avLst/>
+          </a:prstGeom>
+          <a:noFill/>
+        </p:spPr>
+        <p:txBody>
+          <a:bodyPr wrap="square" anchor="t" lIns="0" rIns="0" tIns="0" bIns="0">
+            <a:spAutoFit/>
+          </a:bodyPr>
+          <a:lstStyle/>
+          <a:p>
+            <a:pPr algn="l">
+              <a:lnSpc>
+                <a:spcPct val="130000"/>
+              </a:lnSpc>
+            </a:pPr>
+            <a:r>
+              <a:rPr sz="1350" b="0">
+                <a:solidFill>
+                  <a:srgbClr val="A6ACBA"/>
+                </a:solidFill>
+                <a:latin typeface="Helvetica Neue"/>
+              </a:rPr>
+              <a:t>of all qualifying Zebraish client payments received during your Term</a:t>
+            </a:r>
+          </a:p>
+        </p:txBody>
+      </p:sp>
+      <p:sp>
+        <p:nvSpPr>
+          <p:cNvPr id="7" name="TextBox 6"/>
+          <p:cNvSpPr txBox="1"/>
+          <p:nvPr/>
+        </p:nvSpPr>
+        <p:spPr>
+          <a:xfrm>
+            <a:off x="4291584" y="2148840"/>
+            <a:ext cx="3605784" cy="1280160"/>
+          </a:xfrm>
+          <a:prstGeom prst="rect">
+            <a:avLst/>
+          </a:prstGeom>
+          <a:noFill/>
+        </p:spPr>
+        <p:txBody>
+          <a:bodyPr wrap="square" anchor="t" lIns="0" rIns="0" tIns="0" bIns="0">
+            <a:spAutoFit/>
+          </a:bodyPr>
+          <a:lstStyle/>
+          <a:p>
+            <a:pPr algn="l">
+              <a:lnSpc>
+                <a:spcPct val="115000"/>
+              </a:lnSpc>
+            </a:pPr>
+            <a:r>
+              <a:rPr sz="4600" b="1">
+                <a:solidFill>
+                  <a:srgbClr val="4E9BF0"/>
+                </a:solidFill>
+                <a:latin typeface="Helvetica Neue"/>
+              </a:rPr>
+              <a:t>Weekly</a:t>
+            </a:r>
+          </a:p>
+        </p:txBody>
+      </p:sp>
+      <p:sp>
+        <p:nvSpPr>
+          <p:cNvPr id="8" name="TextBox 7"/>
+          <p:cNvSpPr txBox="1"/>
+          <p:nvPr/>
+        </p:nvSpPr>
+        <p:spPr>
+          <a:xfrm>
+            <a:off x="4291584" y="3246120"/>
+            <a:ext cx="3285744" cy="822960"/>
+          </a:xfrm>
+          <a:prstGeom prst="rect">
+            <a:avLst/>
+          </a:prstGeom>
+          <a:noFill/>
+        </p:spPr>
+        <p:txBody>
+          <a:bodyPr wrap="square" anchor="t" lIns="0" rIns="0" tIns="0" bIns="0">
+            <a:spAutoFit/>
+          </a:bodyPr>
+          <a:lstStyle/>
+          <a:p>
+            <a:pPr algn="l">
+              <a:lnSpc>
+                <a:spcPct val="130000"/>
+              </a:lnSpc>
+            </a:pPr>
+            <a:r>
+              <a:rPr sz="1350" b="0">
+                <a:solidFill>
+                  <a:srgbClr val="A6ACBA"/>
+                </a:solidFill>
+                <a:latin typeface="Helvetica Neue"/>
+              </a:rPr>
+              <a:t>commission is calculated and paid every single week</a:t>
+            </a:r>
+          </a:p>
+        </p:txBody>
+      </p:sp>
+      <p:sp>
+        <p:nvSpPr>
+          <p:cNvPr id="9" name="TextBox 8"/>
+          <p:cNvSpPr txBox="1"/>
+          <p:nvPr/>
+        </p:nvSpPr>
+        <p:spPr>
+          <a:xfrm>
+            <a:off x="7897368" y="2148840"/>
+            <a:ext cx="3605784" cy="1280160"/>
+          </a:xfrm>
+          <a:prstGeom prst="rect">
+            <a:avLst/>
+          </a:prstGeom>
+          <a:noFill/>
+        </p:spPr>
+        <p:txBody>
+          <a:bodyPr wrap="square" anchor="t" lIns="0" rIns="0" tIns="0" bIns="0">
+            <a:spAutoFit/>
+          </a:bodyPr>
+          <a:lstStyle/>
+          <a:p>
+            <a:pPr algn="l">
+              <a:lnSpc>
+                <a:spcPct val="115000"/>
+              </a:lnSpc>
+            </a:pPr>
+            <a:r>
+              <a:rPr sz="4600" b="1">
+                <a:solidFill>
+                  <a:srgbClr val="4E9BF0"/>
+                </a:solidFill>
+                <a:latin typeface="Helvetica Neue"/>
+              </a:rPr>
+              <a:t>Sunday</a:t>
+            </a:r>
+          </a:p>
+        </p:txBody>
+      </p:sp>
+      <p:sp>
+        <p:nvSpPr>
+          <p:cNvPr id="10" name="TextBox 9"/>
+          <p:cNvSpPr txBox="1"/>
+          <p:nvPr/>
+        </p:nvSpPr>
+        <p:spPr>
+          <a:xfrm>
+            <a:off x="7897368" y="3246120"/>
+            <a:ext cx="3285744" cy="822960"/>
+          </a:xfrm>
+          <a:prstGeom prst="rect">
+            <a:avLst/>
+          </a:prstGeom>
+          <a:noFill/>
+        </p:spPr>
+        <p:txBody>
+          <a:bodyPr wrap="square" anchor="t" lIns="0" rIns="0" tIns="0" bIns="0">
+            <a:spAutoFit/>
+          </a:bodyPr>
+          <a:lstStyle/>
+          <a:p>
+            <a:pPr algn="l">
+              <a:lnSpc>
+                <a:spcPct val="130000"/>
+              </a:lnSpc>
+            </a:pPr>
+            <a:r>
+              <a:rPr sz="1350" b="0">
+                <a:solidFill>
+                  <a:srgbClr val="A6ACBA"/>
+                </a:solidFill>
+                <a:latin typeface="Helvetica Neue"/>
+              </a:rPr>
+              <a:t>payout day — reviewed and sent by bank transfer</a:t>
+            </a:r>
+          </a:p>
+        </p:txBody>
+      </p:sp>
+      <p:sp>
+        <p:nvSpPr>
+          <p:cNvPr id="11" name="Rectangle 10"/>
+          <p:cNvSpPr/>
+          <p:nvPr/>
+        </p:nvSpPr>
+        <p:spPr>
+          <a:xfrm>
+            <a:off x="685800" y="5029200"/>
+            <a:ext cx="10817352" cy="18288"/>
+          </a:xfrm>
+          <a:prstGeom prst="rect">
+            <a:avLst/>
+          </a:prstGeom>
+          <a:solidFill>
+            <a:srgbClr val="2A2E3A"/>
+          </a:solidFill>
+          <a:ln>
+            <a:noFill/>
+          </a:ln>
+          <a:effectLst/>
+        </p:spPr>
+        <p:style>
+          <a:lnRef idx="1">
+            <a:schemeClr val="accent1"/>
+          </a:lnRef>
+          <a:fillRef idx="3">
+            <a:schemeClr val="accent1"/>
+          </a:fillRef>
+          <a:effectRef idx="2">
+            <a:schemeClr val="accent1"/>
+          </a:effectRef>
+          <a:fontRef idx="minor">
+            <a:schemeClr val="lt1"/>
+          </a:fontRef>
+        </p:style>
+        <p:txBody>
+          <a:bodyPr rtlCol="0" anchor="ctr"/>
+          <a:lstStyle/>
+          <a:p>
+            <a:pPr algn="ctr"/>
+          </a:p>
+        </p:txBody>
+      </p:sp>
+      <p:sp>
+        <p:nvSpPr>
+          <p:cNvPr id="12" name="TextBox 11"/>
+          <p:cNvSpPr txBox="1"/>
+          <p:nvPr/>
+        </p:nvSpPr>
+        <p:spPr>
+          <a:xfrm>
+            <a:off x="685800" y="5212080"/>
+            <a:ext cx="10332720" cy="1005840"/>
+          </a:xfrm>
+          <a:prstGeom prst="rect">
+            <a:avLst/>
+          </a:prstGeom>
+          <a:noFill/>
+        </p:spPr>
+        <p:txBody>
+          <a:bodyPr wrap="square" anchor="t" lIns="0" rIns="0" tIns="0" bIns="0">
+            <a:spAutoFit/>
+          </a:bodyPr>
+          <a:lstStyle/>
+          <a:p>
+            <a:pPr algn="l">
+              <a:lnSpc>
+                <a:spcPct val="135000"/>
+              </a:lnSpc>
+            </a:pPr>
+            <a:r>
+              <a:rPr sz="1400" b="0">
                 <a:solidFill>
                   <a:srgbClr val="FFFFFF"/>
                 </a:solidFill>
                 <a:latin typeface="Helvetica Neue"/>
               </a:rPr>
-              <a:t>When you introduce a client, the project gets opened through the Zebraish Project &amp; Payment Portal (or you just tell Joshua directly and he opens it) — it gets a unique Project ID, like ZB-00017.</a:t>
-            </a:r>
-          </a:p>
-          <a:p>
-            <a:pPr>
-              <a:lnSpc>
-                <a:spcPct val="125000"/>
-              </a:lnSpc>
-              <a:spcAft>
-                <a:spcPts val="1000"/>
-              </a:spcAft>
-            </a:pPr>
-            <a:r>
-              <a:rPr sz="1550" b="1">
-                <a:solidFill>
-                  <a:srgbClr val="4E9BF0"/>
-                </a:solidFill>
-                <a:latin typeface="Helvetica Neue"/>
-              </a:rPr>
-              <a:t>—  </a:t>
-            </a:r>
-            <a:r>
-              <a:rPr sz="1550">
-                <a:solidFill>
-                  <a:srgbClr val="FFFFFF"/>
-                </a:solidFill>
-                <a:latin typeface="Helvetica Neue"/>
-              </a:rPr>
-              <a:t>There's no personal referral code or link to manage or share.</a:t>
-            </a:r>
-          </a:p>
-          <a:p>
-            <a:pPr>
-              <a:lnSpc>
-                <a:spcPct val="125000"/>
-              </a:lnSpc>
-              <a:spcAft>
-                <a:spcPts val="1000"/>
-              </a:spcAft>
-            </a:pPr>
-            <a:r>
-              <a:rPr sz="1550" b="1">
-                <a:solidFill>
-                  <a:srgbClr val="4E9BF0"/>
-                </a:solidFill>
-                <a:latin typeface="Helvetica Neue"/>
-              </a:rPr>
-              <a:t>—  </a:t>
-            </a:r>
-            <a:r>
-              <a:rPr sz="1550">
-                <a:solidFill>
-                  <a:srgbClr val="FFFFFF"/>
-                </a:solidFill>
-                <a:latin typeface="Helvetica Neue"/>
-              </a:rPr>
-              <a:t>Commission isn't calculated by matching individual clients to you — it's based on all qualifying Zebraish payments received during your Term.</a:t>
+              <a:t>No arbitrary cap on what you can earn, and no fixed salary — compensation is commission-based for the Initial Term.</a:t>
             </a:r>
           </a:p>
         </p:txBody>
       </p:sp>
       <p:pic>
         <p:nvPicPr>
-          <p:cNvPr id="6" name="Picture 5" descr="logo-head.png"/>
+          <p:cNvPr id="13" name="Picture 12" descr="logo-head.png"/>
           <p:cNvPicPr>
             <a:picLocks noChangeAspect="1"/>
           </p:cNvPicPr>
@@ -4176,7 +4406,7 @@
       </p:pic>
       <p:sp>
         <p:nvSpPr>
-          <p:cNvPr id="7" name="TextBox 6"/>
+          <p:cNvPr id="14" name="TextBox 13"/>
           <p:cNvSpPr txBox="1"/>
           <p:nvPr/>
         </p:nvSpPr>
@@ -4215,7 +4445,7 @@
       </p:sp>
       <p:sp>
         <p:nvSpPr>
-          <p:cNvPr id="8" name="TextBox 7"/>
+          <p:cNvPr id="15" name="TextBox 14"/>
           <p:cNvSpPr txBox="1"/>
           <p:nvPr/>
         </p:nvSpPr>
@@ -4254,7 +4484,7 @@
       </p:sp>
       <p:cxnSp>
         <p:nvCxnSpPr>
-          <p:cNvPr id="9" name="Connector 8"/>
+          <p:cNvPr id="16" name="Connector 15"/>
           <p:cNvCxnSpPr/>
           <p:nvPr/>
         </p:nvCxnSpPr>
@@ -4386,7 +4616,7 @@
                 </a:solidFill>
                 <a:latin typeface="Helvetica Neue"/>
               </a:rPr>
-              <a:t>Commission, at a glance</a:t>
+              <a:t>Weekly payout — how it works</a:t>
             </a:r>
           </a:p>
         </p:txBody>
@@ -4428,254 +4658,20 @@
       </p:cxnSp>
       <p:sp>
         <p:nvSpPr>
-          <p:cNvPr id="5" name="TextBox 4"/>
-          <p:cNvSpPr txBox="1"/>
-          <p:nvPr/>
-        </p:nvSpPr>
-        <p:spPr>
-          <a:xfrm>
-            <a:off x="685800" y="2148840"/>
-            <a:ext cx="3605784" cy="1280160"/>
-          </a:xfrm>
-          <a:prstGeom prst="rect">
-            <a:avLst/>
-          </a:prstGeom>
-          <a:noFill/>
-        </p:spPr>
-        <p:txBody>
-          <a:bodyPr wrap="square" anchor="t" lIns="0" rIns="0" tIns="0" bIns="0">
-            <a:spAutoFit/>
-          </a:bodyPr>
-          <a:lstStyle/>
-          <a:p>
-            <a:pPr algn="l">
-              <a:lnSpc>
-                <a:spcPct val="115000"/>
-              </a:lnSpc>
-            </a:pPr>
-            <a:r>
-              <a:rPr sz="4600" b="1">
-                <a:solidFill>
-                  <a:srgbClr val="4E9BF0"/>
-                </a:solidFill>
-                <a:latin typeface="Helvetica Neue"/>
-              </a:rPr>
-              <a:t>10%</a:t>
-            </a:r>
-          </a:p>
-        </p:txBody>
-      </p:sp>
-      <p:sp>
-        <p:nvSpPr>
-          <p:cNvPr id="6" name="TextBox 5"/>
-          <p:cNvSpPr txBox="1"/>
-          <p:nvPr/>
-        </p:nvSpPr>
-        <p:spPr>
-          <a:xfrm>
-            <a:off x="685800" y="3246120"/>
-            <a:ext cx="3285744" cy="822960"/>
-          </a:xfrm>
-          <a:prstGeom prst="rect">
-            <a:avLst/>
-          </a:prstGeom>
-          <a:noFill/>
-        </p:spPr>
-        <p:txBody>
-          <a:bodyPr wrap="square" anchor="t" lIns="0" rIns="0" tIns="0" bIns="0">
-            <a:spAutoFit/>
-          </a:bodyPr>
-          <a:lstStyle/>
-          <a:p>
-            <a:pPr algn="l">
-              <a:lnSpc>
-                <a:spcPct val="130000"/>
-              </a:lnSpc>
-            </a:pPr>
-            <a:r>
-              <a:rPr sz="1350" b="0">
-                <a:solidFill>
-                  <a:srgbClr val="A6ACBA"/>
-                </a:solidFill>
-                <a:latin typeface="Helvetica Neue"/>
-              </a:rPr>
-              <a:t>of all qualifying Zebraish client payments received during your Term</a:t>
-            </a:r>
-          </a:p>
-        </p:txBody>
-      </p:sp>
-      <p:sp>
-        <p:nvSpPr>
-          <p:cNvPr id="7" name="TextBox 6"/>
-          <p:cNvSpPr txBox="1"/>
-          <p:nvPr/>
-        </p:nvSpPr>
-        <p:spPr>
-          <a:xfrm>
-            <a:off x="4291584" y="2148840"/>
-            <a:ext cx="3605784" cy="1280160"/>
-          </a:xfrm>
-          <a:prstGeom prst="rect">
-            <a:avLst/>
-          </a:prstGeom>
-          <a:noFill/>
-        </p:spPr>
-        <p:txBody>
-          <a:bodyPr wrap="square" anchor="t" lIns="0" rIns="0" tIns="0" bIns="0">
-            <a:spAutoFit/>
-          </a:bodyPr>
-          <a:lstStyle/>
-          <a:p>
-            <a:pPr algn="l">
-              <a:lnSpc>
-                <a:spcPct val="115000"/>
-              </a:lnSpc>
-            </a:pPr>
-            <a:r>
-              <a:rPr sz="4600" b="1">
-                <a:solidFill>
-                  <a:srgbClr val="4E9BF0"/>
-                </a:solidFill>
-                <a:latin typeface="Helvetica Neue"/>
-              </a:rPr>
-              <a:t>Weekly</a:t>
-            </a:r>
-          </a:p>
-        </p:txBody>
-      </p:sp>
-      <p:sp>
-        <p:nvSpPr>
-          <p:cNvPr id="8" name="TextBox 7"/>
-          <p:cNvSpPr txBox="1"/>
-          <p:nvPr/>
-        </p:nvSpPr>
-        <p:spPr>
-          <a:xfrm>
-            <a:off x="4291584" y="3246120"/>
-            <a:ext cx="3285744" cy="822960"/>
-          </a:xfrm>
-          <a:prstGeom prst="rect">
-            <a:avLst/>
-          </a:prstGeom>
-          <a:noFill/>
-        </p:spPr>
-        <p:txBody>
-          <a:bodyPr wrap="square" anchor="t" lIns="0" rIns="0" tIns="0" bIns="0">
-            <a:spAutoFit/>
-          </a:bodyPr>
-          <a:lstStyle/>
-          <a:p>
-            <a:pPr algn="l">
-              <a:lnSpc>
-                <a:spcPct val="130000"/>
-              </a:lnSpc>
-            </a:pPr>
-            <a:r>
-              <a:rPr sz="1350" b="0">
-                <a:solidFill>
-                  <a:srgbClr val="A6ACBA"/>
-                </a:solidFill>
-                <a:latin typeface="Helvetica Neue"/>
-              </a:rPr>
-              <a:t>commission is calculated and paid every single week</a:t>
-            </a:r>
-          </a:p>
-        </p:txBody>
-      </p:sp>
-      <p:sp>
-        <p:nvSpPr>
-          <p:cNvPr id="9" name="TextBox 8"/>
-          <p:cNvSpPr txBox="1"/>
-          <p:nvPr/>
-        </p:nvSpPr>
-        <p:spPr>
-          <a:xfrm>
-            <a:off x="7897368" y="2148840"/>
-            <a:ext cx="3605784" cy="1280160"/>
-          </a:xfrm>
-          <a:prstGeom prst="rect">
-            <a:avLst/>
-          </a:prstGeom>
-          <a:noFill/>
-        </p:spPr>
-        <p:txBody>
-          <a:bodyPr wrap="square" anchor="t" lIns="0" rIns="0" tIns="0" bIns="0">
-            <a:spAutoFit/>
-          </a:bodyPr>
-          <a:lstStyle/>
-          <a:p>
-            <a:pPr algn="l">
-              <a:lnSpc>
-                <a:spcPct val="115000"/>
-              </a:lnSpc>
-            </a:pPr>
-            <a:r>
-              <a:rPr sz="4600" b="1">
-                <a:solidFill>
-                  <a:srgbClr val="4E9BF0"/>
-                </a:solidFill>
-                <a:latin typeface="Helvetica Neue"/>
-              </a:rPr>
-              <a:t>Sunday</a:t>
-            </a:r>
-          </a:p>
-        </p:txBody>
-      </p:sp>
-      <p:sp>
-        <p:nvSpPr>
-          <p:cNvPr id="10" name="TextBox 9"/>
-          <p:cNvSpPr txBox="1"/>
-          <p:nvPr/>
-        </p:nvSpPr>
-        <p:spPr>
-          <a:xfrm>
-            <a:off x="7897368" y="3246120"/>
-            <a:ext cx="3285744" cy="822960"/>
-          </a:xfrm>
-          <a:prstGeom prst="rect">
-            <a:avLst/>
-          </a:prstGeom>
-          <a:noFill/>
-        </p:spPr>
-        <p:txBody>
-          <a:bodyPr wrap="square" anchor="t" lIns="0" rIns="0" tIns="0" bIns="0">
-            <a:spAutoFit/>
-          </a:bodyPr>
-          <a:lstStyle/>
-          <a:p>
-            <a:pPr algn="l">
-              <a:lnSpc>
-                <a:spcPct val="130000"/>
-              </a:lnSpc>
-            </a:pPr>
-            <a:r>
-              <a:rPr sz="1350" b="0">
-                <a:solidFill>
-                  <a:srgbClr val="A6ACBA"/>
-                </a:solidFill>
-                <a:latin typeface="Helvetica Neue"/>
-              </a:rPr>
-              <a:t>payout day — reviewed and sent by bank transfer</a:t>
-            </a:r>
-          </a:p>
-        </p:txBody>
-      </p:sp>
-      <p:sp>
-        <p:nvSpPr>
-          <p:cNvPr id="11" name="Rectangle 10"/>
+          <p:cNvPr id="5" name="Rectangle 4"/>
           <p:cNvSpPr/>
           <p:nvPr/>
         </p:nvSpPr>
         <p:spPr>
           <a:xfrm>
-            <a:off x="685800" y="5029200"/>
-            <a:ext cx="10817352" cy="18288"/>
+            <a:off x="685800" y="1920240"/>
+            <a:ext cx="10817352" cy="621792"/>
           </a:xfrm>
           <a:prstGeom prst="rect">
             <a:avLst/>
           </a:prstGeom>
           <a:solidFill>
-            <a:srgbClr val="2A2E3A"/>
+            <a:srgbClr val="1D68C0"/>
           </a:solidFill>
           <a:ln>
             <a:noFill/>
@@ -4706,14 +4702,258 @@
       </p:sp>
       <p:sp>
         <p:nvSpPr>
+          <p:cNvPr id="6" name="TextBox 5"/>
+          <p:cNvSpPr txBox="1"/>
+          <p:nvPr/>
+        </p:nvSpPr>
+        <p:spPr>
+          <a:xfrm>
+            <a:off x="868680" y="2029968"/>
+            <a:ext cx="4846320" cy="621792"/>
+          </a:xfrm>
+          <a:prstGeom prst="rect">
+            <a:avLst/>
+          </a:prstGeom>
+          <a:noFill/>
+        </p:spPr>
+        <p:txBody>
+          <a:bodyPr wrap="square" anchor="t" lIns="0" rIns="0" tIns="0" bIns="0">
+            <a:spAutoFit/>
+          </a:bodyPr>
+          <a:lstStyle/>
+          <a:p>
+            <a:pPr algn="l">
+              <a:lnSpc>
+                <a:spcPct val="115000"/>
+              </a:lnSpc>
+            </a:pPr>
+            <a:r>
+              <a:rPr sz="1250" b="1">
+                <a:solidFill>
+                  <a:srgbClr val="FFFFFF"/>
+                </a:solidFill>
+                <a:latin typeface="Helvetica Neue"/>
+              </a:rPr>
+              <a:t>Step</a:t>
+            </a:r>
+          </a:p>
+        </p:txBody>
+      </p:sp>
+      <p:sp>
+        <p:nvSpPr>
+          <p:cNvPr id="7" name="TextBox 6"/>
+          <p:cNvSpPr txBox="1"/>
+          <p:nvPr/>
+        </p:nvSpPr>
+        <p:spPr>
+          <a:xfrm>
+            <a:off x="5989320" y="2029968"/>
+            <a:ext cx="5422392" cy="621792"/>
+          </a:xfrm>
+          <a:prstGeom prst="rect">
+            <a:avLst/>
+          </a:prstGeom>
+          <a:noFill/>
+        </p:spPr>
+        <p:txBody>
+          <a:bodyPr wrap="square" anchor="t" lIns="0" rIns="0" tIns="0" bIns="0">
+            <a:spAutoFit/>
+          </a:bodyPr>
+          <a:lstStyle/>
+          <a:p>
+            <a:pPr algn="l">
+              <a:lnSpc>
+                <a:spcPct val="115000"/>
+              </a:lnSpc>
+            </a:pPr>
+            <a:r>
+              <a:rPr sz="1250" b="1">
+                <a:solidFill>
+                  <a:srgbClr val="FFFFFF"/>
+                </a:solidFill>
+                <a:latin typeface="Helvetica Neue"/>
+              </a:rPr>
+              <a:t>What happens</a:t>
+            </a:r>
+          </a:p>
+        </p:txBody>
+      </p:sp>
+      <p:sp>
+        <p:nvSpPr>
+          <p:cNvPr id="8" name="Rectangle 7"/>
+          <p:cNvSpPr/>
+          <p:nvPr/>
+        </p:nvSpPr>
+        <p:spPr>
+          <a:xfrm>
+            <a:off x="685800" y="2542032"/>
+            <a:ext cx="10817352" cy="621792"/>
+          </a:xfrm>
+          <a:prstGeom prst="rect">
+            <a:avLst/>
+          </a:prstGeom>
+          <a:solidFill>
+            <a:srgbClr val="141720"/>
+          </a:solidFill>
+          <a:ln>
+            <a:noFill/>
+          </a:ln>
+          <a:effectLst/>
+        </p:spPr>
+        <p:style>
+          <a:lnRef idx="1">
+            <a:schemeClr val="accent1"/>
+          </a:lnRef>
+          <a:fillRef idx="3">
+            <a:schemeClr val="accent1"/>
+          </a:fillRef>
+          <a:effectRef idx="2">
+            <a:schemeClr val="accent1"/>
+          </a:effectRef>
+          <a:fontRef idx="minor">
+            <a:schemeClr val="lt1"/>
+          </a:fontRef>
+        </p:style>
+        <p:txBody>
+          <a:bodyPr rtlCol="0" anchor="ctr"/>
+          <a:lstStyle/>
+          <a:p>
+            <a:pPr algn="ctr"/>
+          </a:p>
+        </p:txBody>
+      </p:sp>
+      <p:sp>
+        <p:nvSpPr>
+          <p:cNvPr id="9" name="TextBox 8"/>
+          <p:cNvSpPr txBox="1"/>
+          <p:nvPr/>
+        </p:nvSpPr>
+        <p:spPr>
+          <a:xfrm>
+            <a:off x="868680" y="2633472"/>
+            <a:ext cx="4846320" cy="621792"/>
+          </a:xfrm>
+          <a:prstGeom prst="rect">
+            <a:avLst/>
+          </a:prstGeom>
+          <a:noFill/>
+        </p:spPr>
+        <p:txBody>
+          <a:bodyPr wrap="square" anchor="t" lIns="0" rIns="0" tIns="0" bIns="0">
+            <a:spAutoFit/>
+          </a:bodyPr>
+          <a:lstStyle/>
+          <a:p>
+            <a:pPr algn="l">
+              <a:lnSpc>
+                <a:spcPct val="115000"/>
+              </a:lnSpc>
+            </a:pPr>
+            <a:r>
+              <a:rPr sz="1300" b="1">
+                <a:solidFill>
+                  <a:srgbClr val="FFFFFF"/>
+                </a:solidFill>
+                <a:latin typeface="Helvetica Neue"/>
+              </a:rPr>
+              <a:t>Sunday review</a:t>
+            </a:r>
+          </a:p>
+        </p:txBody>
+      </p:sp>
+      <p:sp>
+        <p:nvSpPr>
+          <p:cNvPr id="10" name="TextBox 9"/>
+          <p:cNvSpPr txBox="1"/>
+          <p:nvPr/>
+        </p:nvSpPr>
+        <p:spPr>
+          <a:xfrm>
+            <a:off x="5989320" y="2633472"/>
+            <a:ext cx="5422392" cy="621792"/>
+          </a:xfrm>
+          <a:prstGeom prst="rect">
+            <a:avLst/>
+          </a:prstGeom>
+          <a:noFill/>
+        </p:spPr>
+        <p:txBody>
+          <a:bodyPr wrap="square" anchor="t" lIns="0" rIns="0" tIns="0" bIns="0">
+            <a:spAutoFit/>
+          </a:bodyPr>
+          <a:lstStyle/>
+          <a:p>
+            <a:pPr algn="l">
+              <a:lnSpc>
+                <a:spcPct val="115000"/>
+              </a:lnSpc>
+            </a:pPr>
+            <a:r>
+              <a:rPr sz="1300" b="0">
+                <a:solidFill>
+                  <a:srgbClr val="A6ACBA"/>
+                </a:solidFill>
+                <a:latin typeface="Helvetica Neue"/>
+              </a:rPr>
+              <a:t>Joshua totals every qualifying payment Zebraish received Mon–Sun.</a:t>
+            </a:r>
+          </a:p>
+        </p:txBody>
+      </p:sp>
+      <p:sp>
+        <p:nvSpPr>
+          <p:cNvPr id="11" name="Rectangle 10"/>
+          <p:cNvSpPr/>
+          <p:nvPr/>
+        </p:nvSpPr>
+        <p:spPr>
+          <a:xfrm>
+            <a:off x="685800" y="3163824"/>
+            <a:ext cx="10817352" cy="621792"/>
+          </a:xfrm>
+          <a:prstGeom prst="rect">
+            <a:avLst/>
+          </a:prstGeom>
+          <a:solidFill>
+            <a:srgbClr val="0B0D12"/>
+          </a:solidFill>
+          <a:ln>
+            <a:noFill/>
+          </a:ln>
+          <a:effectLst/>
+        </p:spPr>
+        <p:style>
+          <a:lnRef idx="1">
+            <a:schemeClr val="accent1"/>
+          </a:lnRef>
+          <a:fillRef idx="3">
+            <a:schemeClr val="accent1"/>
+          </a:fillRef>
+          <a:effectRef idx="2">
+            <a:schemeClr val="accent1"/>
+          </a:effectRef>
+          <a:fontRef idx="minor">
+            <a:schemeClr val="lt1"/>
+          </a:fontRef>
+        </p:style>
+        <p:txBody>
+          <a:bodyPr rtlCol="0" anchor="ctr"/>
+          <a:lstStyle/>
+          <a:p>
+            <a:pPr algn="ctr"/>
+          </a:p>
+        </p:txBody>
+      </p:sp>
+      <p:sp>
+        <p:nvSpPr>
           <p:cNvPr id="12" name="TextBox 11"/>
           <p:cNvSpPr txBox="1"/>
           <p:nvPr/>
         </p:nvSpPr>
         <p:spPr>
           <a:xfrm>
-            <a:off x="685800" y="5212080"/>
-            <a:ext cx="10332720" cy="1005840"/>
+            <a:off x="868680" y="3255264"/>
+            <a:ext cx="4846320" cy="621792"/>
           </a:xfrm>
           <a:prstGeom prst="rect">
             <a:avLst/>
@@ -4728,24 +4968,464 @@
           <a:p>
             <a:pPr algn="l">
               <a:lnSpc>
-                <a:spcPct val="135000"/>
-              </a:lnSpc>
-            </a:pPr>
-            <a:r>
-              <a:rPr sz="1400" b="0">
+                <a:spcPct val="115000"/>
+              </a:lnSpc>
+            </a:pPr>
+            <a:r>
+              <a:rPr sz="1300" b="1">
                 <a:solidFill>
                   <a:srgbClr val="FFFFFF"/>
                 </a:solidFill>
                 <a:latin typeface="Helvetica Neue"/>
               </a:rPr>
-              <a:t>No arbitrary cap on what you can earn, and no fixed salary — compensation is commission-based for the Initial Term.</a:t>
-            </a:r>
-          </a:p>
-        </p:txBody>
-      </p:sp>
+              <a:t>Calculation</a:t>
+            </a:r>
+          </a:p>
+        </p:txBody>
+      </p:sp>
+      <p:sp>
+        <p:nvSpPr>
+          <p:cNvPr id="13" name="TextBox 12"/>
+          <p:cNvSpPr txBox="1"/>
+          <p:nvPr/>
+        </p:nvSpPr>
+        <p:spPr>
+          <a:xfrm>
+            <a:off x="5989320" y="3255264"/>
+            <a:ext cx="5422392" cy="621792"/>
+          </a:xfrm>
+          <a:prstGeom prst="rect">
+            <a:avLst/>
+          </a:prstGeom>
+          <a:noFill/>
+        </p:spPr>
+        <p:txBody>
+          <a:bodyPr wrap="square" anchor="t" lIns="0" rIns="0" tIns="0" bIns="0">
+            <a:spAutoFit/>
+          </a:bodyPr>
+          <a:lstStyle/>
+          <a:p>
+            <a:pPr algn="l">
+              <a:lnSpc>
+                <a:spcPct val="115000"/>
+              </a:lnSpc>
+            </a:pPr>
+            <a:r>
+              <a:rPr sz="1300" b="0">
+                <a:solidFill>
+                  <a:srgbClr val="A6ACBA"/>
+                </a:solidFill>
+                <a:latin typeface="Helvetica Neue"/>
+              </a:rPr>
+              <a:t>10% of that weekly total is your commission for the week.</a:t>
+            </a:r>
+          </a:p>
+        </p:txBody>
+      </p:sp>
+      <p:sp>
+        <p:nvSpPr>
+          <p:cNvPr id="14" name="Rectangle 13"/>
+          <p:cNvSpPr/>
+          <p:nvPr/>
+        </p:nvSpPr>
+        <p:spPr>
+          <a:xfrm>
+            <a:off x="685800" y="3785616"/>
+            <a:ext cx="10817352" cy="621792"/>
+          </a:xfrm>
+          <a:prstGeom prst="rect">
+            <a:avLst/>
+          </a:prstGeom>
+          <a:solidFill>
+            <a:srgbClr val="141720"/>
+          </a:solidFill>
+          <a:ln>
+            <a:noFill/>
+          </a:ln>
+          <a:effectLst/>
+        </p:spPr>
+        <p:style>
+          <a:lnRef idx="1">
+            <a:schemeClr val="accent1"/>
+          </a:lnRef>
+          <a:fillRef idx="3">
+            <a:schemeClr val="accent1"/>
+          </a:fillRef>
+          <a:effectRef idx="2">
+            <a:schemeClr val="accent1"/>
+          </a:effectRef>
+          <a:fontRef idx="minor">
+            <a:schemeClr val="lt1"/>
+          </a:fontRef>
+        </p:style>
+        <p:txBody>
+          <a:bodyPr rtlCol="0" anchor="ctr"/>
+          <a:lstStyle/>
+          <a:p>
+            <a:pPr algn="ctr"/>
+          </a:p>
+        </p:txBody>
+      </p:sp>
+      <p:sp>
+        <p:nvSpPr>
+          <p:cNvPr id="15" name="TextBox 14"/>
+          <p:cNvSpPr txBox="1"/>
+          <p:nvPr/>
+        </p:nvSpPr>
+        <p:spPr>
+          <a:xfrm>
+            <a:off x="868680" y="3877056"/>
+            <a:ext cx="4846320" cy="621792"/>
+          </a:xfrm>
+          <a:prstGeom prst="rect">
+            <a:avLst/>
+          </a:prstGeom>
+          <a:noFill/>
+        </p:spPr>
+        <p:txBody>
+          <a:bodyPr wrap="square" anchor="t" lIns="0" rIns="0" tIns="0" bIns="0">
+            <a:spAutoFit/>
+          </a:bodyPr>
+          <a:lstStyle/>
+          <a:p>
+            <a:pPr algn="l">
+              <a:lnSpc>
+                <a:spcPct val="115000"/>
+              </a:lnSpc>
+            </a:pPr>
+            <a:r>
+              <a:rPr sz="1300" b="1">
+                <a:solidFill>
+                  <a:srgbClr val="FFFFFF"/>
+                </a:solidFill>
+                <a:latin typeface="Helvetica Neue"/>
+              </a:rPr>
+              <a:t>Payment</a:t>
+            </a:r>
+          </a:p>
+        </p:txBody>
+      </p:sp>
+      <p:sp>
+        <p:nvSpPr>
+          <p:cNvPr id="16" name="TextBox 15"/>
+          <p:cNvSpPr txBox="1"/>
+          <p:nvPr/>
+        </p:nvSpPr>
+        <p:spPr>
+          <a:xfrm>
+            <a:off x="5989320" y="3877056"/>
+            <a:ext cx="5422392" cy="621792"/>
+          </a:xfrm>
+          <a:prstGeom prst="rect">
+            <a:avLst/>
+          </a:prstGeom>
+          <a:noFill/>
+        </p:spPr>
+        <p:txBody>
+          <a:bodyPr wrap="square" anchor="t" lIns="0" rIns="0" tIns="0" bIns="0">
+            <a:spAutoFit/>
+          </a:bodyPr>
+          <a:lstStyle/>
+          <a:p>
+            <a:pPr algn="l">
+              <a:lnSpc>
+                <a:spcPct val="115000"/>
+              </a:lnSpc>
+            </a:pPr>
+            <a:r>
+              <a:rPr sz="1300" b="0">
+                <a:solidFill>
+                  <a:srgbClr val="A6ACBA"/>
+                </a:solidFill>
+                <a:latin typeface="Helvetica Neue"/>
+              </a:rPr>
+              <a:t>Sent by bank transfer the same day, or the next business day if a Sunday transfer isn't possible.</a:t>
+            </a:r>
+          </a:p>
+        </p:txBody>
+      </p:sp>
+      <p:sp>
+        <p:nvSpPr>
+          <p:cNvPr id="17" name="Rectangle 16"/>
+          <p:cNvSpPr/>
+          <p:nvPr/>
+        </p:nvSpPr>
+        <p:spPr>
+          <a:xfrm>
+            <a:off x="685800" y="4407408"/>
+            <a:ext cx="10817352" cy="621792"/>
+          </a:xfrm>
+          <a:prstGeom prst="rect">
+            <a:avLst/>
+          </a:prstGeom>
+          <a:solidFill>
+            <a:srgbClr val="0B0D12"/>
+          </a:solidFill>
+          <a:ln>
+            <a:noFill/>
+          </a:ln>
+          <a:effectLst/>
+        </p:spPr>
+        <p:style>
+          <a:lnRef idx="1">
+            <a:schemeClr val="accent1"/>
+          </a:lnRef>
+          <a:fillRef idx="3">
+            <a:schemeClr val="accent1"/>
+          </a:fillRef>
+          <a:effectRef idx="2">
+            <a:schemeClr val="accent1"/>
+          </a:effectRef>
+          <a:fontRef idx="minor">
+            <a:schemeClr val="lt1"/>
+          </a:fontRef>
+        </p:style>
+        <p:txBody>
+          <a:bodyPr rtlCol="0" anchor="ctr"/>
+          <a:lstStyle/>
+          <a:p>
+            <a:pPr algn="ctr"/>
+          </a:p>
+        </p:txBody>
+      </p:sp>
+      <p:sp>
+        <p:nvSpPr>
+          <p:cNvPr id="18" name="TextBox 17"/>
+          <p:cNvSpPr txBox="1"/>
+          <p:nvPr/>
+        </p:nvSpPr>
+        <p:spPr>
+          <a:xfrm>
+            <a:off x="868680" y="4498848"/>
+            <a:ext cx="4846320" cy="621792"/>
+          </a:xfrm>
+          <a:prstGeom prst="rect">
+            <a:avLst/>
+          </a:prstGeom>
+          <a:noFill/>
+        </p:spPr>
+        <p:txBody>
+          <a:bodyPr wrap="square" anchor="t" lIns="0" rIns="0" tIns="0" bIns="0">
+            <a:spAutoFit/>
+          </a:bodyPr>
+          <a:lstStyle/>
+          <a:p>
+            <a:pPr algn="l">
+              <a:lnSpc>
+                <a:spcPct val="115000"/>
+              </a:lnSpc>
+            </a:pPr>
+            <a:r>
+              <a:rPr sz="1300" b="1">
+                <a:solidFill>
+                  <a:srgbClr val="FFFFFF"/>
+                </a:solidFill>
+                <a:latin typeface="Helvetica Neue"/>
+              </a:rPr>
+              <a:t>Exclusions</a:t>
+            </a:r>
+          </a:p>
+        </p:txBody>
+      </p:sp>
+      <p:sp>
+        <p:nvSpPr>
+          <p:cNvPr id="19" name="TextBox 18"/>
+          <p:cNvSpPr txBox="1"/>
+          <p:nvPr/>
+        </p:nvSpPr>
+        <p:spPr>
+          <a:xfrm>
+            <a:off x="5989320" y="4498848"/>
+            <a:ext cx="5422392" cy="621792"/>
+          </a:xfrm>
+          <a:prstGeom prst="rect">
+            <a:avLst/>
+          </a:prstGeom>
+          <a:noFill/>
+        </p:spPr>
+        <p:txBody>
+          <a:bodyPr wrap="square" anchor="t" lIns="0" rIns="0" tIns="0" bIns="0">
+            <a:spAutoFit/>
+          </a:bodyPr>
+          <a:lstStyle/>
+          <a:p>
+            <a:pPr algn="l">
+              <a:lnSpc>
+                <a:spcPct val="115000"/>
+              </a:lnSpc>
+            </a:pPr>
+            <a:r>
+              <a:rPr sz="1300" b="0">
+                <a:solidFill>
+                  <a:srgbClr val="A6ACBA"/>
+                </a:solidFill>
+                <a:latin typeface="Helvetica Neue"/>
+              </a:rPr>
+              <a:t>Refunds, chargebacks, cancelled or fraudulent orders don't count.</a:t>
+            </a:r>
+          </a:p>
+        </p:txBody>
+      </p:sp>
+      <p:sp>
+        <p:nvSpPr>
+          <p:cNvPr id="20" name="Rectangle 19"/>
+          <p:cNvSpPr/>
+          <p:nvPr/>
+        </p:nvSpPr>
+        <p:spPr>
+          <a:xfrm>
+            <a:off x="685800" y="5029200"/>
+            <a:ext cx="10817352" cy="621792"/>
+          </a:xfrm>
+          <a:prstGeom prst="rect">
+            <a:avLst/>
+          </a:prstGeom>
+          <a:solidFill>
+            <a:srgbClr val="141720"/>
+          </a:solidFill>
+          <a:ln>
+            <a:noFill/>
+          </a:ln>
+          <a:effectLst/>
+        </p:spPr>
+        <p:style>
+          <a:lnRef idx="1">
+            <a:schemeClr val="accent1"/>
+          </a:lnRef>
+          <a:fillRef idx="3">
+            <a:schemeClr val="accent1"/>
+          </a:fillRef>
+          <a:effectRef idx="2">
+            <a:schemeClr val="accent1"/>
+          </a:effectRef>
+          <a:fontRef idx="minor">
+            <a:schemeClr val="lt1"/>
+          </a:fontRef>
+        </p:style>
+        <p:txBody>
+          <a:bodyPr rtlCol="0" anchor="ctr"/>
+          <a:lstStyle/>
+          <a:p>
+            <a:pPr algn="ctr"/>
+          </a:p>
+        </p:txBody>
+      </p:sp>
+      <p:sp>
+        <p:nvSpPr>
+          <p:cNvPr id="21" name="TextBox 20"/>
+          <p:cNvSpPr txBox="1"/>
+          <p:nvPr/>
+        </p:nvSpPr>
+        <p:spPr>
+          <a:xfrm>
+            <a:off x="868680" y="5120640"/>
+            <a:ext cx="4846320" cy="621792"/>
+          </a:xfrm>
+          <a:prstGeom prst="rect">
+            <a:avLst/>
+          </a:prstGeom>
+          <a:noFill/>
+        </p:spPr>
+        <p:txBody>
+          <a:bodyPr wrap="square" anchor="t" lIns="0" rIns="0" tIns="0" bIns="0">
+            <a:spAutoFit/>
+          </a:bodyPr>
+          <a:lstStyle/>
+          <a:p>
+            <a:pPr algn="l">
+              <a:lnSpc>
+                <a:spcPct val="115000"/>
+              </a:lnSpc>
+            </a:pPr>
+            <a:r>
+              <a:rPr sz="1300" b="1">
+                <a:solidFill>
+                  <a:srgbClr val="FFFFFF"/>
+                </a:solidFill>
+                <a:latin typeface="Helvetica Neue"/>
+              </a:rPr>
+              <a:t>Example</a:t>
+            </a:r>
+          </a:p>
+        </p:txBody>
+      </p:sp>
+      <p:sp>
+        <p:nvSpPr>
+          <p:cNvPr id="22" name="TextBox 21"/>
+          <p:cNvSpPr txBox="1"/>
+          <p:nvPr/>
+        </p:nvSpPr>
+        <p:spPr>
+          <a:xfrm>
+            <a:off x="5989320" y="5120640"/>
+            <a:ext cx="5422392" cy="621792"/>
+          </a:xfrm>
+          <a:prstGeom prst="rect">
+            <a:avLst/>
+          </a:prstGeom>
+          <a:noFill/>
+        </p:spPr>
+        <p:txBody>
+          <a:bodyPr wrap="square" anchor="t" lIns="0" rIns="0" tIns="0" bIns="0">
+            <a:spAutoFit/>
+          </a:bodyPr>
+          <a:lstStyle/>
+          <a:p>
+            <a:pPr algn="l">
+              <a:lnSpc>
+                <a:spcPct val="115000"/>
+              </a:lnSpc>
+            </a:pPr>
+            <a:r>
+              <a:rPr sz="1300" b="0">
+                <a:solidFill>
+                  <a:srgbClr val="A6ACBA"/>
+                </a:solidFill>
+                <a:latin typeface="Helvetica Neue"/>
+              </a:rPr>
+              <a:t>₦485,000 in qualifying payments that week → ₦48,500 commission paid to you that Sunday.</a:t>
+            </a:r>
+          </a:p>
+        </p:txBody>
+      </p:sp>
+      <p:cxnSp>
+        <p:nvCxnSpPr>
+          <p:cNvPr id="23" name="Connector 22"/>
+          <p:cNvCxnSpPr/>
+          <p:nvPr/>
+        </p:nvCxnSpPr>
+        <p:spPr>
+          <a:xfrm>
+            <a:off x="685800" y="1920240"/>
+            <a:ext cx="10817352" cy="0"/>
+          </a:xfrm>
+          <a:prstGeom prst="line">
+            <a:avLst/>
+          </a:prstGeom>
+          <a:ln w="12700">
+            <a:solidFill>
+              <a:srgbClr val="2A2E3A"/>
+            </a:solidFill>
+          </a:ln>
+        </p:spPr>
+        <p:style>
+          <a:lnRef idx="2">
+            <a:schemeClr val="accent1"/>
+          </a:lnRef>
+          <a:fillRef idx="0">
+            <a:schemeClr val="accent1"/>
+          </a:fillRef>
+          <a:effectRef idx="1">
+            <a:schemeClr val="accent1"/>
+          </a:effectRef>
+          <a:fontRef idx="minor">
+            <a:schemeClr val="tx1"/>
+          </a:fontRef>
+        </p:style>
+      </p:cxnSp>
       <p:pic>
         <p:nvPicPr>
-          <p:cNvPr id="13" name="Picture 12" descr="logo-head.png"/>
+          <p:cNvPr id="24" name="Picture 23" descr="logo-head.png"/>
           <p:cNvPicPr>
             <a:picLocks noChangeAspect="1"/>
           </p:cNvPicPr>
@@ -4769,7 +5449,7 @@
       </p:pic>
       <p:sp>
         <p:nvSpPr>
-          <p:cNvPr id="14" name="TextBox 13"/>
+          <p:cNvPr id="25" name="TextBox 24"/>
           <p:cNvSpPr txBox="1"/>
           <p:nvPr/>
         </p:nvSpPr>
@@ -4808,7 +5488,7 @@
       </p:sp>
       <p:sp>
         <p:nvSpPr>
-          <p:cNvPr id="15" name="TextBox 14"/>
+          <p:cNvPr id="26" name="TextBox 25"/>
           <p:cNvSpPr txBox="1"/>
           <p:nvPr/>
         </p:nvSpPr>
@@ -4847,7 +5527,7 @@
       </p:sp>
       <p:cxnSp>
         <p:nvCxnSpPr>
-          <p:cNvPr id="16" name="Connector 15"/>
+          <p:cNvPr id="27" name="Connector 26"/>
           <p:cNvCxnSpPr/>
           <p:nvPr/>
         </p:nvCxnSpPr>
@@ -4969,7 +5649,7 @@
           <a:p>
             <a:pPr algn="l">
               <a:lnSpc>
-                <a:spcPct val="115000"/>
+                <a:spcPct val="105000"/>
               </a:lnSpc>
             </a:pPr>
             <a:r>
@@ -4979,7 +5659,7 @@
                 </a:solidFill>
                 <a:latin typeface="Helvetica Neue"/>
               </a:rPr>
-              <a:t>Weekly payout — how it works</a:t>
+              <a:t>Your Collaborator Dashboard</a:t>
             </a:r>
           </a:p>
         </p:txBody>
@@ -5021,774 +5701,114 @@
       </p:cxnSp>
       <p:sp>
         <p:nvSpPr>
-          <p:cNvPr id="5" name="Rectangle 4"/>
-          <p:cNvSpPr/>
-          <p:nvPr/>
-        </p:nvSpPr>
-        <p:spPr>
-          <a:xfrm>
-            <a:off x="685800" y="1920240"/>
-            <a:ext cx="10817352" cy="621792"/>
-          </a:xfrm>
-          <a:prstGeom prst="rect">
-            <a:avLst/>
-          </a:prstGeom>
-          <a:solidFill>
-            <a:srgbClr val="1D68C0"/>
-          </a:solidFill>
-          <a:ln>
-            <a:noFill/>
-          </a:ln>
-          <a:effectLst/>
-        </p:spPr>
-        <p:style>
-          <a:lnRef idx="1">
-            <a:schemeClr val="accent1"/>
-          </a:lnRef>
-          <a:fillRef idx="3">
-            <a:schemeClr val="accent1"/>
-          </a:fillRef>
-          <a:effectRef idx="2">
-            <a:schemeClr val="accent1"/>
-          </a:effectRef>
-          <a:fontRef idx="minor">
-            <a:schemeClr val="lt1"/>
-          </a:fontRef>
-        </p:style>
-        <p:txBody>
-          <a:bodyPr rtlCol="0" anchor="ctr"/>
-          <a:lstStyle/>
-          <a:p>
-            <a:pPr algn="ctr"/>
-          </a:p>
-        </p:txBody>
-      </p:sp>
-      <p:sp>
-        <p:nvSpPr>
-          <p:cNvPr id="6" name="TextBox 5"/>
-          <p:cNvSpPr txBox="1"/>
-          <p:nvPr/>
-        </p:nvSpPr>
-        <p:spPr>
-          <a:xfrm>
-            <a:off x="868680" y="2029968"/>
-            <a:ext cx="4846320" cy="621792"/>
-          </a:xfrm>
-          <a:prstGeom prst="rect">
-            <a:avLst/>
-          </a:prstGeom>
-          <a:noFill/>
-        </p:spPr>
-        <p:txBody>
-          <a:bodyPr wrap="square" anchor="t" lIns="0" rIns="0" tIns="0" bIns="0">
-            <a:spAutoFit/>
-          </a:bodyPr>
-          <a:lstStyle/>
-          <a:p>
-            <a:pPr algn="l">
-              <a:lnSpc>
-                <a:spcPct val="115000"/>
-              </a:lnSpc>
-            </a:pPr>
-            <a:r>
-              <a:rPr sz="1250" b="1">
+          <p:cNvPr id="5" name="TextBox 4"/>
+          <p:cNvSpPr txBox="1"/>
+          <p:nvPr/>
+        </p:nvSpPr>
+        <p:spPr>
+          <a:xfrm>
+            <a:off x="685800" y="1965960"/>
+            <a:ext cx="10424160" cy="3931920"/>
+          </a:xfrm>
+          <a:prstGeom prst="rect">
+            <a:avLst/>
+          </a:prstGeom>
+          <a:noFill/>
+        </p:spPr>
+        <p:txBody>
+          <a:bodyPr wrap="square" lIns="0" rIns="0">
+            <a:spAutoFit/>
+          </a:bodyPr>
+          <a:lstStyle/>
+          <a:p>
+            <a:pPr>
+              <a:lnSpc>
+                <a:spcPct val="125000"/>
+              </a:lnSpc>
+              <a:spcAft>
+                <a:spcPts val="1000"/>
+              </a:spcAft>
+            </a:pPr>
+            <a:r>
+              <a:rPr sz="1550" b="1">
+                <a:solidFill>
+                  <a:srgbClr val="4E9BF0"/>
+                </a:solidFill>
+                <a:latin typeface="Helvetica Neue"/>
+              </a:rPr>
+              <a:t>—  </a:t>
+            </a:r>
+            <a:r>
+              <a:rPr sz="1550">
                 <a:solidFill>
                   <a:srgbClr val="FFFFFF"/>
                 </a:solidFill>
                 <a:latin typeface="Helvetica Neue"/>
               </a:rPr>
-              <a:t>Step</a:t>
-            </a:r>
-          </a:p>
-        </p:txBody>
-      </p:sp>
-      <p:sp>
-        <p:nvSpPr>
-          <p:cNvPr id="7" name="TextBox 6"/>
-          <p:cNvSpPr txBox="1"/>
-          <p:nvPr/>
-        </p:nvSpPr>
-        <p:spPr>
-          <a:xfrm>
-            <a:off x="5989320" y="2029968"/>
-            <a:ext cx="5422392" cy="621792"/>
-          </a:xfrm>
-          <a:prstGeom prst="rect">
-            <a:avLst/>
-          </a:prstGeom>
-          <a:noFill/>
-        </p:spPr>
-        <p:txBody>
-          <a:bodyPr wrap="square" anchor="t" lIns="0" rIns="0" tIns="0" bIns="0">
-            <a:spAutoFit/>
-          </a:bodyPr>
-          <a:lstStyle/>
-          <a:p>
-            <a:pPr algn="l">
-              <a:lnSpc>
-                <a:spcPct val="115000"/>
-              </a:lnSpc>
-            </a:pPr>
-            <a:r>
-              <a:rPr sz="1250" b="1">
+              <a:t>A private view of your weekly commission — Project IDs, amounts, and PAID / PENDING status.</a:t>
+            </a:r>
+          </a:p>
+          <a:p>
+            <a:pPr>
+              <a:lnSpc>
+                <a:spcPct val="125000"/>
+              </a:lnSpc>
+              <a:spcAft>
+                <a:spcPts val="1000"/>
+              </a:spcAft>
+            </a:pPr>
+            <a:r>
+              <a:rPr sz="1550" b="1">
+                <a:solidFill>
+                  <a:srgbClr val="4E9BF0"/>
+                </a:solidFill>
+                <a:latin typeface="Helvetica Neue"/>
+              </a:rPr>
+              <a:t>—  </a:t>
+            </a:r>
+            <a:r>
+              <a:rPr sz="1550">
                 <a:solidFill>
                   <a:srgbClr val="FFFFFF"/>
                 </a:solidFill>
                 <a:latin typeface="Helvetica Neue"/>
               </a:rPr>
-              <a:t>What happens</a:t>
-            </a:r>
-          </a:p>
-        </p:txBody>
-      </p:sp>
-      <p:sp>
-        <p:nvSpPr>
-          <p:cNvPr id="8" name="Rectangle 7"/>
-          <p:cNvSpPr/>
-          <p:nvPr/>
-        </p:nvSpPr>
-        <p:spPr>
-          <a:xfrm>
-            <a:off x="685800" y="2542032"/>
-            <a:ext cx="10817352" cy="621792"/>
-          </a:xfrm>
-          <a:prstGeom prst="rect">
-            <a:avLst/>
-          </a:prstGeom>
-          <a:solidFill>
-            <a:srgbClr val="141720"/>
-          </a:solidFill>
-          <a:ln>
-            <a:noFill/>
-          </a:ln>
-          <a:effectLst/>
-        </p:spPr>
-        <p:style>
-          <a:lnRef idx="1">
-            <a:schemeClr val="accent1"/>
-          </a:lnRef>
-          <a:fillRef idx="3">
-            <a:schemeClr val="accent1"/>
-          </a:fillRef>
-          <a:effectRef idx="2">
-            <a:schemeClr val="accent1"/>
-          </a:effectRef>
-          <a:fontRef idx="minor">
-            <a:schemeClr val="lt1"/>
-          </a:fontRef>
-        </p:style>
-        <p:txBody>
-          <a:bodyPr rtlCol="0" anchor="ctr"/>
-          <a:lstStyle/>
-          <a:p>
-            <a:pPr algn="ctr"/>
-          </a:p>
-        </p:txBody>
-      </p:sp>
-      <p:sp>
-        <p:nvSpPr>
-          <p:cNvPr id="9" name="TextBox 8"/>
-          <p:cNvSpPr txBox="1"/>
-          <p:nvPr/>
-        </p:nvSpPr>
-        <p:spPr>
-          <a:xfrm>
-            <a:off x="868680" y="2633472"/>
-            <a:ext cx="4846320" cy="621792"/>
-          </a:xfrm>
-          <a:prstGeom prst="rect">
-            <a:avLst/>
-          </a:prstGeom>
-          <a:noFill/>
-        </p:spPr>
-        <p:txBody>
-          <a:bodyPr wrap="square" anchor="t" lIns="0" rIns="0" tIns="0" bIns="0">
-            <a:spAutoFit/>
-          </a:bodyPr>
-          <a:lstStyle/>
-          <a:p>
-            <a:pPr algn="l">
-              <a:lnSpc>
-                <a:spcPct val="115000"/>
-              </a:lnSpc>
-            </a:pPr>
-            <a:r>
-              <a:rPr sz="1300" b="1">
+              <a:t>You'll see enough to verify every payment is calculated correctly, without Zebraish's client contact details being exposed to you.</a:t>
+            </a:r>
+          </a:p>
+          <a:p>
+            <a:pPr>
+              <a:lnSpc>
+                <a:spcPct val="125000"/>
+              </a:lnSpc>
+              <a:spcAft>
+                <a:spcPts val="1000"/>
+              </a:spcAft>
+            </a:pPr>
+            <a:r>
+              <a:rPr sz="1550" b="1">
+                <a:solidFill>
+                  <a:srgbClr val="4E9BF0"/>
+                </a:solidFill>
+                <a:latin typeface="Helvetica Neue"/>
+              </a:rPr>
+              <a:t>—  </a:t>
+            </a:r>
+            <a:r>
+              <a:rPr sz="1550">
                 <a:solidFill>
                   <a:srgbClr val="FFFFFF"/>
                 </a:solidFill>
                 <a:latin typeface="Helvetica Neue"/>
               </a:rPr>
-              <a:t>Sunday review</a:t>
-            </a:r>
-          </a:p>
-        </p:txBody>
-      </p:sp>
-      <p:sp>
-        <p:nvSpPr>
-          <p:cNvPr id="10" name="TextBox 9"/>
-          <p:cNvSpPr txBox="1"/>
-          <p:nvPr/>
-        </p:nvSpPr>
-        <p:spPr>
-          <a:xfrm>
-            <a:off x="5989320" y="2633472"/>
-            <a:ext cx="5422392" cy="621792"/>
-          </a:xfrm>
-          <a:prstGeom prst="rect">
-            <a:avLst/>
-          </a:prstGeom>
-          <a:noFill/>
-        </p:spPr>
-        <p:txBody>
-          <a:bodyPr wrap="square" anchor="t" lIns="0" rIns="0" tIns="0" bIns="0">
-            <a:spAutoFit/>
-          </a:bodyPr>
-          <a:lstStyle/>
-          <a:p>
-            <a:pPr algn="l">
-              <a:lnSpc>
-                <a:spcPct val="115000"/>
-              </a:lnSpc>
-            </a:pPr>
-            <a:r>
-              <a:rPr sz="1300" b="0">
-                <a:solidFill>
-                  <a:srgbClr val="A6ACBA"/>
-                </a:solidFill>
-                <a:latin typeface="Helvetica Neue"/>
-              </a:rPr>
-              <a:t>Joshua totals every qualifying payment Zebraish received Mon–Sun.</a:t>
-            </a:r>
-          </a:p>
-        </p:txBody>
-      </p:sp>
-      <p:sp>
-        <p:nvSpPr>
-          <p:cNvPr id="11" name="Rectangle 10"/>
-          <p:cNvSpPr/>
-          <p:nvPr/>
-        </p:nvSpPr>
-        <p:spPr>
-          <a:xfrm>
-            <a:off x="685800" y="3163824"/>
-            <a:ext cx="10817352" cy="621792"/>
-          </a:xfrm>
-          <a:prstGeom prst="rect">
-            <a:avLst/>
-          </a:prstGeom>
-          <a:solidFill>
-            <a:srgbClr val="0B0D12"/>
-          </a:solidFill>
-          <a:ln>
-            <a:noFill/>
-          </a:ln>
-          <a:effectLst/>
-        </p:spPr>
-        <p:style>
-          <a:lnRef idx="1">
-            <a:schemeClr val="accent1"/>
-          </a:lnRef>
-          <a:fillRef idx="3">
-            <a:schemeClr val="accent1"/>
-          </a:fillRef>
-          <a:effectRef idx="2">
-            <a:schemeClr val="accent1"/>
-          </a:effectRef>
-          <a:fontRef idx="minor">
-            <a:schemeClr val="lt1"/>
-          </a:fontRef>
-        </p:style>
-        <p:txBody>
-          <a:bodyPr rtlCol="0" anchor="ctr"/>
-          <a:lstStyle/>
-          <a:p>
-            <a:pPr algn="ctr"/>
-          </a:p>
-        </p:txBody>
-      </p:sp>
-      <p:sp>
-        <p:nvSpPr>
-          <p:cNvPr id="12" name="TextBox 11"/>
-          <p:cNvSpPr txBox="1"/>
-          <p:nvPr/>
-        </p:nvSpPr>
-        <p:spPr>
-          <a:xfrm>
-            <a:off x="868680" y="3255264"/>
-            <a:ext cx="4846320" cy="621792"/>
-          </a:xfrm>
-          <a:prstGeom prst="rect">
-            <a:avLst/>
-          </a:prstGeom>
-          <a:noFill/>
-        </p:spPr>
-        <p:txBody>
-          <a:bodyPr wrap="square" anchor="t" lIns="0" rIns="0" tIns="0" bIns="0">
-            <a:spAutoFit/>
-          </a:bodyPr>
-          <a:lstStyle/>
-          <a:p>
-            <a:pPr algn="l">
-              <a:lnSpc>
-                <a:spcPct val="115000"/>
-              </a:lnSpc>
-            </a:pPr>
-            <a:r>
-              <a:rPr sz="1300" b="1">
-                <a:solidFill>
-                  <a:srgbClr val="FFFFFF"/>
-                </a:solidFill>
-                <a:latin typeface="Helvetica Neue"/>
-              </a:rPr>
-              <a:t>Calculation</a:t>
-            </a:r>
-          </a:p>
-        </p:txBody>
-      </p:sp>
-      <p:sp>
-        <p:nvSpPr>
-          <p:cNvPr id="13" name="TextBox 12"/>
-          <p:cNvSpPr txBox="1"/>
-          <p:nvPr/>
-        </p:nvSpPr>
-        <p:spPr>
-          <a:xfrm>
-            <a:off x="5989320" y="3255264"/>
-            <a:ext cx="5422392" cy="621792"/>
-          </a:xfrm>
-          <a:prstGeom prst="rect">
-            <a:avLst/>
-          </a:prstGeom>
-          <a:noFill/>
-        </p:spPr>
-        <p:txBody>
-          <a:bodyPr wrap="square" anchor="t" lIns="0" rIns="0" tIns="0" bIns="0">
-            <a:spAutoFit/>
-          </a:bodyPr>
-          <a:lstStyle/>
-          <a:p>
-            <a:pPr algn="l">
-              <a:lnSpc>
-                <a:spcPct val="115000"/>
-              </a:lnSpc>
-            </a:pPr>
-            <a:r>
-              <a:rPr sz="1300" b="0">
-                <a:solidFill>
-                  <a:srgbClr val="A6ACBA"/>
-                </a:solidFill>
-                <a:latin typeface="Helvetica Neue"/>
-              </a:rPr>
-              <a:t>10% of that weekly total is your commission for the week.</a:t>
-            </a:r>
-          </a:p>
-        </p:txBody>
-      </p:sp>
-      <p:sp>
-        <p:nvSpPr>
-          <p:cNvPr id="14" name="Rectangle 13"/>
-          <p:cNvSpPr/>
-          <p:nvPr/>
-        </p:nvSpPr>
-        <p:spPr>
-          <a:xfrm>
-            <a:off x="685800" y="3785616"/>
-            <a:ext cx="10817352" cy="621792"/>
-          </a:xfrm>
-          <a:prstGeom prst="rect">
-            <a:avLst/>
-          </a:prstGeom>
-          <a:solidFill>
-            <a:srgbClr val="141720"/>
-          </a:solidFill>
-          <a:ln>
-            <a:noFill/>
-          </a:ln>
-          <a:effectLst/>
-        </p:spPr>
-        <p:style>
-          <a:lnRef idx="1">
-            <a:schemeClr val="accent1"/>
-          </a:lnRef>
-          <a:fillRef idx="3">
-            <a:schemeClr val="accent1"/>
-          </a:fillRef>
-          <a:effectRef idx="2">
-            <a:schemeClr val="accent1"/>
-          </a:effectRef>
-          <a:fontRef idx="minor">
-            <a:schemeClr val="lt1"/>
-          </a:fontRef>
-        </p:style>
-        <p:txBody>
-          <a:bodyPr rtlCol="0" anchor="ctr"/>
-          <a:lstStyle/>
-          <a:p>
-            <a:pPr algn="ctr"/>
-          </a:p>
-        </p:txBody>
-      </p:sp>
-      <p:sp>
-        <p:nvSpPr>
-          <p:cNvPr id="15" name="TextBox 14"/>
-          <p:cNvSpPr txBox="1"/>
-          <p:nvPr/>
-        </p:nvSpPr>
-        <p:spPr>
-          <a:xfrm>
-            <a:off x="868680" y="3877056"/>
-            <a:ext cx="4846320" cy="621792"/>
-          </a:xfrm>
-          <a:prstGeom prst="rect">
-            <a:avLst/>
-          </a:prstGeom>
-          <a:noFill/>
-        </p:spPr>
-        <p:txBody>
-          <a:bodyPr wrap="square" anchor="t" lIns="0" rIns="0" tIns="0" bIns="0">
-            <a:spAutoFit/>
-          </a:bodyPr>
-          <a:lstStyle/>
-          <a:p>
-            <a:pPr algn="l">
-              <a:lnSpc>
-                <a:spcPct val="115000"/>
-              </a:lnSpc>
-            </a:pPr>
-            <a:r>
-              <a:rPr sz="1300" b="1">
-                <a:solidFill>
-                  <a:srgbClr val="FFFFFF"/>
-                </a:solidFill>
-                <a:latin typeface="Helvetica Neue"/>
-              </a:rPr>
-              <a:t>Payment</a:t>
-            </a:r>
-          </a:p>
-        </p:txBody>
-      </p:sp>
-      <p:sp>
-        <p:nvSpPr>
-          <p:cNvPr id="16" name="TextBox 15"/>
-          <p:cNvSpPr txBox="1"/>
-          <p:nvPr/>
-        </p:nvSpPr>
-        <p:spPr>
-          <a:xfrm>
-            <a:off x="5989320" y="3877056"/>
-            <a:ext cx="5422392" cy="621792"/>
-          </a:xfrm>
-          <a:prstGeom prst="rect">
-            <a:avLst/>
-          </a:prstGeom>
-          <a:noFill/>
-        </p:spPr>
-        <p:txBody>
-          <a:bodyPr wrap="square" anchor="t" lIns="0" rIns="0" tIns="0" bIns="0">
-            <a:spAutoFit/>
-          </a:bodyPr>
-          <a:lstStyle/>
-          <a:p>
-            <a:pPr algn="l">
-              <a:lnSpc>
-                <a:spcPct val="115000"/>
-              </a:lnSpc>
-            </a:pPr>
-            <a:r>
-              <a:rPr sz="1300" b="0">
-                <a:solidFill>
-                  <a:srgbClr val="A6ACBA"/>
-                </a:solidFill>
-                <a:latin typeface="Helvetica Neue"/>
-              </a:rPr>
-              <a:t>Sent by bank transfer the same day, or the next business day if a Sunday transfer isn't possible.</a:t>
-            </a:r>
-          </a:p>
-        </p:txBody>
-      </p:sp>
-      <p:sp>
-        <p:nvSpPr>
-          <p:cNvPr id="17" name="Rectangle 16"/>
-          <p:cNvSpPr/>
-          <p:nvPr/>
-        </p:nvSpPr>
-        <p:spPr>
-          <a:xfrm>
-            <a:off x="685800" y="4407408"/>
-            <a:ext cx="10817352" cy="621792"/>
-          </a:xfrm>
-          <a:prstGeom prst="rect">
-            <a:avLst/>
-          </a:prstGeom>
-          <a:solidFill>
-            <a:srgbClr val="0B0D12"/>
-          </a:solidFill>
-          <a:ln>
-            <a:noFill/>
-          </a:ln>
-          <a:effectLst/>
-        </p:spPr>
-        <p:style>
-          <a:lnRef idx="1">
-            <a:schemeClr val="accent1"/>
-          </a:lnRef>
-          <a:fillRef idx="3">
-            <a:schemeClr val="accent1"/>
-          </a:fillRef>
-          <a:effectRef idx="2">
-            <a:schemeClr val="accent1"/>
-          </a:effectRef>
-          <a:fontRef idx="minor">
-            <a:schemeClr val="lt1"/>
-          </a:fontRef>
-        </p:style>
-        <p:txBody>
-          <a:bodyPr rtlCol="0" anchor="ctr"/>
-          <a:lstStyle/>
-          <a:p>
-            <a:pPr algn="ctr"/>
-          </a:p>
-        </p:txBody>
-      </p:sp>
-      <p:sp>
-        <p:nvSpPr>
-          <p:cNvPr id="18" name="TextBox 17"/>
-          <p:cNvSpPr txBox="1"/>
-          <p:nvPr/>
-        </p:nvSpPr>
-        <p:spPr>
-          <a:xfrm>
-            <a:off x="868680" y="4498848"/>
-            <a:ext cx="4846320" cy="621792"/>
-          </a:xfrm>
-          <a:prstGeom prst="rect">
-            <a:avLst/>
-          </a:prstGeom>
-          <a:noFill/>
-        </p:spPr>
-        <p:txBody>
-          <a:bodyPr wrap="square" anchor="t" lIns="0" rIns="0" tIns="0" bIns="0">
-            <a:spAutoFit/>
-          </a:bodyPr>
-          <a:lstStyle/>
-          <a:p>
-            <a:pPr algn="l">
-              <a:lnSpc>
-                <a:spcPct val="115000"/>
-              </a:lnSpc>
-            </a:pPr>
-            <a:r>
-              <a:rPr sz="1300" b="1">
-                <a:solidFill>
-                  <a:srgbClr val="FFFFFF"/>
-                </a:solidFill>
-                <a:latin typeface="Helvetica Neue"/>
-              </a:rPr>
-              <a:t>Exclusions</a:t>
-            </a:r>
-          </a:p>
-        </p:txBody>
-      </p:sp>
-      <p:sp>
-        <p:nvSpPr>
-          <p:cNvPr id="19" name="TextBox 18"/>
-          <p:cNvSpPr txBox="1"/>
-          <p:nvPr/>
-        </p:nvSpPr>
-        <p:spPr>
-          <a:xfrm>
-            <a:off x="5989320" y="4498848"/>
-            <a:ext cx="5422392" cy="621792"/>
-          </a:xfrm>
-          <a:prstGeom prst="rect">
-            <a:avLst/>
-          </a:prstGeom>
-          <a:noFill/>
-        </p:spPr>
-        <p:txBody>
-          <a:bodyPr wrap="square" anchor="t" lIns="0" rIns="0" tIns="0" bIns="0">
-            <a:spAutoFit/>
-          </a:bodyPr>
-          <a:lstStyle/>
-          <a:p>
-            <a:pPr algn="l">
-              <a:lnSpc>
-                <a:spcPct val="115000"/>
-              </a:lnSpc>
-            </a:pPr>
-            <a:r>
-              <a:rPr sz="1300" b="0">
-                <a:solidFill>
-                  <a:srgbClr val="A6ACBA"/>
-                </a:solidFill>
-                <a:latin typeface="Helvetica Neue"/>
-              </a:rPr>
-              <a:t>Refunds, chargebacks, cancelled or fraudulent orders don't count.</a:t>
-            </a:r>
-          </a:p>
-        </p:txBody>
-      </p:sp>
-      <p:sp>
-        <p:nvSpPr>
-          <p:cNvPr id="20" name="Rectangle 19"/>
-          <p:cNvSpPr/>
-          <p:nvPr/>
-        </p:nvSpPr>
-        <p:spPr>
-          <a:xfrm>
-            <a:off x="685800" y="5029200"/>
-            <a:ext cx="10817352" cy="621792"/>
-          </a:xfrm>
-          <a:prstGeom prst="rect">
-            <a:avLst/>
-          </a:prstGeom>
-          <a:solidFill>
-            <a:srgbClr val="141720"/>
-          </a:solidFill>
-          <a:ln>
-            <a:noFill/>
-          </a:ln>
-          <a:effectLst/>
-        </p:spPr>
-        <p:style>
-          <a:lnRef idx="1">
-            <a:schemeClr val="accent1"/>
-          </a:lnRef>
-          <a:fillRef idx="3">
-            <a:schemeClr val="accent1"/>
-          </a:fillRef>
-          <a:effectRef idx="2">
-            <a:schemeClr val="accent1"/>
-          </a:effectRef>
-          <a:fontRef idx="minor">
-            <a:schemeClr val="lt1"/>
-          </a:fontRef>
-        </p:style>
-        <p:txBody>
-          <a:bodyPr rtlCol="0" anchor="ctr"/>
-          <a:lstStyle/>
-          <a:p>
-            <a:pPr algn="ctr"/>
-          </a:p>
-        </p:txBody>
-      </p:sp>
-      <p:sp>
-        <p:nvSpPr>
-          <p:cNvPr id="21" name="TextBox 20"/>
-          <p:cNvSpPr txBox="1"/>
-          <p:nvPr/>
-        </p:nvSpPr>
-        <p:spPr>
-          <a:xfrm>
-            <a:off x="868680" y="5120640"/>
-            <a:ext cx="4846320" cy="621792"/>
-          </a:xfrm>
-          <a:prstGeom prst="rect">
-            <a:avLst/>
-          </a:prstGeom>
-          <a:noFill/>
-        </p:spPr>
-        <p:txBody>
-          <a:bodyPr wrap="square" anchor="t" lIns="0" rIns="0" tIns="0" bIns="0">
-            <a:spAutoFit/>
-          </a:bodyPr>
-          <a:lstStyle/>
-          <a:p>
-            <a:pPr algn="l">
-              <a:lnSpc>
-                <a:spcPct val="115000"/>
-              </a:lnSpc>
-            </a:pPr>
-            <a:r>
-              <a:rPr sz="1300" b="1">
-                <a:solidFill>
-                  <a:srgbClr val="FFFFFF"/>
-                </a:solidFill>
-                <a:latin typeface="Helvetica Neue"/>
-              </a:rPr>
-              <a:t>Example</a:t>
-            </a:r>
-          </a:p>
-        </p:txBody>
-      </p:sp>
-      <p:sp>
-        <p:nvSpPr>
-          <p:cNvPr id="22" name="TextBox 21"/>
-          <p:cNvSpPr txBox="1"/>
-          <p:nvPr/>
-        </p:nvSpPr>
-        <p:spPr>
-          <a:xfrm>
-            <a:off x="5989320" y="5120640"/>
-            <a:ext cx="5422392" cy="621792"/>
-          </a:xfrm>
-          <a:prstGeom prst="rect">
-            <a:avLst/>
-          </a:prstGeom>
-          <a:noFill/>
-        </p:spPr>
-        <p:txBody>
-          <a:bodyPr wrap="square" anchor="t" lIns="0" rIns="0" tIns="0" bIns="0">
-            <a:spAutoFit/>
-          </a:bodyPr>
-          <a:lstStyle/>
-          <a:p>
-            <a:pPr algn="l">
-              <a:lnSpc>
-                <a:spcPct val="115000"/>
-              </a:lnSpc>
-            </a:pPr>
-            <a:r>
-              <a:rPr sz="1300" b="0">
-                <a:solidFill>
-                  <a:srgbClr val="A6ACBA"/>
-                </a:solidFill>
-                <a:latin typeface="Helvetica Neue"/>
-              </a:rPr>
-              <a:t>₦485,000 in qualifying payments that week → ₦48,500 commission paid to you that Sunday.</a:t>
-            </a:r>
-          </a:p>
-        </p:txBody>
-      </p:sp>
-      <p:cxnSp>
-        <p:nvCxnSpPr>
-          <p:cNvPr id="23" name="Connector 22"/>
-          <p:cNvCxnSpPr/>
-          <p:nvPr/>
-        </p:nvCxnSpPr>
-        <p:spPr>
-          <a:xfrm>
-            <a:off x="685800" y="1920240"/>
-            <a:ext cx="10817352" cy="0"/>
-          </a:xfrm>
-          <a:prstGeom prst="line">
-            <a:avLst/>
-          </a:prstGeom>
-          <a:ln w="12700">
-            <a:solidFill>
-              <a:srgbClr val="2A2E3A"/>
-            </a:solidFill>
-          </a:ln>
-        </p:spPr>
-        <p:style>
-          <a:lnRef idx="2">
-            <a:schemeClr val="accent1"/>
-          </a:lnRef>
-          <a:fillRef idx="0">
-            <a:schemeClr val="accent1"/>
-          </a:fillRef>
-          <a:effectRef idx="1">
-            <a:schemeClr val="accent1"/>
-          </a:effectRef>
-          <a:fontRef idx="minor">
-            <a:schemeClr val="tx1"/>
-          </a:fontRef>
-        </p:style>
-      </p:cxnSp>
+              <a:t>This is being built alongside the Project Portal — Joshua will confirm once it's live; a written weekly summary works as a bridge until then.</a:t>
+            </a:r>
+          </a:p>
+        </p:txBody>
+      </p:sp>
       <p:pic>
         <p:nvPicPr>
-          <p:cNvPr id="24" name="Picture 23" descr="logo-head.png"/>
+          <p:cNvPr id="6" name="Picture 5" descr="logo-head.png"/>
           <p:cNvPicPr>
             <a:picLocks noChangeAspect="1"/>
           </p:cNvPicPr>
@@ -5812,7 +5832,7 @@
       </p:pic>
       <p:sp>
         <p:nvSpPr>
-          <p:cNvPr id="25" name="TextBox 24"/>
+          <p:cNvPr id="7" name="TextBox 6"/>
           <p:cNvSpPr txBox="1"/>
           <p:nvPr/>
         </p:nvSpPr>
@@ -5851,7 +5871,7 @@
       </p:sp>
       <p:sp>
         <p:nvSpPr>
-          <p:cNvPr id="26" name="TextBox 25"/>
+          <p:cNvPr id="8" name="TextBox 7"/>
           <p:cNvSpPr txBox="1"/>
           <p:nvPr/>
         </p:nvSpPr>
@@ -5890,7 +5910,7 @@
       </p:sp>
       <p:cxnSp>
         <p:nvCxnSpPr>
-          <p:cNvPr id="27" name="Connector 26"/>
+          <p:cNvPr id="9" name="Connector 8"/>
           <p:cNvCxnSpPr/>
           <p:nvPr/>
         </p:nvCxnSpPr>
@@ -5937,7 +5957,7 @@
     <p:bg>
       <p:bgPr>
         <a:solidFill>
-          <a:srgbClr val="0B0D12"/>
+          <a:srgbClr val="141720"/>
         </a:solidFill>
         <a:effectLst/>
       </p:bgPr>
@@ -5951,117 +5971,126 @@
       <p:grpSpPr/>
       <p:sp>
         <p:nvSpPr>
-          <p:cNvPr id="2" name="TextBox 1"/>
-          <p:cNvSpPr txBox="1"/>
-          <p:nvPr/>
-        </p:nvSpPr>
-        <p:spPr>
-          <a:xfrm>
-            <a:off x="685800" y="502920"/>
-            <a:ext cx="7315200" cy="365760"/>
-          </a:xfrm>
-          <a:prstGeom prst="rect">
-            <a:avLst/>
-          </a:prstGeom>
-          <a:noFill/>
-        </p:spPr>
-        <p:txBody>
-          <a:bodyPr wrap="square" anchor="t" lIns="0" rIns="0" tIns="0" bIns="0">
-            <a:spAutoFit/>
-          </a:bodyPr>
-          <a:lstStyle/>
-          <a:p>
-            <a:pPr algn="l">
-              <a:lnSpc>
-                <a:spcPct val="115000"/>
-              </a:lnSpc>
-            </a:pPr>
-            <a:r>
-              <a:rPr sz="1250" b="1">
-                <a:solidFill>
-                  <a:srgbClr val="4E9BF0"/>
-                </a:solidFill>
-                <a:latin typeface="Helvetica Neue"/>
-              </a:rPr>
-              <a:t>COMMISSION &amp; PAYMENTS</a:t>
-            </a:r>
-          </a:p>
-        </p:txBody>
-      </p:sp>
-      <p:sp>
-        <p:nvSpPr>
-          <p:cNvPr id="3" name="TextBox 2"/>
-          <p:cNvSpPr txBox="1"/>
-          <p:nvPr/>
-        </p:nvSpPr>
-        <p:spPr>
-          <a:xfrm>
-            <a:off x="685800" y="868680"/>
-            <a:ext cx="10515600" cy="914400"/>
-          </a:xfrm>
-          <a:prstGeom prst="rect">
-            <a:avLst/>
-          </a:prstGeom>
-          <a:noFill/>
-        </p:spPr>
-        <p:txBody>
-          <a:bodyPr wrap="square" anchor="t" lIns="0" rIns="0" tIns="0" bIns="0">
-            <a:spAutoFit/>
-          </a:bodyPr>
-          <a:lstStyle/>
-          <a:p>
-            <a:pPr algn="l">
-              <a:lnSpc>
-                <a:spcPct val="105000"/>
-              </a:lnSpc>
-            </a:pPr>
-            <a:r>
-              <a:rPr sz="2700" b="1">
-                <a:solidFill>
-                  <a:srgbClr val="FFFFFF"/>
-                </a:solidFill>
-                <a:latin typeface="Helvetica Neue"/>
-              </a:rPr>
-              <a:t>Your Collaborator Dashboard</a:t>
-            </a:r>
-          </a:p>
-        </p:txBody>
-      </p:sp>
-      <p:cxnSp>
-        <p:nvCxnSpPr>
-          <p:cNvPr id="4" name="Connector 3"/>
-          <p:cNvCxnSpPr/>
-          <p:nvPr/>
-        </p:nvCxnSpPr>
-        <p:spPr>
-          <a:xfrm>
-            <a:off x="685800" y="1691640"/>
-            <a:ext cx="10817352" cy="0"/>
-          </a:xfrm>
-          <a:prstGeom prst="line">
-            <a:avLst/>
-          </a:prstGeom>
-          <a:ln w="12700">
-            <a:solidFill>
-              <a:srgbClr val="2A2E3A"/>
-            </a:solidFill>
+          <p:cNvPr id="2" name="Rectangle 1"/>
+          <p:cNvSpPr/>
+          <p:nvPr/>
+        </p:nvSpPr>
+        <p:spPr>
+          <a:xfrm>
+            <a:off x="0" y="0"/>
+            <a:ext cx="164592" cy="6858000"/>
+          </a:xfrm>
+          <a:prstGeom prst="rect">
+            <a:avLst/>
+          </a:prstGeom>
+          <a:solidFill>
+            <a:srgbClr val="1D68C0"/>
+          </a:solidFill>
+          <a:ln>
+            <a:noFill/>
           </a:ln>
+          <a:effectLst/>
         </p:spPr>
         <p:style>
-          <a:lnRef idx="2">
+          <a:lnRef idx="1">
             <a:schemeClr val="accent1"/>
           </a:lnRef>
-          <a:fillRef idx="0">
+          <a:fillRef idx="3">
             <a:schemeClr val="accent1"/>
           </a:fillRef>
-          <a:effectRef idx="1">
+          <a:effectRef idx="2">
             <a:schemeClr val="accent1"/>
           </a:effectRef>
           <a:fontRef idx="minor">
-            <a:schemeClr val="tx1"/>
+            <a:schemeClr val="lt1"/>
           </a:fontRef>
         </p:style>
-      </p:cxnSp>
+        <p:txBody>
+          <a:bodyPr rtlCol="0" anchor="ctr"/>
+          <a:lstStyle/>
+          <a:p>
+            <a:pPr algn="ctr"/>
+          </a:p>
+        </p:txBody>
+      </p:sp>
+      <p:sp>
+        <p:nvSpPr>
+          <p:cNvPr id="3" name="TextBox 2"/>
+          <p:cNvSpPr txBox="1"/>
+          <p:nvPr/>
+        </p:nvSpPr>
+        <p:spPr>
+          <a:xfrm>
+            <a:off x="868680" y="2286000"/>
+            <a:ext cx="1828800" cy="1097280"/>
+          </a:xfrm>
+          <a:prstGeom prst="rect">
+            <a:avLst/>
+          </a:prstGeom>
+          <a:noFill/>
+        </p:spPr>
+        <p:txBody>
+          <a:bodyPr wrap="square" anchor="t" lIns="0" rIns="0" tIns="0" bIns="0">
+            <a:spAutoFit/>
+          </a:bodyPr>
+          <a:lstStyle/>
+          <a:p>
+            <a:pPr algn="l">
+              <a:lnSpc>
+                <a:spcPct val="115000"/>
+              </a:lnSpc>
+            </a:pPr>
+            <a:r>
+              <a:rPr sz="6400" b="1">
+                <a:solidFill>
+                  <a:srgbClr val="4E9BF0"/>
+                </a:solidFill>
+                <a:latin typeface="Helvetica Neue"/>
+              </a:rPr>
+              <a:t>04</a:t>
+            </a:r>
+          </a:p>
+        </p:txBody>
+      </p:sp>
+      <p:sp>
+        <p:nvSpPr>
+          <p:cNvPr id="4" name="TextBox 3"/>
+          <p:cNvSpPr txBox="1"/>
+          <p:nvPr/>
+        </p:nvSpPr>
+        <p:spPr>
+          <a:xfrm>
+            <a:off x="896112" y="2103120"/>
+            <a:ext cx="7315200" cy="365760"/>
+          </a:xfrm>
+          <a:prstGeom prst="rect">
+            <a:avLst/>
+          </a:prstGeom>
+          <a:noFill/>
+        </p:spPr>
+        <p:txBody>
+          <a:bodyPr wrap="square" anchor="t" lIns="0" rIns="0" tIns="0" bIns="0">
+            <a:spAutoFit/>
+          </a:bodyPr>
+          <a:lstStyle/>
+          <a:p>
+            <a:pPr algn="l">
+              <a:lnSpc>
+                <a:spcPct val="115000"/>
+              </a:lnSpc>
+            </a:pPr>
+            <a:r>
+              <a:rPr sz="1250" b="1">
+                <a:solidFill>
+                  <a:srgbClr val="4E9BF0"/>
+                </a:solidFill>
+                <a:latin typeface="Helvetica Neue"/>
+              </a:rPr>
+              <a:t>GUIDELINES &amp; TERMS</a:t>
+            </a:r>
+          </a:p>
+        </p:txBody>
+      </p:sp>
       <p:sp>
         <p:nvSpPr>
           <p:cNvPr id="5" name="TextBox 4"/>
@@ -6070,108 +6099,79 @@
         </p:nvSpPr>
         <p:spPr>
           <a:xfrm>
-            <a:off x="685800" y="1965960"/>
-            <a:ext cx="10424160" cy="3931920"/>
-          </a:xfrm>
-          <a:prstGeom prst="rect">
-            <a:avLst/>
-          </a:prstGeom>
-          <a:noFill/>
-        </p:spPr>
-        <p:txBody>
-          <a:bodyPr wrap="square" lIns="0" rIns="0">
-            <a:spAutoFit/>
-          </a:bodyPr>
-          <a:lstStyle/>
-          <a:p>
-            <a:pPr>
-              <a:lnSpc>
-                <a:spcPct val="125000"/>
-              </a:lnSpc>
-              <a:spcAft>
-                <a:spcPts val="1000"/>
-              </a:spcAft>
-            </a:pPr>
-            <a:r>
-              <a:rPr sz="1550" b="1">
-                <a:solidFill>
-                  <a:srgbClr val="4E9BF0"/>
-                </a:solidFill>
-                <a:latin typeface="Helvetica Neue"/>
-              </a:rPr>
-              <a:t>—  </a:t>
-            </a:r>
-            <a:r>
-              <a:rPr sz="1550">
+            <a:off x="868680" y="3429000"/>
+            <a:ext cx="9875520" cy="1097280"/>
+          </a:xfrm>
+          <a:prstGeom prst="rect">
+            <a:avLst/>
+          </a:prstGeom>
+          <a:noFill/>
+        </p:spPr>
+        <p:txBody>
+          <a:bodyPr wrap="square" anchor="t" lIns="0" rIns="0" tIns="0" bIns="0">
+            <a:spAutoFit/>
+          </a:bodyPr>
+          <a:lstStyle/>
+          <a:p>
+            <a:pPr algn="l">
+              <a:lnSpc>
+                <a:spcPct val="115000"/>
+              </a:lnSpc>
+            </a:pPr>
+            <a:r>
+              <a:rPr sz="3400" b="1">
                 <a:solidFill>
                   <a:srgbClr val="FFFFFF"/>
                 </a:solidFill>
                 <a:latin typeface="Helvetica Neue"/>
               </a:rPr>
-              <a:t>A private view of your weekly commission — Project IDs, amounts, and PAID / PENDING status.</a:t>
-            </a:r>
-          </a:p>
-          <a:p>
-            <a:pPr>
-              <a:lnSpc>
-                <a:spcPct val="125000"/>
-              </a:lnSpc>
-              <a:spcAft>
-                <a:spcPts val="1000"/>
-              </a:spcAft>
-            </a:pPr>
-            <a:r>
-              <a:rPr sz="1550" b="1">
-                <a:solidFill>
-                  <a:srgbClr val="4E9BF0"/>
-                </a:solidFill>
-                <a:latin typeface="Helvetica Neue"/>
-              </a:rPr>
-              <a:t>—  </a:t>
-            </a:r>
-            <a:r>
-              <a:rPr sz="1550">
-                <a:solidFill>
-                  <a:srgbClr val="FFFFFF"/>
-                </a:solidFill>
-                <a:latin typeface="Helvetica Neue"/>
-              </a:rPr>
-              <a:t>You'll see enough to verify every payment is calculated correctly, without Zebraish's client contact details being exposed to you.</a:t>
-            </a:r>
-          </a:p>
-          <a:p>
-            <a:pPr>
-              <a:lnSpc>
-                <a:spcPct val="125000"/>
-              </a:lnSpc>
-              <a:spcAft>
-                <a:spcPts val="1000"/>
-              </a:spcAft>
-            </a:pPr>
-            <a:r>
-              <a:rPr sz="1550" b="1">
-                <a:solidFill>
-                  <a:srgbClr val="4E9BF0"/>
-                </a:solidFill>
-                <a:latin typeface="Helvetica Neue"/>
-              </a:rPr>
-              <a:t>—  </a:t>
-            </a:r>
-            <a:r>
-              <a:rPr sz="1550">
-                <a:solidFill>
-                  <a:srgbClr val="FFFFFF"/>
-                </a:solidFill>
-                <a:latin typeface="Helvetica Neue"/>
-              </a:rPr>
-              <a:t>This is being built alongside the Project Portal — Joshua will confirm once it's live; a written weekly summary works as a bridge until then.</a:t>
+              <a:t>The fine print, made readable</a:t>
+            </a:r>
+          </a:p>
+        </p:txBody>
+      </p:sp>
+      <p:sp>
+        <p:nvSpPr>
+          <p:cNvPr id="6" name="TextBox 5"/>
+          <p:cNvSpPr txBox="1"/>
+          <p:nvPr/>
+        </p:nvSpPr>
+        <p:spPr>
+          <a:xfrm>
+            <a:off x="868680" y="4251960"/>
+            <a:ext cx="8412480" cy="1097280"/>
+          </a:xfrm>
+          <a:prstGeom prst="rect">
+            <a:avLst/>
+          </a:prstGeom>
+          <a:noFill/>
+        </p:spPr>
+        <p:txBody>
+          <a:bodyPr wrap="square" anchor="t" lIns="0" rIns="0" tIns="0" bIns="0">
+            <a:spAutoFit/>
+          </a:bodyPr>
+          <a:lstStyle/>
+          <a:p>
+            <a:pPr algn="l">
+              <a:lnSpc>
+                <a:spcPct val="135000"/>
+              </a:lnSpc>
+            </a:pPr>
+            <a:r>
+              <a:rPr sz="1550" b="0">
+                <a:solidFill>
+                  <a:srgbClr val="A6ACBA"/>
+                </a:solidFill>
+                <a:latin typeface="Helvetica Neue"/>
+              </a:rPr>
+              <a:t>Brand guidelines, content rights, and how the Term works.</a:t>
             </a:r>
           </a:p>
         </p:txBody>
       </p:sp>
       <p:pic>
         <p:nvPicPr>
-          <p:cNvPr id="6" name="Picture 5" descr="logo-head.png"/>
+          <p:cNvPr id="7" name="Picture 6" descr="logo-head.png"/>
           <p:cNvPicPr>
             <a:picLocks noChangeAspect="1"/>
           </p:cNvPicPr>
@@ -6195,7 +6195,7 @@
       </p:pic>
       <p:sp>
         <p:nvSpPr>
-          <p:cNvPr id="7" name="TextBox 6"/>
+          <p:cNvPr id="8" name="TextBox 7"/>
           <p:cNvSpPr txBox="1"/>
           <p:nvPr/>
         </p:nvSpPr>
@@ -6234,7 +6234,7 @@
       </p:sp>
       <p:sp>
         <p:nvSpPr>
-          <p:cNvPr id="8" name="TextBox 7"/>
+          <p:cNvPr id="9" name="TextBox 8"/>
           <p:cNvSpPr txBox="1"/>
           <p:nvPr/>
         </p:nvSpPr>
@@ -6266,14 +6266,14 @@
                 </a:solidFill>
                 <a:latin typeface="Helvetica Neue"/>
               </a:rPr>
-              <a:t>Commission &amp; Payments   ·   14 / 20</a:t>
+              <a:t>Guidelines &amp; Terms   ·   14 / 20</a:t>
             </a:r>
           </a:p>
         </p:txBody>
       </p:sp>
       <p:cxnSp>
         <p:nvCxnSpPr>
-          <p:cNvPr id="9" name="Connector 8"/>
+          <p:cNvPr id="10" name="Connector 9"/>
           <p:cNvCxnSpPr/>
           <p:nvPr/>
         </p:nvCxnSpPr>
@@ -6320,7 +6320,7 @@
     <p:bg>
       <p:bgPr>
         <a:solidFill>
-          <a:srgbClr val="141720"/>
+          <a:srgbClr val="0B0D12"/>
         </a:solidFill>
         <a:effectLst/>
       </p:bgPr>
@@ -6334,207 +6334,283 @@
       <p:grpSpPr/>
       <p:sp>
         <p:nvSpPr>
-          <p:cNvPr id="2" name="Rectangle 1"/>
-          <p:cNvSpPr/>
-          <p:nvPr/>
-        </p:nvSpPr>
-        <p:spPr>
-          <a:xfrm>
-            <a:off x="0" y="0"/>
-            <a:ext cx="164592" cy="6858000"/>
-          </a:xfrm>
-          <a:prstGeom prst="rect">
-            <a:avLst/>
-          </a:prstGeom>
-          <a:solidFill>
-            <a:srgbClr val="1D68C0"/>
-          </a:solidFill>
-          <a:ln>
-            <a:noFill/>
+          <p:cNvPr id="2" name="TextBox 1"/>
+          <p:cNvSpPr txBox="1"/>
+          <p:nvPr/>
+        </p:nvSpPr>
+        <p:spPr>
+          <a:xfrm>
+            <a:off x="685800" y="502920"/>
+            <a:ext cx="7315200" cy="365760"/>
+          </a:xfrm>
+          <a:prstGeom prst="rect">
+            <a:avLst/>
+          </a:prstGeom>
+          <a:noFill/>
+        </p:spPr>
+        <p:txBody>
+          <a:bodyPr wrap="square" anchor="t" lIns="0" rIns="0" tIns="0" bIns="0">
+            <a:spAutoFit/>
+          </a:bodyPr>
+          <a:lstStyle/>
+          <a:p>
+            <a:pPr algn="l">
+              <a:lnSpc>
+                <a:spcPct val="115000"/>
+              </a:lnSpc>
+            </a:pPr>
+            <a:r>
+              <a:rPr sz="1250" b="1">
+                <a:solidFill>
+                  <a:srgbClr val="4E9BF0"/>
+                </a:solidFill>
+                <a:latin typeface="Helvetica Neue"/>
+              </a:rPr>
+              <a:t>GUIDELINES &amp; TERMS</a:t>
+            </a:r>
+          </a:p>
+        </p:txBody>
+      </p:sp>
+      <p:sp>
+        <p:nvSpPr>
+          <p:cNvPr id="3" name="TextBox 2"/>
+          <p:cNvSpPr txBox="1"/>
+          <p:nvPr/>
+        </p:nvSpPr>
+        <p:spPr>
+          <a:xfrm>
+            <a:off x="685800" y="868680"/>
+            <a:ext cx="10515600" cy="914400"/>
+          </a:xfrm>
+          <a:prstGeom prst="rect">
+            <a:avLst/>
+          </a:prstGeom>
+          <a:noFill/>
+        </p:spPr>
+        <p:txBody>
+          <a:bodyPr wrap="square" anchor="t" lIns="0" rIns="0" tIns="0" bIns="0">
+            <a:spAutoFit/>
+          </a:bodyPr>
+          <a:lstStyle/>
+          <a:p>
+            <a:pPr algn="l">
+              <a:lnSpc>
+                <a:spcPct val="105000"/>
+              </a:lnSpc>
+            </a:pPr>
+            <a:r>
+              <a:rPr sz="2700" b="1">
+                <a:solidFill>
+                  <a:srgbClr val="FFFFFF"/>
+                </a:solidFill>
+                <a:latin typeface="Helvetica Neue"/>
+              </a:rPr>
+              <a:t>Brand guidelines</a:t>
+            </a:r>
+          </a:p>
+        </p:txBody>
+      </p:sp>
+      <p:cxnSp>
+        <p:nvCxnSpPr>
+          <p:cNvPr id="4" name="Connector 3"/>
+          <p:cNvCxnSpPr/>
+          <p:nvPr/>
+        </p:nvCxnSpPr>
+        <p:spPr>
+          <a:xfrm>
+            <a:off x="685800" y="1691640"/>
+            <a:ext cx="10817352" cy="0"/>
+          </a:xfrm>
+          <a:prstGeom prst="line">
+            <a:avLst/>
+          </a:prstGeom>
+          <a:ln w="12700">
+            <a:solidFill>
+              <a:srgbClr val="2A2E3A"/>
+            </a:solidFill>
           </a:ln>
-          <a:effectLst/>
         </p:spPr>
         <p:style>
-          <a:lnRef idx="1">
+          <a:lnRef idx="2">
             <a:schemeClr val="accent1"/>
           </a:lnRef>
-          <a:fillRef idx="3">
+          <a:fillRef idx="0">
             <a:schemeClr val="accent1"/>
           </a:fillRef>
-          <a:effectRef idx="2">
+          <a:effectRef idx="1">
             <a:schemeClr val="accent1"/>
           </a:effectRef>
           <a:fontRef idx="minor">
-            <a:schemeClr val="lt1"/>
+            <a:schemeClr val="tx1"/>
           </a:fontRef>
         </p:style>
-        <p:txBody>
-          <a:bodyPr rtlCol="0" anchor="ctr"/>
-          <a:lstStyle/>
-          <a:p>
-            <a:pPr algn="ctr"/>
-          </a:p>
-        </p:txBody>
-      </p:sp>
-      <p:sp>
-        <p:nvSpPr>
-          <p:cNvPr id="3" name="TextBox 2"/>
-          <p:cNvSpPr txBox="1"/>
-          <p:nvPr/>
-        </p:nvSpPr>
-        <p:spPr>
-          <a:xfrm>
-            <a:off x="868680" y="2286000"/>
-            <a:ext cx="1828800" cy="1097280"/>
-          </a:xfrm>
-          <a:prstGeom prst="rect">
-            <a:avLst/>
-          </a:prstGeom>
-          <a:noFill/>
-        </p:spPr>
-        <p:txBody>
-          <a:bodyPr wrap="square" anchor="t" lIns="0" rIns="0" tIns="0" bIns="0">
-            <a:spAutoFit/>
-          </a:bodyPr>
-          <a:lstStyle/>
-          <a:p>
-            <a:pPr algn="l">
-              <a:lnSpc>
-                <a:spcPct val="115000"/>
-              </a:lnSpc>
-            </a:pPr>
-            <a:r>
-              <a:rPr sz="6400" b="1">
+      </p:cxnSp>
+      <p:sp>
+        <p:nvSpPr>
+          <p:cNvPr id="5" name="TextBox 4"/>
+          <p:cNvSpPr txBox="1"/>
+          <p:nvPr/>
+        </p:nvSpPr>
+        <p:spPr>
+          <a:xfrm>
+            <a:off x="685800" y="1965960"/>
+            <a:ext cx="10424160" cy="3931920"/>
+          </a:xfrm>
+          <a:prstGeom prst="rect">
+            <a:avLst/>
+          </a:prstGeom>
+          <a:noFill/>
+        </p:spPr>
+        <p:txBody>
+          <a:bodyPr wrap="square" lIns="0" rIns="0">
+            <a:spAutoFit/>
+          </a:bodyPr>
+          <a:lstStyle/>
+          <a:p>
+            <a:pPr>
+              <a:lnSpc>
+                <a:spcPct val="125000"/>
+              </a:lnSpc>
+              <a:spcAft>
+                <a:spcPts val="1000"/>
+              </a:spcAft>
+            </a:pPr>
+            <a:r>
+              <a:rPr sz="1550" b="1">
                 <a:solidFill>
                   <a:srgbClr val="4E9BF0"/>
                 </a:solidFill>
                 <a:latin typeface="Helvetica Neue"/>
               </a:rPr>
-              <a:t>04</a:t>
-            </a:r>
-          </a:p>
-        </p:txBody>
-      </p:sp>
-      <p:sp>
-        <p:nvSpPr>
-          <p:cNvPr id="4" name="TextBox 3"/>
-          <p:cNvSpPr txBox="1"/>
-          <p:nvPr/>
-        </p:nvSpPr>
-        <p:spPr>
-          <a:xfrm>
-            <a:off x="896112" y="2103120"/>
-            <a:ext cx="7315200" cy="365760"/>
-          </a:xfrm>
-          <a:prstGeom prst="rect">
-            <a:avLst/>
-          </a:prstGeom>
-          <a:noFill/>
-        </p:spPr>
-        <p:txBody>
-          <a:bodyPr wrap="square" anchor="t" lIns="0" rIns="0" tIns="0" bIns="0">
-            <a:spAutoFit/>
-          </a:bodyPr>
-          <a:lstStyle/>
-          <a:p>
-            <a:pPr algn="l">
-              <a:lnSpc>
-                <a:spcPct val="115000"/>
-              </a:lnSpc>
-            </a:pPr>
-            <a:r>
-              <a:rPr sz="1250" b="1">
+              <a:t>—  </a:t>
+            </a:r>
+            <a:r>
+              <a:rPr sz="1550">
+                <a:solidFill>
+                  <a:srgbClr val="FFFFFF"/>
+                </a:solidFill>
+                <a:latin typeface="Helvetica Neue"/>
+              </a:rPr>
+              <a:t>Represent Zebraish positively and professionally, always.</a:t>
+            </a:r>
+          </a:p>
+          <a:p>
+            <a:pPr>
+              <a:lnSpc>
+                <a:spcPct val="125000"/>
+              </a:lnSpc>
+              <a:spcAft>
+                <a:spcPts val="1000"/>
+              </a:spcAft>
+            </a:pPr>
+            <a:r>
+              <a:rPr sz="1550" b="1">
                 <a:solidFill>
                   <a:srgbClr val="4E9BF0"/>
                 </a:solidFill>
                 <a:latin typeface="Helvetica Neue"/>
               </a:rPr>
-              <a:t>GUIDELINES &amp; TERMS</a:t>
-            </a:r>
-          </a:p>
-        </p:txBody>
-      </p:sp>
-      <p:sp>
-        <p:nvSpPr>
-          <p:cNvPr id="5" name="TextBox 4"/>
-          <p:cNvSpPr txBox="1"/>
-          <p:nvPr/>
-        </p:nvSpPr>
-        <p:spPr>
-          <a:xfrm>
-            <a:off x="868680" y="3429000"/>
-            <a:ext cx="9875520" cy="1097280"/>
-          </a:xfrm>
-          <a:prstGeom prst="rect">
-            <a:avLst/>
-          </a:prstGeom>
-          <a:noFill/>
-        </p:spPr>
-        <p:txBody>
-          <a:bodyPr wrap="square" anchor="t" lIns="0" rIns="0" tIns="0" bIns="0">
-            <a:spAutoFit/>
-          </a:bodyPr>
-          <a:lstStyle/>
-          <a:p>
-            <a:pPr algn="l">
-              <a:lnSpc>
-                <a:spcPct val="115000"/>
-              </a:lnSpc>
-            </a:pPr>
-            <a:r>
-              <a:rPr sz="3400" b="1">
+              <a:t>—  </a:t>
+            </a:r>
+            <a:r>
+              <a:rPr sz="1550">
                 <a:solidFill>
                   <a:srgbClr val="FFFFFF"/>
                 </a:solidFill>
                 <a:latin typeface="Helvetica Neue"/>
               </a:rPr>
-              <a:t>The fine print, made readable</a:t>
-            </a:r>
-          </a:p>
-        </p:txBody>
-      </p:sp>
-      <p:sp>
-        <p:nvSpPr>
-          <p:cNvPr id="6" name="TextBox 5"/>
-          <p:cNvSpPr txBox="1"/>
-          <p:nvPr/>
-        </p:nvSpPr>
-        <p:spPr>
-          <a:xfrm>
-            <a:off x="868680" y="4251960"/>
-            <a:ext cx="8412480" cy="1097280"/>
-          </a:xfrm>
-          <a:prstGeom prst="rect">
-            <a:avLst/>
-          </a:prstGeom>
-          <a:noFill/>
-        </p:spPr>
-        <p:txBody>
-          <a:bodyPr wrap="square" anchor="t" lIns="0" rIns="0" tIns="0" bIns="0">
-            <a:spAutoFit/>
-          </a:bodyPr>
-          <a:lstStyle/>
-          <a:p>
-            <a:pPr algn="l">
-              <a:lnSpc>
-                <a:spcPct val="135000"/>
-              </a:lnSpc>
-            </a:pPr>
-            <a:r>
-              <a:rPr sz="1550" b="0">
-                <a:solidFill>
-                  <a:srgbClr val="A6ACBA"/>
-                </a:solidFill>
-                <a:latin typeface="Helvetica Neue"/>
-              </a:rPr>
-              <a:t>Brand guidelines, content rights, and how the Term works.</a:t>
+              <a:t>No false or misleading claims about Zebraish, its products, or services.</a:t>
+            </a:r>
+          </a:p>
+          <a:p>
+            <a:pPr>
+              <a:lnSpc>
+                <a:spcPct val="125000"/>
+              </a:lnSpc>
+              <a:spcAft>
+                <a:spcPts val="1000"/>
+              </a:spcAft>
+            </a:pPr>
+            <a:r>
+              <a:rPr sz="1550" b="1">
+                <a:solidFill>
+                  <a:srgbClr val="4E9BF0"/>
+                </a:solidFill>
+                <a:latin typeface="Helvetica Neue"/>
+              </a:rPr>
+              <a:t>—  </a:t>
+            </a:r>
+            <a:r>
+              <a:rPr sz="1550">
+                <a:solidFill>
+                  <a:srgbClr val="FFFFFF"/>
+                </a:solidFill>
+                <a:latin typeface="Helvetica Neue"/>
+              </a:rPr>
+              <a:t>Don't imply you're an owner, director, or officer of Zebraish.</a:t>
+            </a:r>
+          </a:p>
+          <a:p>
+            <a:pPr>
+              <a:lnSpc>
+                <a:spcPct val="125000"/>
+              </a:lnSpc>
+              <a:spcAft>
+                <a:spcPts val="1000"/>
+              </a:spcAft>
+            </a:pPr>
+            <a:r>
+              <a:rPr sz="1550" b="1">
+                <a:solidFill>
+                  <a:srgbClr val="4E9BF0"/>
+                </a:solidFill>
+                <a:latin typeface="Helvetica Neue"/>
+              </a:rPr>
+              <a:t>—  </a:t>
+            </a:r>
+            <a:r>
+              <a:rPr sz="1550">
+                <a:solidFill>
+                  <a:srgbClr val="FFFFFF"/>
+                </a:solidFill>
+                <a:latin typeface="Helvetica Neue"/>
+              </a:rPr>
+              <a:t>No unauthorized promises or commitments on Zebraish's behalf.</a:t>
+            </a:r>
+          </a:p>
+          <a:p>
+            <a:pPr>
+              <a:lnSpc>
+                <a:spcPct val="125000"/>
+              </a:lnSpc>
+              <a:spcAft>
+                <a:spcPts val="1000"/>
+              </a:spcAft>
+            </a:pPr>
+            <a:r>
+              <a:rPr sz="1550" b="1">
+                <a:solidFill>
+                  <a:srgbClr val="4E9BF0"/>
+                </a:solidFill>
+                <a:latin typeface="Helvetica Neue"/>
+              </a:rPr>
+              <a:t>—  </a:t>
+            </a:r>
+            <a:r>
+              <a:rPr sz="1550">
+                <a:solidFill>
+                  <a:srgbClr val="FFFFFF"/>
+                </a:solidFill>
+                <a:latin typeface="Helvetica Neue"/>
+              </a:rPr>
+              <a:t>Paid advertising or sponsorships need Joshua's written approval before you commit to any spend.</a:t>
             </a:r>
           </a:p>
         </p:txBody>
       </p:sp>
       <p:pic>
         <p:nvPicPr>
-          <p:cNvPr id="7" name="Picture 6" descr="logo-head.png"/>
+          <p:cNvPr id="6" name="Picture 5" descr="logo-head.png"/>
           <p:cNvPicPr>
             <a:picLocks noChangeAspect="1"/>
           </p:cNvPicPr>
@@ -6558,7 +6634,7 @@
       </p:pic>
       <p:sp>
         <p:nvSpPr>
-          <p:cNvPr id="8" name="TextBox 7"/>
+          <p:cNvPr id="7" name="TextBox 6"/>
           <p:cNvSpPr txBox="1"/>
           <p:nvPr/>
         </p:nvSpPr>
@@ -6597,7 +6673,7 @@
       </p:sp>
       <p:sp>
         <p:nvSpPr>
-          <p:cNvPr id="9" name="TextBox 8"/>
+          <p:cNvPr id="8" name="TextBox 7"/>
           <p:cNvSpPr txBox="1"/>
           <p:nvPr/>
         </p:nvSpPr>
@@ -6636,7 +6712,7 @@
       </p:sp>
       <p:cxnSp>
         <p:nvCxnSpPr>
-          <p:cNvPr id="10" name="Connector 9"/>
+          <p:cNvPr id="9" name="Connector 8"/>
           <p:cNvCxnSpPr/>
           <p:nvPr/>
         </p:nvCxnSpPr>
@@ -6768,7 +6844,7 @@
                 </a:solidFill>
                 <a:latin typeface="Helvetica Neue"/>
               </a:rPr>
-              <a:t>Brand guidelines</a:t>
+              <a:t>Content &amp; your rights</a:t>
             </a:r>
           </a:p>
         </p:txBody>
@@ -6854,7 +6930,7 @@
                 </a:solidFill>
                 <a:latin typeface="Helvetica Neue"/>
               </a:rPr>
-              <a:t>Represent Zebraish positively and professionally, always.</a:t>
+              <a:t>You keep full ownership of your identity, image, and likeness — always.</a:t>
             </a:r>
           </a:p>
           <a:p>
@@ -6882,7 +6958,7 @@
                 </a:solidFill>
                 <a:latin typeface="Helvetica Neue"/>
               </a:rPr>
-              <a:t>No false or misleading claims about Zebraish, its products, or services.</a:t>
+              <a:t>Zebraish gets a non-exclusive license to use approved content (photos, videos, your name) for promotional purposes on Instagram, TikTok, the website, and ads.</a:t>
             </a:r>
           </a:p>
           <a:p>
@@ -6910,7 +6986,7 @@
                 </a:solidFill>
                 <a:latin typeface="Helvetica Neue"/>
               </a:rPr>
-              <a:t>Don't imply you're an owner, director, or officer of Zebraish.</a:t>
+              <a:t>That license runs during the Term, plus 6 months after it ends — for archival and portfolio use only, not new campaigns.</a:t>
             </a:r>
           </a:p>
           <a:p>
@@ -6938,35 +7014,7 @@
                 </a:solidFill>
                 <a:latin typeface="Helvetica Neue"/>
               </a:rPr>
-              <a:t>No unauthorized promises or commitments on Zebraish's behalf.</a:t>
-            </a:r>
-          </a:p>
-          <a:p>
-            <a:pPr>
-              <a:lnSpc>
-                <a:spcPct val="125000"/>
-              </a:lnSpc>
-              <a:spcAft>
-                <a:spcPts val="1000"/>
-              </a:spcAft>
-            </a:pPr>
-            <a:r>
-              <a:rPr sz="1550" b="1">
-                <a:solidFill>
-                  <a:srgbClr val="4E9BF0"/>
-                </a:solidFill>
-                <a:latin typeface="Helvetica Neue"/>
-              </a:rPr>
-              <a:t>—  </a:t>
-            </a:r>
-            <a:r>
-              <a:rPr sz="1550">
-                <a:solidFill>
-                  <a:srgbClr val="FFFFFF"/>
-                </a:solidFill>
-                <a:latin typeface="Helvetica Neue"/>
-              </a:rPr>
-              <a:t>Paid advertising or sponsorships need Joshua's written approval before you commit to any spend.</a:t>
+              <a:t>Confidential Zebraish information (products, pricing, strategy) stays confidential — during and after the Term.</a:t>
             </a:r>
           </a:p>
         </p:txBody>
@@ -7197,7 +7245,7 @@
           <a:p>
             <a:pPr algn="l">
               <a:lnSpc>
-                <a:spcPct val="105000"/>
+                <a:spcPct val="115000"/>
               </a:lnSpc>
             </a:pPr>
             <a:r>
@@ -7207,7 +7255,7 @@
                 </a:solidFill>
                 <a:latin typeface="Helvetica Neue"/>
               </a:rPr>
-              <a:t>Content &amp; your rights</a:t>
+              <a:t>Term &amp; how it ends</a:t>
             </a:r>
           </a:p>
         </p:txBody>
@@ -7249,142 +7297,774 @@
       </p:cxnSp>
       <p:sp>
         <p:nvSpPr>
-          <p:cNvPr id="5" name="TextBox 4"/>
-          <p:cNvSpPr txBox="1"/>
-          <p:nvPr/>
-        </p:nvSpPr>
-        <p:spPr>
-          <a:xfrm>
-            <a:off x="685800" y="1965960"/>
-            <a:ext cx="10424160" cy="3931920"/>
-          </a:xfrm>
-          <a:prstGeom prst="rect">
-            <a:avLst/>
-          </a:prstGeom>
-          <a:noFill/>
-        </p:spPr>
-        <p:txBody>
-          <a:bodyPr wrap="square" lIns="0" rIns="0">
-            <a:spAutoFit/>
-          </a:bodyPr>
-          <a:lstStyle/>
-          <a:p>
-            <a:pPr>
-              <a:lnSpc>
-                <a:spcPct val="125000"/>
-              </a:lnSpc>
-              <a:spcAft>
-                <a:spcPts val="1000"/>
-              </a:spcAft>
-            </a:pPr>
-            <a:r>
-              <a:rPr sz="1550" b="1">
-                <a:solidFill>
-                  <a:srgbClr val="4E9BF0"/>
-                </a:solidFill>
-                <a:latin typeface="Helvetica Neue"/>
-              </a:rPr>
-              <a:t>—  </a:t>
-            </a:r>
-            <a:r>
-              <a:rPr sz="1550">
+          <p:cNvPr id="5" name="Rectangle 4"/>
+          <p:cNvSpPr/>
+          <p:nvPr/>
+        </p:nvSpPr>
+        <p:spPr>
+          <a:xfrm>
+            <a:off x="685800" y="1920240"/>
+            <a:ext cx="10817352" cy="621792"/>
+          </a:xfrm>
+          <a:prstGeom prst="rect">
+            <a:avLst/>
+          </a:prstGeom>
+          <a:solidFill>
+            <a:srgbClr val="1D68C0"/>
+          </a:solidFill>
+          <a:ln>
+            <a:noFill/>
+          </a:ln>
+          <a:effectLst/>
+        </p:spPr>
+        <p:style>
+          <a:lnRef idx="1">
+            <a:schemeClr val="accent1"/>
+          </a:lnRef>
+          <a:fillRef idx="3">
+            <a:schemeClr val="accent1"/>
+          </a:fillRef>
+          <a:effectRef idx="2">
+            <a:schemeClr val="accent1"/>
+          </a:effectRef>
+          <a:fontRef idx="minor">
+            <a:schemeClr val="lt1"/>
+          </a:fontRef>
+        </p:style>
+        <p:txBody>
+          <a:bodyPr rtlCol="0" anchor="ctr"/>
+          <a:lstStyle/>
+          <a:p>
+            <a:pPr algn="ctr"/>
+          </a:p>
+        </p:txBody>
+      </p:sp>
+      <p:sp>
+        <p:nvSpPr>
+          <p:cNvPr id="6" name="TextBox 5"/>
+          <p:cNvSpPr txBox="1"/>
+          <p:nvPr/>
+        </p:nvSpPr>
+        <p:spPr>
+          <a:xfrm>
+            <a:off x="868680" y="2029968"/>
+            <a:ext cx="4846320" cy="621792"/>
+          </a:xfrm>
+          <a:prstGeom prst="rect">
+            <a:avLst/>
+          </a:prstGeom>
+          <a:noFill/>
+        </p:spPr>
+        <p:txBody>
+          <a:bodyPr wrap="square" anchor="t" lIns="0" rIns="0" tIns="0" bIns="0">
+            <a:spAutoFit/>
+          </a:bodyPr>
+          <a:lstStyle/>
+          <a:p>
+            <a:pPr algn="l">
+              <a:lnSpc>
+                <a:spcPct val="115000"/>
+              </a:lnSpc>
+            </a:pPr>
+            <a:r>
+              <a:rPr sz="1250" b="1">
                 <a:solidFill>
                   <a:srgbClr val="FFFFFF"/>
                 </a:solidFill>
                 <a:latin typeface="Helvetica Neue"/>
               </a:rPr>
-              <a:t>You keep full ownership of your identity, image, and likeness — always.</a:t>
-            </a:r>
-          </a:p>
-          <a:p>
-            <a:pPr>
-              <a:lnSpc>
-                <a:spcPct val="125000"/>
-              </a:lnSpc>
-              <a:spcAft>
-                <a:spcPts val="1000"/>
-              </a:spcAft>
-            </a:pPr>
-            <a:r>
-              <a:rPr sz="1550" b="1">
-                <a:solidFill>
-                  <a:srgbClr val="4E9BF0"/>
-                </a:solidFill>
-                <a:latin typeface="Helvetica Neue"/>
-              </a:rPr>
-              <a:t>—  </a:t>
-            </a:r>
-            <a:r>
-              <a:rPr sz="1550">
+              <a:t>Item</a:t>
+            </a:r>
+          </a:p>
+        </p:txBody>
+      </p:sp>
+      <p:sp>
+        <p:nvSpPr>
+          <p:cNvPr id="7" name="TextBox 6"/>
+          <p:cNvSpPr txBox="1"/>
+          <p:nvPr/>
+        </p:nvSpPr>
+        <p:spPr>
+          <a:xfrm>
+            <a:off x="5989320" y="2029968"/>
+            <a:ext cx="5422392" cy="621792"/>
+          </a:xfrm>
+          <a:prstGeom prst="rect">
+            <a:avLst/>
+          </a:prstGeom>
+          <a:noFill/>
+        </p:spPr>
+        <p:txBody>
+          <a:bodyPr wrap="square" anchor="t" lIns="0" rIns="0" tIns="0" bIns="0">
+            <a:spAutoFit/>
+          </a:bodyPr>
+          <a:lstStyle/>
+          <a:p>
+            <a:pPr algn="l">
+              <a:lnSpc>
+                <a:spcPct val="115000"/>
+              </a:lnSpc>
+            </a:pPr>
+            <a:r>
+              <a:rPr sz="1250" b="1">
                 <a:solidFill>
                   <a:srgbClr val="FFFFFF"/>
                 </a:solidFill>
                 <a:latin typeface="Helvetica Neue"/>
               </a:rPr>
-              <a:t>Zebraish gets a non-exclusive license to use approved content (photos, videos, your name) for promotional purposes on Instagram, TikTok, the website, and ads.</a:t>
-            </a:r>
-          </a:p>
-          <a:p>
-            <a:pPr>
-              <a:lnSpc>
-                <a:spcPct val="125000"/>
-              </a:lnSpc>
-              <a:spcAft>
-                <a:spcPts val="1000"/>
-              </a:spcAft>
-            </a:pPr>
-            <a:r>
-              <a:rPr sz="1550" b="1">
-                <a:solidFill>
-                  <a:srgbClr val="4E9BF0"/>
-                </a:solidFill>
-                <a:latin typeface="Helvetica Neue"/>
-              </a:rPr>
-              <a:t>—  </a:t>
-            </a:r>
-            <a:r>
-              <a:rPr sz="1550">
+              <a:t>Detail</a:t>
+            </a:r>
+          </a:p>
+        </p:txBody>
+      </p:sp>
+      <p:sp>
+        <p:nvSpPr>
+          <p:cNvPr id="8" name="Rectangle 7"/>
+          <p:cNvSpPr/>
+          <p:nvPr/>
+        </p:nvSpPr>
+        <p:spPr>
+          <a:xfrm>
+            <a:off x="685800" y="2542032"/>
+            <a:ext cx="10817352" cy="621792"/>
+          </a:xfrm>
+          <a:prstGeom prst="rect">
+            <a:avLst/>
+          </a:prstGeom>
+          <a:solidFill>
+            <a:srgbClr val="141720"/>
+          </a:solidFill>
+          <a:ln>
+            <a:noFill/>
+          </a:ln>
+          <a:effectLst/>
+        </p:spPr>
+        <p:style>
+          <a:lnRef idx="1">
+            <a:schemeClr val="accent1"/>
+          </a:lnRef>
+          <a:fillRef idx="3">
+            <a:schemeClr val="accent1"/>
+          </a:fillRef>
+          <a:effectRef idx="2">
+            <a:schemeClr val="accent1"/>
+          </a:effectRef>
+          <a:fontRef idx="minor">
+            <a:schemeClr val="lt1"/>
+          </a:fontRef>
+        </p:style>
+        <p:txBody>
+          <a:bodyPr rtlCol="0" anchor="ctr"/>
+          <a:lstStyle/>
+          <a:p>
+            <a:pPr algn="ctr"/>
+          </a:p>
+        </p:txBody>
+      </p:sp>
+      <p:sp>
+        <p:nvSpPr>
+          <p:cNvPr id="9" name="TextBox 8"/>
+          <p:cNvSpPr txBox="1"/>
+          <p:nvPr/>
+        </p:nvSpPr>
+        <p:spPr>
+          <a:xfrm>
+            <a:off x="868680" y="2633472"/>
+            <a:ext cx="4846320" cy="621792"/>
+          </a:xfrm>
+          <a:prstGeom prst="rect">
+            <a:avLst/>
+          </a:prstGeom>
+          <a:noFill/>
+        </p:spPr>
+        <p:txBody>
+          <a:bodyPr wrap="square" anchor="t" lIns="0" rIns="0" tIns="0" bIns="0">
+            <a:spAutoFit/>
+          </a:bodyPr>
+          <a:lstStyle/>
+          <a:p>
+            <a:pPr algn="l">
+              <a:lnSpc>
+                <a:spcPct val="115000"/>
+              </a:lnSpc>
+            </a:pPr>
+            <a:r>
+              <a:rPr sz="1300" b="1">
                 <a:solidFill>
                   <a:srgbClr val="FFFFFF"/>
                 </a:solidFill>
                 <a:latin typeface="Helvetica Neue"/>
               </a:rPr>
-              <a:t>That license runs during the Term, plus 6 months after it ends — for archival and portfolio use only, not new campaigns.</a:t>
-            </a:r>
-          </a:p>
-          <a:p>
-            <a:pPr>
-              <a:lnSpc>
-                <a:spcPct val="125000"/>
-              </a:lnSpc>
-              <a:spcAft>
-                <a:spcPts val="1000"/>
-              </a:spcAft>
-            </a:pPr>
-            <a:r>
-              <a:rPr sz="1550" b="1">
-                <a:solidFill>
-                  <a:srgbClr val="4E9BF0"/>
-                </a:solidFill>
-                <a:latin typeface="Helvetica Neue"/>
-              </a:rPr>
-              <a:t>—  </a:t>
-            </a:r>
-            <a:r>
-              <a:rPr sz="1550">
+              <a:t>Initial Term</a:t>
+            </a:r>
+          </a:p>
+        </p:txBody>
+      </p:sp>
+      <p:sp>
+        <p:nvSpPr>
+          <p:cNvPr id="10" name="TextBox 9"/>
+          <p:cNvSpPr txBox="1"/>
+          <p:nvPr/>
+        </p:nvSpPr>
+        <p:spPr>
+          <a:xfrm>
+            <a:off x="5989320" y="2633472"/>
+            <a:ext cx="5422392" cy="621792"/>
+          </a:xfrm>
+          <a:prstGeom prst="rect">
+            <a:avLst/>
+          </a:prstGeom>
+          <a:noFill/>
+        </p:spPr>
+        <p:txBody>
+          <a:bodyPr wrap="square" anchor="t" lIns="0" rIns="0" tIns="0" bIns="0">
+            <a:spAutoFit/>
+          </a:bodyPr>
+          <a:lstStyle/>
+          <a:p>
+            <a:pPr algn="l">
+              <a:lnSpc>
+                <a:spcPct val="115000"/>
+              </a:lnSpc>
+            </a:pPr>
+            <a:r>
+              <a:rPr sz="1300" b="0">
+                <a:solidFill>
+                  <a:srgbClr val="A6ACBA"/>
+                </a:solidFill>
+                <a:latin typeface="Helvetica Neue"/>
+              </a:rPr>
+              <a:t>3 months from the date of last signature</a:t>
+            </a:r>
+          </a:p>
+        </p:txBody>
+      </p:sp>
+      <p:sp>
+        <p:nvSpPr>
+          <p:cNvPr id="11" name="Rectangle 10"/>
+          <p:cNvSpPr/>
+          <p:nvPr/>
+        </p:nvSpPr>
+        <p:spPr>
+          <a:xfrm>
+            <a:off x="685800" y="3163824"/>
+            <a:ext cx="10817352" cy="621792"/>
+          </a:xfrm>
+          <a:prstGeom prst="rect">
+            <a:avLst/>
+          </a:prstGeom>
+          <a:solidFill>
+            <a:srgbClr val="0B0D12"/>
+          </a:solidFill>
+          <a:ln>
+            <a:noFill/>
+          </a:ln>
+          <a:effectLst/>
+        </p:spPr>
+        <p:style>
+          <a:lnRef idx="1">
+            <a:schemeClr val="accent1"/>
+          </a:lnRef>
+          <a:fillRef idx="3">
+            <a:schemeClr val="accent1"/>
+          </a:fillRef>
+          <a:effectRef idx="2">
+            <a:schemeClr val="accent1"/>
+          </a:effectRef>
+          <a:fontRef idx="minor">
+            <a:schemeClr val="lt1"/>
+          </a:fontRef>
+        </p:style>
+        <p:txBody>
+          <a:bodyPr rtlCol="0" anchor="ctr"/>
+          <a:lstStyle/>
+          <a:p>
+            <a:pPr algn="ctr"/>
+          </a:p>
+        </p:txBody>
+      </p:sp>
+      <p:sp>
+        <p:nvSpPr>
+          <p:cNvPr id="12" name="TextBox 11"/>
+          <p:cNvSpPr txBox="1"/>
+          <p:nvPr/>
+        </p:nvSpPr>
+        <p:spPr>
+          <a:xfrm>
+            <a:off x="868680" y="3255264"/>
+            <a:ext cx="4846320" cy="621792"/>
+          </a:xfrm>
+          <a:prstGeom prst="rect">
+            <a:avLst/>
+          </a:prstGeom>
+          <a:noFill/>
+        </p:spPr>
+        <p:txBody>
+          <a:bodyPr wrap="square" anchor="t" lIns="0" rIns="0" tIns="0" bIns="0">
+            <a:spAutoFit/>
+          </a:bodyPr>
+          <a:lstStyle/>
+          <a:p>
+            <a:pPr algn="l">
+              <a:lnSpc>
+                <a:spcPct val="115000"/>
+              </a:lnSpc>
+            </a:pPr>
+            <a:r>
+              <a:rPr sz="1300" b="1">
                 <a:solidFill>
                   <a:srgbClr val="FFFFFF"/>
                 </a:solidFill>
                 <a:latin typeface="Helvetica Neue"/>
               </a:rPr>
-              <a:t>Confidential Zebraish information (products, pricing, strategy) stays confidential — during and after the Term.</a:t>
-            </a:r>
-          </a:p>
-        </p:txBody>
-      </p:sp>
+              <a:t>Renewal</a:t>
+            </a:r>
+          </a:p>
+        </p:txBody>
+      </p:sp>
+      <p:sp>
+        <p:nvSpPr>
+          <p:cNvPr id="13" name="TextBox 12"/>
+          <p:cNvSpPr txBox="1"/>
+          <p:nvPr/>
+        </p:nvSpPr>
+        <p:spPr>
+          <a:xfrm>
+            <a:off x="5989320" y="3255264"/>
+            <a:ext cx="5422392" cy="621792"/>
+          </a:xfrm>
+          <a:prstGeom prst="rect">
+            <a:avLst/>
+          </a:prstGeom>
+          <a:noFill/>
+        </p:spPr>
+        <p:txBody>
+          <a:bodyPr wrap="square" anchor="t" lIns="0" rIns="0" tIns="0" bIns="0">
+            <a:spAutoFit/>
+          </a:bodyPr>
+          <a:lstStyle/>
+          <a:p>
+            <a:pPr algn="l">
+              <a:lnSpc>
+                <a:spcPct val="115000"/>
+              </a:lnSpc>
+            </a:pPr>
+            <a:r>
+              <a:rPr sz="1300" b="0">
+                <a:solidFill>
+                  <a:srgbClr val="A6ACBA"/>
+                </a:solidFill>
+                <a:latin typeface="Helvetica Neue"/>
+              </a:rPr>
+              <a:t>Only by mutual written agreement — otherwise it ends automatically</a:t>
+            </a:r>
+          </a:p>
+        </p:txBody>
+      </p:sp>
+      <p:sp>
+        <p:nvSpPr>
+          <p:cNvPr id="14" name="Rectangle 13"/>
+          <p:cNvSpPr/>
+          <p:nvPr/>
+        </p:nvSpPr>
+        <p:spPr>
+          <a:xfrm>
+            <a:off x="685800" y="3785616"/>
+            <a:ext cx="10817352" cy="621792"/>
+          </a:xfrm>
+          <a:prstGeom prst="rect">
+            <a:avLst/>
+          </a:prstGeom>
+          <a:solidFill>
+            <a:srgbClr val="141720"/>
+          </a:solidFill>
+          <a:ln>
+            <a:noFill/>
+          </a:ln>
+          <a:effectLst/>
+        </p:spPr>
+        <p:style>
+          <a:lnRef idx="1">
+            <a:schemeClr val="accent1"/>
+          </a:lnRef>
+          <a:fillRef idx="3">
+            <a:schemeClr val="accent1"/>
+          </a:fillRef>
+          <a:effectRef idx="2">
+            <a:schemeClr val="accent1"/>
+          </a:effectRef>
+          <a:fontRef idx="minor">
+            <a:schemeClr val="lt1"/>
+          </a:fontRef>
+        </p:style>
+        <p:txBody>
+          <a:bodyPr rtlCol="0" anchor="ctr"/>
+          <a:lstStyle/>
+          <a:p>
+            <a:pPr algn="ctr"/>
+          </a:p>
+        </p:txBody>
+      </p:sp>
+      <p:sp>
+        <p:nvSpPr>
+          <p:cNvPr id="15" name="TextBox 14"/>
+          <p:cNvSpPr txBox="1"/>
+          <p:nvPr/>
+        </p:nvSpPr>
+        <p:spPr>
+          <a:xfrm>
+            <a:off x="868680" y="3877056"/>
+            <a:ext cx="4846320" cy="621792"/>
+          </a:xfrm>
+          <a:prstGeom prst="rect">
+            <a:avLst/>
+          </a:prstGeom>
+          <a:noFill/>
+        </p:spPr>
+        <p:txBody>
+          <a:bodyPr wrap="square" anchor="t" lIns="0" rIns="0" tIns="0" bIns="0">
+            <a:spAutoFit/>
+          </a:bodyPr>
+          <a:lstStyle/>
+          <a:p>
+            <a:pPr algn="l">
+              <a:lnSpc>
+                <a:spcPct val="115000"/>
+              </a:lnSpc>
+            </a:pPr>
+            <a:r>
+              <a:rPr sz="1300" b="1">
+                <a:solidFill>
+                  <a:srgbClr val="FFFFFF"/>
+                </a:solidFill>
+                <a:latin typeface="Helvetica Neue"/>
+              </a:rPr>
+              <a:t>Termination for convenience</a:t>
+            </a:r>
+          </a:p>
+        </p:txBody>
+      </p:sp>
+      <p:sp>
+        <p:nvSpPr>
+          <p:cNvPr id="16" name="TextBox 15"/>
+          <p:cNvSpPr txBox="1"/>
+          <p:nvPr/>
+        </p:nvSpPr>
+        <p:spPr>
+          <a:xfrm>
+            <a:off x="5989320" y="3877056"/>
+            <a:ext cx="5422392" cy="621792"/>
+          </a:xfrm>
+          <a:prstGeom prst="rect">
+            <a:avLst/>
+          </a:prstGeom>
+          <a:noFill/>
+        </p:spPr>
+        <p:txBody>
+          <a:bodyPr wrap="square" anchor="t" lIns="0" rIns="0" tIns="0" bIns="0">
+            <a:spAutoFit/>
+          </a:bodyPr>
+          <a:lstStyle/>
+          <a:p>
+            <a:pPr algn="l">
+              <a:lnSpc>
+                <a:spcPct val="115000"/>
+              </a:lnSpc>
+            </a:pPr>
+            <a:r>
+              <a:rPr sz="1300" b="0">
+                <a:solidFill>
+                  <a:srgbClr val="A6ACBA"/>
+                </a:solidFill>
+                <a:latin typeface="Helvetica Neue"/>
+              </a:rPr>
+              <a:t>14 days' written notice, either side</a:t>
+            </a:r>
+          </a:p>
+        </p:txBody>
+      </p:sp>
+      <p:sp>
+        <p:nvSpPr>
+          <p:cNvPr id="17" name="Rectangle 16"/>
+          <p:cNvSpPr/>
+          <p:nvPr/>
+        </p:nvSpPr>
+        <p:spPr>
+          <a:xfrm>
+            <a:off x="685800" y="4407408"/>
+            <a:ext cx="10817352" cy="621792"/>
+          </a:xfrm>
+          <a:prstGeom prst="rect">
+            <a:avLst/>
+          </a:prstGeom>
+          <a:solidFill>
+            <a:srgbClr val="0B0D12"/>
+          </a:solidFill>
+          <a:ln>
+            <a:noFill/>
+          </a:ln>
+          <a:effectLst/>
+        </p:spPr>
+        <p:style>
+          <a:lnRef idx="1">
+            <a:schemeClr val="accent1"/>
+          </a:lnRef>
+          <a:fillRef idx="3">
+            <a:schemeClr val="accent1"/>
+          </a:fillRef>
+          <a:effectRef idx="2">
+            <a:schemeClr val="accent1"/>
+          </a:effectRef>
+          <a:fontRef idx="minor">
+            <a:schemeClr val="lt1"/>
+          </a:fontRef>
+        </p:style>
+        <p:txBody>
+          <a:bodyPr rtlCol="0" anchor="ctr"/>
+          <a:lstStyle/>
+          <a:p>
+            <a:pPr algn="ctr"/>
+          </a:p>
+        </p:txBody>
+      </p:sp>
+      <p:sp>
+        <p:nvSpPr>
+          <p:cNvPr id="18" name="TextBox 17"/>
+          <p:cNvSpPr txBox="1"/>
+          <p:nvPr/>
+        </p:nvSpPr>
+        <p:spPr>
+          <a:xfrm>
+            <a:off x="868680" y="4498848"/>
+            <a:ext cx="4846320" cy="621792"/>
+          </a:xfrm>
+          <a:prstGeom prst="rect">
+            <a:avLst/>
+          </a:prstGeom>
+          <a:noFill/>
+        </p:spPr>
+        <p:txBody>
+          <a:bodyPr wrap="square" anchor="t" lIns="0" rIns="0" tIns="0" bIns="0">
+            <a:spAutoFit/>
+          </a:bodyPr>
+          <a:lstStyle/>
+          <a:p>
+            <a:pPr algn="l">
+              <a:lnSpc>
+                <a:spcPct val="115000"/>
+              </a:lnSpc>
+            </a:pPr>
+            <a:r>
+              <a:rPr sz="1300" b="1">
+                <a:solidFill>
+                  <a:srgbClr val="FFFFFF"/>
+                </a:solidFill>
+                <a:latin typeface="Helvetica Neue"/>
+              </a:rPr>
+              <a:t>Immediate termination</a:t>
+            </a:r>
+          </a:p>
+        </p:txBody>
+      </p:sp>
+      <p:sp>
+        <p:nvSpPr>
+          <p:cNvPr id="19" name="TextBox 18"/>
+          <p:cNvSpPr txBox="1"/>
+          <p:nvPr/>
+        </p:nvSpPr>
+        <p:spPr>
+          <a:xfrm>
+            <a:off x="5989320" y="4498848"/>
+            <a:ext cx="5422392" cy="621792"/>
+          </a:xfrm>
+          <a:prstGeom prst="rect">
+            <a:avLst/>
+          </a:prstGeom>
+          <a:noFill/>
+        </p:spPr>
+        <p:txBody>
+          <a:bodyPr wrap="square" anchor="t" lIns="0" rIns="0" tIns="0" bIns="0">
+            <a:spAutoFit/>
+          </a:bodyPr>
+          <a:lstStyle/>
+          <a:p>
+            <a:pPr algn="l">
+              <a:lnSpc>
+                <a:spcPct val="115000"/>
+              </a:lnSpc>
+            </a:pPr>
+            <a:r>
+              <a:rPr sz="1300" b="0">
+                <a:solidFill>
+                  <a:srgbClr val="A6ACBA"/>
+                </a:solidFill>
+                <a:latin typeface="Helvetica Neue"/>
+              </a:rPr>
+              <a:t>For serious misconduct, fraud, or an unremedied breach</a:t>
+            </a:r>
+          </a:p>
+        </p:txBody>
+      </p:sp>
+      <p:sp>
+        <p:nvSpPr>
+          <p:cNvPr id="20" name="Rectangle 19"/>
+          <p:cNvSpPr/>
+          <p:nvPr/>
+        </p:nvSpPr>
+        <p:spPr>
+          <a:xfrm>
+            <a:off x="685800" y="5029200"/>
+            <a:ext cx="10817352" cy="621792"/>
+          </a:xfrm>
+          <a:prstGeom prst="rect">
+            <a:avLst/>
+          </a:prstGeom>
+          <a:solidFill>
+            <a:srgbClr val="141720"/>
+          </a:solidFill>
+          <a:ln>
+            <a:noFill/>
+          </a:ln>
+          <a:effectLst/>
+        </p:spPr>
+        <p:style>
+          <a:lnRef idx="1">
+            <a:schemeClr val="accent1"/>
+          </a:lnRef>
+          <a:fillRef idx="3">
+            <a:schemeClr val="accent1"/>
+          </a:fillRef>
+          <a:effectRef idx="2">
+            <a:schemeClr val="accent1"/>
+          </a:effectRef>
+          <a:fontRef idx="minor">
+            <a:schemeClr val="lt1"/>
+          </a:fontRef>
+        </p:style>
+        <p:txBody>
+          <a:bodyPr rtlCol="0" anchor="ctr"/>
+          <a:lstStyle/>
+          <a:p>
+            <a:pPr algn="ctr"/>
+          </a:p>
+        </p:txBody>
+      </p:sp>
+      <p:sp>
+        <p:nvSpPr>
+          <p:cNvPr id="21" name="TextBox 20"/>
+          <p:cNvSpPr txBox="1"/>
+          <p:nvPr/>
+        </p:nvSpPr>
+        <p:spPr>
+          <a:xfrm>
+            <a:off x="868680" y="5120640"/>
+            <a:ext cx="4846320" cy="621792"/>
+          </a:xfrm>
+          <a:prstGeom prst="rect">
+            <a:avLst/>
+          </a:prstGeom>
+          <a:noFill/>
+        </p:spPr>
+        <p:txBody>
+          <a:bodyPr wrap="square" anchor="t" lIns="0" rIns="0" tIns="0" bIns="0">
+            <a:spAutoFit/>
+          </a:bodyPr>
+          <a:lstStyle/>
+          <a:p>
+            <a:pPr algn="l">
+              <a:lnSpc>
+                <a:spcPct val="115000"/>
+              </a:lnSpc>
+            </a:pPr>
+            <a:r>
+              <a:rPr sz="1300" b="1">
+                <a:solidFill>
+                  <a:srgbClr val="FFFFFF"/>
+                </a:solidFill>
+                <a:latin typeface="Helvetica Neue"/>
+              </a:rPr>
+              <a:t>After termination</a:t>
+            </a:r>
+          </a:p>
+        </p:txBody>
+      </p:sp>
+      <p:sp>
+        <p:nvSpPr>
+          <p:cNvPr id="22" name="TextBox 21"/>
+          <p:cNvSpPr txBox="1"/>
+          <p:nvPr/>
+        </p:nvSpPr>
+        <p:spPr>
+          <a:xfrm>
+            <a:off x="5989320" y="5120640"/>
+            <a:ext cx="5422392" cy="621792"/>
+          </a:xfrm>
+          <a:prstGeom prst="rect">
+            <a:avLst/>
+          </a:prstGeom>
+          <a:noFill/>
+        </p:spPr>
+        <p:txBody>
+          <a:bodyPr wrap="square" anchor="t" lIns="0" rIns="0" tIns="0" bIns="0">
+            <a:spAutoFit/>
+          </a:bodyPr>
+          <a:lstStyle/>
+          <a:p>
+            <a:pPr algn="l">
+              <a:lnSpc>
+                <a:spcPct val="115000"/>
+              </a:lnSpc>
+            </a:pPr>
+            <a:r>
+              <a:rPr sz="1300" b="0">
+                <a:solidFill>
+                  <a:srgbClr val="A6ACBA"/>
+                </a:solidFill>
+                <a:latin typeface="Helvetica Neue"/>
+              </a:rPr>
+              <a:t>Commission already earned on qualifying payments stays payable</a:t>
+            </a:r>
+          </a:p>
+        </p:txBody>
+      </p:sp>
+      <p:cxnSp>
+        <p:nvCxnSpPr>
+          <p:cNvPr id="23" name="Connector 22"/>
+          <p:cNvCxnSpPr/>
+          <p:nvPr/>
+        </p:nvCxnSpPr>
+        <p:spPr>
+          <a:xfrm>
+            <a:off x="685800" y="1920240"/>
+            <a:ext cx="10817352" cy="0"/>
+          </a:xfrm>
+          <a:prstGeom prst="line">
+            <a:avLst/>
+          </a:prstGeom>
+          <a:ln w="12700">
+            <a:solidFill>
+              <a:srgbClr val="2A2E3A"/>
+            </a:solidFill>
+          </a:ln>
+        </p:spPr>
+        <p:style>
+          <a:lnRef idx="2">
+            <a:schemeClr val="accent1"/>
+          </a:lnRef>
+          <a:fillRef idx="0">
+            <a:schemeClr val="accent1"/>
+          </a:fillRef>
+          <a:effectRef idx="1">
+            <a:schemeClr val="accent1"/>
+          </a:effectRef>
+          <a:fontRef idx="minor">
+            <a:schemeClr val="tx1"/>
+          </a:fontRef>
+        </p:style>
+      </p:cxnSp>
       <p:pic>
         <p:nvPicPr>
-          <p:cNvPr id="6" name="Picture 5" descr="logo-head.png"/>
+          <p:cNvPr id="24" name="Picture 23" descr="logo-head.png"/>
           <p:cNvPicPr>
             <a:picLocks noChangeAspect="1"/>
           </p:cNvPicPr>
@@ -7408,7 +8088,7 @@
       </p:pic>
       <p:sp>
         <p:nvSpPr>
-          <p:cNvPr id="7" name="TextBox 6"/>
+          <p:cNvPr id="25" name="TextBox 24"/>
           <p:cNvSpPr txBox="1"/>
           <p:nvPr/>
         </p:nvSpPr>
@@ -7447,7 +8127,7 @@
       </p:sp>
       <p:sp>
         <p:nvSpPr>
-          <p:cNvPr id="8" name="TextBox 7"/>
+          <p:cNvPr id="26" name="TextBox 25"/>
           <p:cNvSpPr txBox="1"/>
           <p:nvPr/>
         </p:nvSpPr>
@@ -7486,7 +8166,7 @@
       </p:sp>
       <p:cxnSp>
         <p:nvCxnSpPr>
-          <p:cNvPr id="9" name="Connector 8"/>
+          <p:cNvPr id="27" name="Connector 26"/>
           <p:cNvCxnSpPr/>
           <p:nvPr/>
         </p:nvCxnSpPr>
@@ -7608,7 +8288,7 @@
           <a:p>
             <a:pPr algn="l">
               <a:lnSpc>
-                <a:spcPct val="115000"/>
+                <a:spcPct val="105000"/>
               </a:lnSpc>
             </a:pPr>
             <a:r>
@@ -7618,7 +8298,7 @@
                 </a:solidFill>
                 <a:latin typeface="Helvetica Neue"/>
               </a:rPr>
-              <a:t>Term &amp; how it ends</a:t>
+              <a:t>Paid advertising &amp; monthly check-ins</a:t>
             </a:r>
           </a:p>
         </p:txBody>
@@ -7660,774 +8340,114 @@
       </p:cxnSp>
       <p:sp>
         <p:nvSpPr>
-          <p:cNvPr id="5" name="Rectangle 4"/>
-          <p:cNvSpPr/>
-          <p:nvPr/>
-        </p:nvSpPr>
-        <p:spPr>
-          <a:xfrm>
-            <a:off x="685800" y="1920240"/>
-            <a:ext cx="10817352" cy="621792"/>
-          </a:xfrm>
-          <a:prstGeom prst="rect">
-            <a:avLst/>
-          </a:prstGeom>
-          <a:solidFill>
-            <a:srgbClr val="1D68C0"/>
-          </a:solidFill>
-          <a:ln>
-            <a:noFill/>
-          </a:ln>
-          <a:effectLst/>
-        </p:spPr>
-        <p:style>
-          <a:lnRef idx="1">
-            <a:schemeClr val="accent1"/>
-          </a:lnRef>
-          <a:fillRef idx="3">
-            <a:schemeClr val="accent1"/>
-          </a:fillRef>
-          <a:effectRef idx="2">
-            <a:schemeClr val="accent1"/>
-          </a:effectRef>
-          <a:fontRef idx="minor">
-            <a:schemeClr val="lt1"/>
-          </a:fontRef>
-        </p:style>
-        <p:txBody>
-          <a:bodyPr rtlCol="0" anchor="ctr"/>
-          <a:lstStyle/>
-          <a:p>
-            <a:pPr algn="ctr"/>
-          </a:p>
-        </p:txBody>
-      </p:sp>
-      <p:sp>
-        <p:nvSpPr>
-          <p:cNvPr id="6" name="TextBox 5"/>
-          <p:cNvSpPr txBox="1"/>
-          <p:nvPr/>
-        </p:nvSpPr>
-        <p:spPr>
-          <a:xfrm>
-            <a:off x="868680" y="2029968"/>
-            <a:ext cx="4846320" cy="621792"/>
-          </a:xfrm>
-          <a:prstGeom prst="rect">
-            <a:avLst/>
-          </a:prstGeom>
-          <a:noFill/>
-        </p:spPr>
-        <p:txBody>
-          <a:bodyPr wrap="square" anchor="t" lIns="0" rIns="0" tIns="0" bIns="0">
-            <a:spAutoFit/>
-          </a:bodyPr>
-          <a:lstStyle/>
-          <a:p>
-            <a:pPr algn="l">
-              <a:lnSpc>
-                <a:spcPct val="115000"/>
-              </a:lnSpc>
-            </a:pPr>
-            <a:r>
-              <a:rPr sz="1250" b="1">
+          <p:cNvPr id="5" name="TextBox 4"/>
+          <p:cNvSpPr txBox="1"/>
+          <p:nvPr/>
+        </p:nvSpPr>
+        <p:spPr>
+          <a:xfrm>
+            <a:off x="685800" y="1965960"/>
+            <a:ext cx="10424160" cy="3931920"/>
+          </a:xfrm>
+          <a:prstGeom prst="rect">
+            <a:avLst/>
+          </a:prstGeom>
+          <a:noFill/>
+        </p:spPr>
+        <p:txBody>
+          <a:bodyPr wrap="square" lIns="0" rIns="0">
+            <a:spAutoFit/>
+          </a:bodyPr>
+          <a:lstStyle/>
+          <a:p>
+            <a:pPr>
+              <a:lnSpc>
+                <a:spcPct val="125000"/>
+              </a:lnSpc>
+              <a:spcAft>
+                <a:spcPts val="1000"/>
+              </a:spcAft>
+            </a:pPr>
+            <a:r>
+              <a:rPr sz="1550" b="1">
+                <a:solidFill>
+                  <a:srgbClr val="4E9BF0"/>
+                </a:solidFill>
+                <a:latin typeface="Helvetica Neue"/>
+              </a:rPr>
+              <a:t>—  </a:t>
+            </a:r>
+            <a:r>
+              <a:rPr sz="1550">
                 <a:solidFill>
                   <a:srgbClr val="FFFFFF"/>
                 </a:solidFill>
                 <a:latin typeface="Helvetica Neue"/>
               </a:rPr>
-              <a:t>Item</a:t>
-            </a:r>
-          </a:p>
-        </p:txBody>
-      </p:sp>
-      <p:sp>
-        <p:nvSpPr>
-          <p:cNvPr id="7" name="TextBox 6"/>
-          <p:cNvSpPr txBox="1"/>
-          <p:nvPr/>
-        </p:nvSpPr>
-        <p:spPr>
-          <a:xfrm>
-            <a:off x="5989320" y="2029968"/>
-            <a:ext cx="5422392" cy="621792"/>
-          </a:xfrm>
-          <a:prstGeom prst="rect">
-            <a:avLst/>
-          </a:prstGeom>
-          <a:noFill/>
-        </p:spPr>
-        <p:txBody>
-          <a:bodyPr wrap="square" anchor="t" lIns="0" rIns="0" tIns="0" bIns="0">
-            <a:spAutoFit/>
-          </a:bodyPr>
-          <a:lstStyle/>
-          <a:p>
-            <a:pPr algn="l">
-              <a:lnSpc>
-                <a:spcPct val="115000"/>
-              </a:lnSpc>
-            </a:pPr>
-            <a:r>
-              <a:rPr sz="1250" b="1">
+              <a:t>If paid ads or boosted posts make sense, Joshua funds and confirms the budget in writing before anything's spent — you never commit Zebraish's money without sign-off.</a:t>
+            </a:r>
+          </a:p>
+          <a:p>
+            <a:pPr>
+              <a:lnSpc>
+                <a:spcPct val="125000"/>
+              </a:lnSpc>
+              <a:spcAft>
+                <a:spcPts val="1000"/>
+              </a:spcAft>
+            </a:pPr>
+            <a:r>
+              <a:rPr sz="1550" b="1">
+                <a:solidFill>
+                  <a:srgbClr val="4E9BF0"/>
+                </a:solidFill>
+                <a:latin typeface="Helvetica Neue"/>
+              </a:rPr>
+              <a:t>—  </a:t>
+            </a:r>
+            <a:r>
+              <a:rPr sz="1550">
                 <a:solidFill>
                   <a:srgbClr val="FFFFFF"/>
                 </a:solidFill>
                 <a:latin typeface="Helvetica Neue"/>
               </a:rPr>
-              <a:t>Detail</a:t>
-            </a:r>
-          </a:p>
-        </p:txBody>
-      </p:sp>
-      <p:sp>
-        <p:nvSpPr>
-          <p:cNvPr id="8" name="Rectangle 7"/>
-          <p:cNvSpPr/>
-          <p:nvPr/>
-        </p:nvSpPr>
-        <p:spPr>
-          <a:xfrm>
-            <a:off x="685800" y="2542032"/>
-            <a:ext cx="10817352" cy="621792"/>
-          </a:xfrm>
-          <a:prstGeom prst="rect">
-            <a:avLst/>
-          </a:prstGeom>
-          <a:solidFill>
-            <a:srgbClr val="141720"/>
-          </a:solidFill>
-          <a:ln>
-            <a:noFill/>
-          </a:ln>
-          <a:effectLst/>
-        </p:spPr>
-        <p:style>
-          <a:lnRef idx="1">
-            <a:schemeClr val="accent1"/>
-          </a:lnRef>
-          <a:fillRef idx="3">
-            <a:schemeClr val="accent1"/>
-          </a:fillRef>
-          <a:effectRef idx="2">
-            <a:schemeClr val="accent1"/>
-          </a:effectRef>
-          <a:fontRef idx="minor">
-            <a:schemeClr val="lt1"/>
-          </a:fontRef>
-        </p:style>
-        <p:txBody>
-          <a:bodyPr rtlCol="0" anchor="ctr"/>
-          <a:lstStyle/>
-          <a:p>
-            <a:pPr algn="ctr"/>
-          </a:p>
-        </p:txBody>
-      </p:sp>
-      <p:sp>
-        <p:nvSpPr>
-          <p:cNvPr id="9" name="TextBox 8"/>
-          <p:cNvSpPr txBox="1"/>
-          <p:nvPr/>
-        </p:nvSpPr>
-        <p:spPr>
-          <a:xfrm>
-            <a:off x="868680" y="2633472"/>
-            <a:ext cx="4846320" cy="621792"/>
-          </a:xfrm>
-          <a:prstGeom prst="rect">
-            <a:avLst/>
-          </a:prstGeom>
-          <a:noFill/>
-        </p:spPr>
-        <p:txBody>
-          <a:bodyPr wrap="square" anchor="t" lIns="0" rIns="0" tIns="0" bIns="0">
-            <a:spAutoFit/>
-          </a:bodyPr>
-          <a:lstStyle/>
-          <a:p>
-            <a:pPr algn="l">
-              <a:lnSpc>
-                <a:spcPct val="115000"/>
-              </a:lnSpc>
-            </a:pPr>
-            <a:r>
-              <a:rPr sz="1300" b="1">
+              <a:t>Once a month, a quick review: content delivered, client introductions, commission, and anything worth adjusting.</a:t>
+            </a:r>
+          </a:p>
+          <a:p>
+            <a:pPr>
+              <a:lnSpc>
+                <a:spcPct val="125000"/>
+              </a:lnSpc>
+              <a:spcAft>
+                <a:spcPts val="1000"/>
+              </a:spcAft>
+            </a:pPr>
+            <a:r>
+              <a:rPr sz="1550" b="1">
+                <a:solidFill>
+                  <a:srgbClr val="4E9BF0"/>
+                </a:solidFill>
+                <a:latin typeface="Helvetica Neue"/>
+              </a:rPr>
+              <a:t>—  </a:t>
+            </a:r>
+            <a:r>
+              <a:rPr sz="1550">
                 <a:solidFill>
                   <a:srgbClr val="FFFFFF"/>
                 </a:solidFill>
                 <a:latin typeface="Helvetica Neue"/>
               </a:rPr>
-              <a:t>Initial Term</a:t>
-            </a:r>
-          </a:p>
-        </p:txBody>
-      </p:sp>
-      <p:sp>
-        <p:nvSpPr>
-          <p:cNvPr id="10" name="TextBox 9"/>
-          <p:cNvSpPr txBox="1"/>
-          <p:nvPr/>
-        </p:nvSpPr>
-        <p:spPr>
-          <a:xfrm>
-            <a:off x="5989320" y="2633472"/>
-            <a:ext cx="5422392" cy="621792"/>
-          </a:xfrm>
-          <a:prstGeom prst="rect">
-            <a:avLst/>
-          </a:prstGeom>
-          <a:noFill/>
-        </p:spPr>
-        <p:txBody>
-          <a:bodyPr wrap="square" anchor="t" lIns="0" rIns="0" tIns="0" bIns="0">
-            <a:spAutoFit/>
-          </a:bodyPr>
-          <a:lstStyle/>
-          <a:p>
-            <a:pPr algn="l">
-              <a:lnSpc>
-                <a:spcPct val="115000"/>
-              </a:lnSpc>
-            </a:pPr>
-            <a:r>
-              <a:rPr sz="1300" b="0">
-                <a:solidFill>
-                  <a:srgbClr val="A6ACBA"/>
-                </a:solidFill>
-                <a:latin typeface="Helvetica Neue"/>
-              </a:rPr>
-              <a:t>3 months from the date of last signature</a:t>
-            </a:r>
-          </a:p>
-        </p:txBody>
-      </p:sp>
-      <p:sp>
-        <p:nvSpPr>
-          <p:cNvPr id="11" name="Rectangle 10"/>
-          <p:cNvSpPr/>
-          <p:nvPr/>
-        </p:nvSpPr>
-        <p:spPr>
-          <a:xfrm>
-            <a:off x="685800" y="3163824"/>
-            <a:ext cx="10817352" cy="621792"/>
-          </a:xfrm>
-          <a:prstGeom prst="rect">
-            <a:avLst/>
-          </a:prstGeom>
-          <a:solidFill>
-            <a:srgbClr val="0B0D12"/>
-          </a:solidFill>
-          <a:ln>
-            <a:noFill/>
-          </a:ln>
-          <a:effectLst/>
-        </p:spPr>
-        <p:style>
-          <a:lnRef idx="1">
-            <a:schemeClr val="accent1"/>
-          </a:lnRef>
-          <a:fillRef idx="3">
-            <a:schemeClr val="accent1"/>
-          </a:fillRef>
-          <a:effectRef idx="2">
-            <a:schemeClr val="accent1"/>
-          </a:effectRef>
-          <a:fontRef idx="minor">
-            <a:schemeClr val="lt1"/>
-          </a:fontRef>
-        </p:style>
-        <p:txBody>
-          <a:bodyPr rtlCol="0" anchor="ctr"/>
-          <a:lstStyle/>
-          <a:p>
-            <a:pPr algn="ctr"/>
-          </a:p>
-        </p:txBody>
-      </p:sp>
-      <p:sp>
-        <p:nvSpPr>
-          <p:cNvPr id="12" name="TextBox 11"/>
-          <p:cNvSpPr txBox="1"/>
-          <p:nvPr/>
-        </p:nvSpPr>
-        <p:spPr>
-          <a:xfrm>
-            <a:off x="868680" y="3255264"/>
-            <a:ext cx="4846320" cy="621792"/>
-          </a:xfrm>
-          <a:prstGeom prst="rect">
-            <a:avLst/>
-          </a:prstGeom>
-          <a:noFill/>
-        </p:spPr>
-        <p:txBody>
-          <a:bodyPr wrap="square" anchor="t" lIns="0" rIns="0" tIns="0" bIns="0">
-            <a:spAutoFit/>
-          </a:bodyPr>
-          <a:lstStyle/>
-          <a:p>
-            <a:pPr algn="l">
-              <a:lnSpc>
-                <a:spcPct val="115000"/>
-              </a:lnSpc>
-            </a:pPr>
-            <a:r>
-              <a:rPr sz="1300" b="1">
-                <a:solidFill>
-                  <a:srgbClr val="FFFFFF"/>
-                </a:solidFill>
-                <a:latin typeface="Helvetica Neue"/>
-              </a:rPr>
-              <a:t>Renewal</a:t>
-            </a:r>
-          </a:p>
-        </p:txBody>
-      </p:sp>
-      <p:sp>
-        <p:nvSpPr>
-          <p:cNvPr id="13" name="TextBox 12"/>
-          <p:cNvSpPr txBox="1"/>
-          <p:nvPr/>
-        </p:nvSpPr>
-        <p:spPr>
-          <a:xfrm>
-            <a:off x="5989320" y="3255264"/>
-            <a:ext cx="5422392" cy="621792"/>
-          </a:xfrm>
-          <a:prstGeom prst="rect">
-            <a:avLst/>
-          </a:prstGeom>
-          <a:noFill/>
-        </p:spPr>
-        <p:txBody>
-          <a:bodyPr wrap="square" anchor="t" lIns="0" rIns="0" tIns="0" bIns="0">
-            <a:spAutoFit/>
-          </a:bodyPr>
-          <a:lstStyle/>
-          <a:p>
-            <a:pPr algn="l">
-              <a:lnSpc>
-                <a:spcPct val="115000"/>
-              </a:lnSpc>
-            </a:pPr>
-            <a:r>
-              <a:rPr sz="1300" b="0">
-                <a:solidFill>
-                  <a:srgbClr val="A6ACBA"/>
-                </a:solidFill>
-                <a:latin typeface="Helvetica Neue"/>
-              </a:rPr>
-              <a:t>Only by mutual written agreement — otherwise it ends automatically</a:t>
-            </a:r>
-          </a:p>
-        </p:txBody>
-      </p:sp>
-      <p:sp>
-        <p:nvSpPr>
-          <p:cNvPr id="14" name="Rectangle 13"/>
-          <p:cNvSpPr/>
-          <p:nvPr/>
-        </p:nvSpPr>
-        <p:spPr>
-          <a:xfrm>
-            <a:off x="685800" y="3785616"/>
-            <a:ext cx="10817352" cy="621792"/>
-          </a:xfrm>
-          <a:prstGeom prst="rect">
-            <a:avLst/>
-          </a:prstGeom>
-          <a:solidFill>
-            <a:srgbClr val="141720"/>
-          </a:solidFill>
-          <a:ln>
-            <a:noFill/>
-          </a:ln>
-          <a:effectLst/>
-        </p:spPr>
-        <p:style>
-          <a:lnRef idx="1">
-            <a:schemeClr val="accent1"/>
-          </a:lnRef>
-          <a:fillRef idx="3">
-            <a:schemeClr val="accent1"/>
-          </a:fillRef>
-          <a:effectRef idx="2">
-            <a:schemeClr val="accent1"/>
-          </a:effectRef>
-          <a:fontRef idx="minor">
-            <a:schemeClr val="lt1"/>
-          </a:fontRef>
-        </p:style>
-        <p:txBody>
-          <a:bodyPr rtlCol="0" anchor="ctr"/>
-          <a:lstStyle/>
-          <a:p>
-            <a:pPr algn="ctr"/>
-          </a:p>
-        </p:txBody>
-      </p:sp>
-      <p:sp>
-        <p:nvSpPr>
-          <p:cNvPr id="15" name="TextBox 14"/>
-          <p:cNvSpPr txBox="1"/>
-          <p:nvPr/>
-        </p:nvSpPr>
-        <p:spPr>
-          <a:xfrm>
-            <a:off x="868680" y="3877056"/>
-            <a:ext cx="4846320" cy="621792"/>
-          </a:xfrm>
-          <a:prstGeom prst="rect">
-            <a:avLst/>
-          </a:prstGeom>
-          <a:noFill/>
-        </p:spPr>
-        <p:txBody>
-          <a:bodyPr wrap="square" anchor="t" lIns="0" rIns="0" tIns="0" bIns="0">
-            <a:spAutoFit/>
-          </a:bodyPr>
-          <a:lstStyle/>
-          <a:p>
-            <a:pPr algn="l">
-              <a:lnSpc>
-                <a:spcPct val="115000"/>
-              </a:lnSpc>
-            </a:pPr>
-            <a:r>
-              <a:rPr sz="1300" b="1">
-                <a:solidFill>
-                  <a:srgbClr val="FFFFFF"/>
-                </a:solidFill>
-                <a:latin typeface="Helvetica Neue"/>
-              </a:rPr>
-              <a:t>Termination for convenience</a:t>
-            </a:r>
-          </a:p>
-        </p:txBody>
-      </p:sp>
-      <p:sp>
-        <p:nvSpPr>
-          <p:cNvPr id="16" name="TextBox 15"/>
-          <p:cNvSpPr txBox="1"/>
-          <p:nvPr/>
-        </p:nvSpPr>
-        <p:spPr>
-          <a:xfrm>
-            <a:off x="5989320" y="3877056"/>
-            <a:ext cx="5422392" cy="621792"/>
-          </a:xfrm>
-          <a:prstGeom prst="rect">
-            <a:avLst/>
-          </a:prstGeom>
-          <a:noFill/>
-        </p:spPr>
-        <p:txBody>
-          <a:bodyPr wrap="square" anchor="t" lIns="0" rIns="0" tIns="0" bIns="0">
-            <a:spAutoFit/>
-          </a:bodyPr>
-          <a:lstStyle/>
-          <a:p>
-            <a:pPr algn="l">
-              <a:lnSpc>
-                <a:spcPct val="115000"/>
-              </a:lnSpc>
-            </a:pPr>
-            <a:r>
-              <a:rPr sz="1300" b="0">
-                <a:solidFill>
-                  <a:srgbClr val="A6ACBA"/>
-                </a:solidFill>
-                <a:latin typeface="Helvetica Neue"/>
-              </a:rPr>
-              <a:t>14 days' written notice, either side</a:t>
-            </a:r>
-          </a:p>
-        </p:txBody>
-      </p:sp>
-      <p:sp>
-        <p:nvSpPr>
-          <p:cNvPr id="17" name="Rectangle 16"/>
-          <p:cNvSpPr/>
-          <p:nvPr/>
-        </p:nvSpPr>
-        <p:spPr>
-          <a:xfrm>
-            <a:off x="685800" y="4407408"/>
-            <a:ext cx="10817352" cy="621792"/>
-          </a:xfrm>
-          <a:prstGeom prst="rect">
-            <a:avLst/>
-          </a:prstGeom>
-          <a:solidFill>
-            <a:srgbClr val="0B0D12"/>
-          </a:solidFill>
-          <a:ln>
-            <a:noFill/>
-          </a:ln>
-          <a:effectLst/>
-        </p:spPr>
-        <p:style>
-          <a:lnRef idx="1">
-            <a:schemeClr val="accent1"/>
-          </a:lnRef>
-          <a:fillRef idx="3">
-            <a:schemeClr val="accent1"/>
-          </a:fillRef>
-          <a:effectRef idx="2">
-            <a:schemeClr val="accent1"/>
-          </a:effectRef>
-          <a:fontRef idx="minor">
-            <a:schemeClr val="lt1"/>
-          </a:fontRef>
-        </p:style>
-        <p:txBody>
-          <a:bodyPr rtlCol="0" anchor="ctr"/>
-          <a:lstStyle/>
-          <a:p>
-            <a:pPr algn="ctr"/>
-          </a:p>
-        </p:txBody>
-      </p:sp>
-      <p:sp>
-        <p:nvSpPr>
-          <p:cNvPr id="18" name="TextBox 17"/>
-          <p:cNvSpPr txBox="1"/>
-          <p:nvPr/>
-        </p:nvSpPr>
-        <p:spPr>
-          <a:xfrm>
-            <a:off x="868680" y="4498848"/>
-            <a:ext cx="4846320" cy="621792"/>
-          </a:xfrm>
-          <a:prstGeom prst="rect">
-            <a:avLst/>
-          </a:prstGeom>
-          <a:noFill/>
-        </p:spPr>
-        <p:txBody>
-          <a:bodyPr wrap="square" anchor="t" lIns="0" rIns="0" tIns="0" bIns="0">
-            <a:spAutoFit/>
-          </a:bodyPr>
-          <a:lstStyle/>
-          <a:p>
-            <a:pPr algn="l">
-              <a:lnSpc>
-                <a:spcPct val="115000"/>
-              </a:lnSpc>
-            </a:pPr>
-            <a:r>
-              <a:rPr sz="1300" b="1">
-                <a:solidFill>
-                  <a:srgbClr val="FFFFFF"/>
-                </a:solidFill>
-                <a:latin typeface="Helvetica Neue"/>
-              </a:rPr>
-              <a:t>Immediate termination</a:t>
-            </a:r>
-          </a:p>
-        </p:txBody>
-      </p:sp>
-      <p:sp>
-        <p:nvSpPr>
-          <p:cNvPr id="19" name="TextBox 18"/>
-          <p:cNvSpPr txBox="1"/>
-          <p:nvPr/>
-        </p:nvSpPr>
-        <p:spPr>
-          <a:xfrm>
-            <a:off x="5989320" y="4498848"/>
-            <a:ext cx="5422392" cy="621792"/>
-          </a:xfrm>
-          <a:prstGeom prst="rect">
-            <a:avLst/>
-          </a:prstGeom>
-          <a:noFill/>
-        </p:spPr>
-        <p:txBody>
-          <a:bodyPr wrap="square" anchor="t" lIns="0" rIns="0" tIns="0" bIns="0">
-            <a:spAutoFit/>
-          </a:bodyPr>
-          <a:lstStyle/>
-          <a:p>
-            <a:pPr algn="l">
-              <a:lnSpc>
-                <a:spcPct val="115000"/>
-              </a:lnSpc>
-            </a:pPr>
-            <a:r>
-              <a:rPr sz="1300" b="0">
-                <a:solidFill>
-                  <a:srgbClr val="A6ACBA"/>
-                </a:solidFill>
-                <a:latin typeface="Helvetica Neue"/>
-              </a:rPr>
-              <a:t>For serious misconduct, fraud, or an unremedied breach</a:t>
-            </a:r>
-          </a:p>
-        </p:txBody>
-      </p:sp>
-      <p:sp>
-        <p:nvSpPr>
-          <p:cNvPr id="20" name="Rectangle 19"/>
-          <p:cNvSpPr/>
-          <p:nvPr/>
-        </p:nvSpPr>
-        <p:spPr>
-          <a:xfrm>
-            <a:off x="685800" y="5029200"/>
-            <a:ext cx="10817352" cy="621792"/>
-          </a:xfrm>
-          <a:prstGeom prst="rect">
-            <a:avLst/>
-          </a:prstGeom>
-          <a:solidFill>
-            <a:srgbClr val="141720"/>
-          </a:solidFill>
-          <a:ln>
-            <a:noFill/>
-          </a:ln>
-          <a:effectLst/>
-        </p:spPr>
-        <p:style>
-          <a:lnRef idx="1">
-            <a:schemeClr val="accent1"/>
-          </a:lnRef>
-          <a:fillRef idx="3">
-            <a:schemeClr val="accent1"/>
-          </a:fillRef>
-          <a:effectRef idx="2">
-            <a:schemeClr val="accent1"/>
-          </a:effectRef>
-          <a:fontRef idx="minor">
-            <a:schemeClr val="lt1"/>
-          </a:fontRef>
-        </p:style>
-        <p:txBody>
-          <a:bodyPr rtlCol="0" anchor="ctr"/>
-          <a:lstStyle/>
-          <a:p>
-            <a:pPr algn="ctr"/>
-          </a:p>
-        </p:txBody>
-      </p:sp>
-      <p:sp>
-        <p:nvSpPr>
-          <p:cNvPr id="21" name="TextBox 20"/>
-          <p:cNvSpPr txBox="1"/>
-          <p:nvPr/>
-        </p:nvSpPr>
-        <p:spPr>
-          <a:xfrm>
-            <a:off x="868680" y="5120640"/>
-            <a:ext cx="4846320" cy="621792"/>
-          </a:xfrm>
-          <a:prstGeom prst="rect">
-            <a:avLst/>
-          </a:prstGeom>
-          <a:noFill/>
-        </p:spPr>
-        <p:txBody>
-          <a:bodyPr wrap="square" anchor="t" lIns="0" rIns="0" tIns="0" bIns="0">
-            <a:spAutoFit/>
-          </a:bodyPr>
-          <a:lstStyle/>
-          <a:p>
-            <a:pPr algn="l">
-              <a:lnSpc>
-                <a:spcPct val="115000"/>
-              </a:lnSpc>
-            </a:pPr>
-            <a:r>
-              <a:rPr sz="1300" b="1">
-                <a:solidFill>
-                  <a:srgbClr val="FFFFFF"/>
-                </a:solidFill>
-                <a:latin typeface="Helvetica Neue"/>
-              </a:rPr>
-              <a:t>After termination</a:t>
-            </a:r>
-          </a:p>
-        </p:txBody>
-      </p:sp>
-      <p:sp>
-        <p:nvSpPr>
-          <p:cNvPr id="22" name="TextBox 21"/>
-          <p:cNvSpPr txBox="1"/>
-          <p:nvPr/>
-        </p:nvSpPr>
-        <p:spPr>
-          <a:xfrm>
-            <a:off x="5989320" y="5120640"/>
-            <a:ext cx="5422392" cy="621792"/>
-          </a:xfrm>
-          <a:prstGeom prst="rect">
-            <a:avLst/>
-          </a:prstGeom>
-          <a:noFill/>
-        </p:spPr>
-        <p:txBody>
-          <a:bodyPr wrap="square" anchor="t" lIns="0" rIns="0" tIns="0" bIns="0">
-            <a:spAutoFit/>
-          </a:bodyPr>
-          <a:lstStyle/>
-          <a:p>
-            <a:pPr algn="l">
-              <a:lnSpc>
-                <a:spcPct val="115000"/>
-              </a:lnSpc>
-            </a:pPr>
-            <a:r>
-              <a:rPr sz="1300" b="0">
-                <a:solidFill>
-                  <a:srgbClr val="A6ACBA"/>
-                </a:solidFill>
-                <a:latin typeface="Helvetica Neue"/>
-              </a:rPr>
-              <a:t>Commission already earned on qualifying payments stays payable</a:t>
-            </a:r>
-          </a:p>
-        </p:txBody>
-      </p:sp>
-      <p:cxnSp>
-        <p:nvCxnSpPr>
-          <p:cNvPr id="23" name="Connector 22"/>
-          <p:cNvCxnSpPr/>
-          <p:nvPr/>
-        </p:nvCxnSpPr>
-        <p:spPr>
-          <a:xfrm>
-            <a:off x="685800" y="1920240"/>
-            <a:ext cx="10817352" cy="0"/>
-          </a:xfrm>
-          <a:prstGeom prst="line">
-            <a:avLst/>
-          </a:prstGeom>
-          <a:ln w="12700">
-            <a:solidFill>
-              <a:srgbClr val="2A2E3A"/>
-            </a:solidFill>
-          </a:ln>
-        </p:spPr>
-        <p:style>
-          <a:lnRef idx="2">
-            <a:schemeClr val="accent1"/>
-          </a:lnRef>
-          <a:fillRef idx="0">
-            <a:schemeClr val="accent1"/>
-          </a:fillRef>
-          <a:effectRef idx="1">
-            <a:schemeClr val="accent1"/>
-          </a:effectRef>
-          <a:fontRef idx="minor">
-            <a:schemeClr val="tx1"/>
-          </a:fontRef>
-        </p:style>
-      </p:cxnSp>
+              <a:t>Informal, low-friction — a call or a message is enough. It keeps both sides aligned without needing to touch the Agreement itself.</a:t>
+            </a:r>
+          </a:p>
+        </p:txBody>
+      </p:sp>
       <p:pic>
         <p:nvPicPr>
-          <p:cNvPr id="24" name="Picture 23" descr="logo-head.png"/>
+          <p:cNvPr id="6" name="Picture 5" descr="logo-head.png"/>
           <p:cNvPicPr>
             <a:picLocks noChangeAspect="1"/>
           </p:cNvPicPr>
@@ -8451,7 +8471,7 @@
       </p:pic>
       <p:sp>
         <p:nvSpPr>
-          <p:cNvPr id="25" name="TextBox 24"/>
+          <p:cNvPr id="7" name="TextBox 6"/>
           <p:cNvSpPr txBox="1"/>
           <p:nvPr/>
         </p:nvSpPr>
@@ -8490,7 +8510,7 @@
       </p:sp>
       <p:sp>
         <p:nvSpPr>
-          <p:cNvPr id="26" name="TextBox 25"/>
+          <p:cNvPr id="8" name="TextBox 7"/>
           <p:cNvSpPr txBox="1"/>
           <p:nvPr/>
         </p:nvSpPr>
@@ -8529,7 +8549,7 @@
       </p:sp>
       <p:cxnSp>
         <p:nvCxnSpPr>
-          <p:cNvPr id="27" name="Connector 26"/>
+          <p:cNvPr id="9" name="Connector 8"/>
           <p:cNvCxnSpPr/>
           <p:nvPr/>
         </p:nvCxnSpPr>
@@ -8636,7 +8656,7 @@
         <p:spPr>
           <a:xfrm>
             <a:off x="685800" y="868680"/>
-            <a:ext cx="10515600" cy="914400"/>
+            <a:ext cx="10515600" cy="640080"/>
           </a:xfrm>
           <a:prstGeom prst="rect">
             <a:avLst/>
@@ -8651,7 +8671,7 @@
           <a:p>
             <a:pPr algn="l">
               <a:lnSpc>
-                <a:spcPct val="105000"/>
+                <a:spcPct val="115000"/>
               </a:lnSpc>
             </a:pPr>
             <a:r>
@@ -8661,156 +8681,14 @@
                 </a:solidFill>
                 <a:latin typeface="Helvetica Neue"/>
               </a:rPr>
-              <a:t>Paid advertising &amp; monthly check-ins</a:t>
-            </a:r>
-          </a:p>
-        </p:txBody>
-      </p:sp>
-      <p:cxnSp>
-        <p:nvCxnSpPr>
-          <p:cNvPr id="4" name="Connector 3"/>
-          <p:cNvCxnSpPr/>
-          <p:nvPr/>
-        </p:nvCxnSpPr>
-        <p:spPr>
-          <a:xfrm>
-            <a:off x="685800" y="1691640"/>
-            <a:ext cx="10817352" cy="0"/>
-          </a:xfrm>
-          <a:prstGeom prst="line">
-            <a:avLst/>
-          </a:prstGeom>
-          <a:ln w="12700">
-            <a:solidFill>
-              <a:srgbClr val="2A2E3A"/>
-            </a:solidFill>
-          </a:ln>
-        </p:spPr>
-        <p:style>
-          <a:lnRef idx="2">
-            <a:schemeClr val="accent1"/>
-          </a:lnRef>
-          <a:fillRef idx="0">
-            <a:schemeClr val="accent1"/>
-          </a:fillRef>
-          <a:effectRef idx="1">
-            <a:schemeClr val="accent1"/>
-          </a:effectRef>
-          <a:fontRef idx="minor">
-            <a:schemeClr val="tx1"/>
-          </a:fontRef>
-        </p:style>
-      </p:cxnSp>
-      <p:sp>
-        <p:nvSpPr>
-          <p:cNvPr id="5" name="TextBox 4"/>
-          <p:cNvSpPr txBox="1"/>
-          <p:nvPr/>
-        </p:nvSpPr>
-        <p:spPr>
-          <a:xfrm>
-            <a:off x="685800" y="1965960"/>
-            <a:ext cx="10424160" cy="3931920"/>
-          </a:xfrm>
-          <a:prstGeom prst="rect">
-            <a:avLst/>
-          </a:prstGeom>
-          <a:noFill/>
-        </p:spPr>
-        <p:txBody>
-          <a:bodyPr wrap="square" lIns="0" rIns="0">
-            <a:spAutoFit/>
-          </a:bodyPr>
-          <a:lstStyle/>
-          <a:p>
-            <a:pPr>
-              <a:lnSpc>
-                <a:spcPct val="125000"/>
-              </a:lnSpc>
-              <a:spcAft>
-                <a:spcPts val="1000"/>
-              </a:spcAft>
-            </a:pPr>
-            <a:r>
-              <a:rPr sz="1550" b="1">
-                <a:solidFill>
-                  <a:srgbClr val="4E9BF0"/>
-                </a:solidFill>
-                <a:latin typeface="Helvetica Neue"/>
-              </a:rPr>
-              <a:t>—  </a:t>
-            </a:r>
-            <a:r>
-              <a:rPr sz="1550">
-                <a:solidFill>
-                  <a:srgbClr val="FFFFFF"/>
-                </a:solidFill>
-                <a:latin typeface="Helvetica Neue"/>
-              </a:rPr>
-              <a:t>If paid ads or boosted posts make sense, Joshua funds and confirms the budget in writing before anything's spent — you never commit Zebraish's money without sign-off.</a:t>
-            </a:r>
-          </a:p>
-          <a:p>
-            <a:pPr>
-              <a:lnSpc>
-                <a:spcPct val="125000"/>
-              </a:lnSpc>
-              <a:spcAft>
-                <a:spcPts val="1000"/>
-              </a:spcAft>
-            </a:pPr>
-            <a:r>
-              <a:rPr sz="1550" b="1">
-                <a:solidFill>
-                  <a:srgbClr val="4E9BF0"/>
-                </a:solidFill>
-                <a:latin typeface="Helvetica Neue"/>
-              </a:rPr>
-              <a:t>—  </a:t>
-            </a:r>
-            <a:r>
-              <a:rPr sz="1550">
-                <a:solidFill>
-                  <a:srgbClr val="FFFFFF"/>
-                </a:solidFill>
-                <a:latin typeface="Helvetica Neue"/>
-              </a:rPr>
-              <a:t>Once a month, a quick review: content delivered, client introductions, commission, and anything worth adjusting.</a:t>
-            </a:r>
-          </a:p>
-          <a:p>
-            <a:pPr>
-              <a:lnSpc>
-                <a:spcPct val="125000"/>
-              </a:lnSpc>
-              <a:spcAft>
-                <a:spcPts val="1000"/>
-              </a:spcAft>
-            </a:pPr>
-            <a:r>
-              <a:rPr sz="1550" b="1">
-                <a:solidFill>
-                  <a:srgbClr val="4E9BF0"/>
-                </a:solidFill>
-                <a:latin typeface="Helvetica Neue"/>
-              </a:rPr>
-              <a:t>—  </a:t>
-            </a:r>
-            <a:r>
-              <a:rPr sz="1550">
-                <a:solidFill>
-                  <a:srgbClr val="FFFFFF"/>
-                </a:solidFill>
-                <a:latin typeface="Helvetica Neue"/>
-              </a:rPr>
-              <a:t>Informal, low-friction — a call or a message is enough. It keeps both sides aligned without needing to touch the Agreement itself.</a:t>
+              <a:t>What's coming: Fashion</a:t>
             </a:r>
           </a:p>
         </p:txBody>
       </p:sp>
       <p:pic>
         <p:nvPicPr>
-          <p:cNvPr id="6" name="Picture 5" descr="logo-head.png"/>
+          <p:cNvPr id="4" name="Picture 3" descr="fash1.jpg"/>
           <p:cNvPicPr>
             <a:picLocks noChangeAspect="1"/>
           </p:cNvPicPr>
@@ -8824,6 +8702,117 @@
         </p:blipFill>
         <p:spPr>
           <a:xfrm>
+            <a:off x="685800" y="1691640"/>
+            <a:ext cx="3496056" cy="3794760"/>
+          </a:xfrm>
+          <a:prstGeom prst="rect">
+            <a:avLst/>
+          </a:prstGeom>
+        </p:spPr>
+      </p:pic>
+      <p:pic>
+        <p:nvPicPr>
+          <p:cNvPr id="5" name="Picture 4" descr="fash2.jpg"/>
+          <p:cNvPicPr>
+            <a:picLocks noChangeAspect="1"/>
+          </p:cNvPicPr>
+          <p:nvPr/>
+        </p:nvPicPr>
+        <p:blipFill>
+          <a:blip r:embed="rId3"/>
+          <a:stretch>
+            <a:fillRect/>
+          </a:stretch>
+        </p:blipFill>
+        <p:spPr>
+          <a:xfrm>
+            <a:off x="4346448" y="1691640"/>
+            <a:ext cx="3496056" cy="3794760"/>
+          </a:xfrm>
+          <a:prstGeom prst="rect">
+            <a:avLst/>
+          </a:prstGeom>
+        </p:spPr>
+      </p:pic>
+      <p:pic>
+        <p:nvPicPr>
+          <p:cNvPr id="6" name="Picture 5" descr="fash3.jpg"/>
+          <p:cNvPicPr>
+            <a:picLocks noChangeAspect="1"/>
+          </p:cNvPicPr>
+          <p:nvPr/>
+        </p:nvPicPr>
+        <p:blipFill>
+          <a:blip r:embed="rId4"/>
+          <a:stretch>
+            <a:fillRect/>
+          </a:stretch>
+        </p:blipFill>
+        <p:spPr>
+          <a:xfrm>
+            <a:off x="8007096" y="1691640"/>
+            <a:ext cx="3496056" cy="3794760"/>
+          </a:xfrm>
+          <a:prstGeom prst="rect">
+            <a:avLst/>
+          </a:prstGeom>
+        </p:spPr>
+      </p:pic>
+      <p:sp>
+        <p:nvSpPr>
+          <p:cNvPr id="7" name="TextBox 6"/>
+          <p:cNvSpPr txBox="1"/>
+          <p:nvPr/>
+        </p:nvSpPr>
+        <p:spPr>
+          <a:xfrm>
+            <a:off x="685800" y="5623560"/>
+            <a:ext cx="10424160" cy="548640"/>
+          </a:xfrm>
+          <a:prstGeom prst="rect">
+            <a:avLst/>
+          </a:prstGeom>
+          <a:noFill/>
+        </p:spPr>
+        <p:txBody>
+          <a:bodyPr wrap="square" anchor="t" lIns="0" rIns="0" tIns="0" bIns="0">
+            <a:spAutoFit/>
+          </a:bodyPr>
+          <a:lstStyle/>
+          <a:p>
+            <a:pPr algn="l">
+              <a:lnSpc>
+                <a:spcPct val="130000"/>
+              </a:lnSpc>
+            </a:pPr>
+            <a:r>
+              <a:rPr sz="1250" b="0">
+                <a:solidFill>
+                  <a:srgbClr val="A6ACBA"/>
+                </a:solidFill>
+                <a:latin typeface="Helvetica Neue"/>
+              </a:rPr>
+              <a:t>A preview, not the current job — reference styling for the Fashion line, launching soon. Animal-inspired patterns and textures reinterpreted for a premium range. Your role expands to include this once it's live; for now, the focus is Zebraish Studio.</a:t>
+            </a:r>
+          </a:p>
+        </p:txBody>
+      </p:sp>
+      <p:pic>
+        <p:nvPicPr>
+          <p:cNvPr id="8" name="Picture 7" descr="logo-head.png"/>
+          <p:cNvPicPr>
+            <a:picLocks noChangeAspect="1"/>
+          </p:cNvPicPr>
+          <p:nvPr/>
+        </p:nvPicPr>
+        <p:blipFill>
+          <a:blip r:embed="rId5"/>
+          <a:stretch>
+            <a:fillRect/>
+          </a:stretch>
+        </p:blipFill>
+        <p:spPr>
+          <a:xfrm>
             <a:off x="685800" y="6382512"/>
             <a:ext cx="170028" cy="219456"/>
           </a:xfrm>
@@ -8834,7 +8823,7 @@
       </p:pic>
       <p:sp>
         <p:nvSpPr>
-          <p:cNvPr id="7" name="TextBox 6"/>
+          <p:cNvPr id="9" name="TextBox 8"/>
           <p:cNvSpPr txBox="1"/>
           <p:nvPr/>
         </p:nvSpPr>
@@ -8873,7 +8862,7 @@
       </p:sp>
       <p:sp>
         <p:nvSpPr>
-          <p:cNvPr id="8" name="TextBox 7"/>
+          <p:cNvPr id="10" name="TextBox 9"/>
           <p:cNvSpPr txBox="1"/>
           <p:nvPr/>
         </p:nvSpPr>
@@ -8912,7 +8901,7 @@
       </p:sp>
       <p:cxnSp>
         <p:nvCxnSpPr>
-          <p:cNvPr id="9" name="Connector 8"/>
+          <p:cNvPr id="11" name="Connector 10"/>
           <p:cNvCxnSpPr/>
           <p:nvPr/>
         </p:nvCxnSpPr>
@@ -10059,7 +10048,7 @@
                 </a:solidFill>
                 <a:latin typeface="Helvetica Neue"/>
               </a:rPr>
-              <a:t>Studio and The Board are where the tech and product work happens — building, prototyping, and shipping ideas.</a:t>
+              <a:t>Studio and The Board are where the tech and product work happens — building, prototyping, and shipping ideas. This is what's live right now, and it's what Zebraish is launching with.</a:t>
             </a:r>
           </a:p>
           <a:p>
@@ -10087,7 +10076,7 @@
                 </a:solidFill>
                 <a:latin typeface="Helvetica Neue"/>
               </a:rPr>
-              <a:t>Fashion is the creative expression of the same brand — apparel and style built around a distinct, animal-inspired aesthetic.</a:t>
+              <a:t>Fashion is the creative expression of the same brand — apparel and style built around a distinct, animal-inspired aesthetic. It's coming soon, but the product line isn't public yet.</a:t>
             </a:r>
           </a:p>
           <a:p>
@@ -10356,7 +10345,7 @@
                 </a:solidFill>
                 <a:latin typeface="Helvetica Neue"/>
               </a:rPr>
-              <a:t>Where you fit: the Fashion vertical</a:t>
+              <a:t>Where you start: Zebraish Studio</a:t>
             </a:r>
           </a:p>
         </p:txBody>
@@ -10442,7 +10431,7 @@
                 </a:solidFill>
                 <a:latin typeface="Helvetica Neue"/>
               </a:rPr>
-              <a:t>You're joining as Zebraish's Official Collaboration Partner on the Fashion side — the face and voice of that vertical.</a:t>
+              <a:t>You're joining as Zebraish's Official Collaboration Partner — and right now, your job is Studio: representing it, building awareness for it, and actively bringing in customers for it, because that's what Zebraish is starting with.</a:t>
             </a:r>
           </a:p>
           <a:p>
@@ -10470,7 +10459,7 @@
                 </a:solidFill>
                 <a:latin typeface="Helvetica Neue"/>
               </a:rPr>
-              <a:t>The creative direction draws from the animal world: skins, patterns, and texture, reinterpreted into a premium, wearable line.</a:t>
+              <a:t>You don't need to be a tech person to do this well. Your audience trusts you — that's the asset. Point people toward Zebraish Studio, explain what it does in plain terms, and make the introduction.</a:t>
             </a:r>
           </a:p>
           <a:p>
@@ -10498,7 +10487,7 @@
                 </a:solidFill>
                 <a:latin typeface="Helvetica Neue"/>
               </a:rPr>
-              <a:t>Your role blends model, influencer, and brand partner — representing the aesthetic publicly while helping bring in the people who'll actually buy into it.</a:t>
+              <a:t>Fashion joins your role once the clothing line actually launches, which is coming soon. When it does, it'll likely be an even more natural fit for you — but the work starts with Studio.</a:t>
             </a:r>
           </a:p>
         </p:txBody>
@@ -10654,7 +10643,7 @@
     <p:bg>
       <p:bgPr>
         <a:solidFill>
-          <a:srgbClr val="0B0D12"/>
+          <a:srgbClr val="141720"/>
         </a:solidFill>
         <a:effectLst/>
       </p:bgPr>
@@ -10668,13 +10657,96 @@
       <p:grpSpPr/>
       <p:sp>
         <p:nvSpPr>
-          <p:cNvPr id="2" name="TextBox 1"/>
-          <p:cNvSpPr txBox="1"/>
-          <p:nvPr/>
-        </p:nvSpPr>
-        <p:spPr>
-          <a:xfrm>
-            <a:off x="685800" y="502920"/>
+          <p:cNvPr id="2" name="Rectangle 1"/>
+          <p:cNvSpPr/>
+          <p:nvPr/>
+        </p:nvSpPr>
+        <p:spPr>
+          <a:xfrm>
+            <a:off x="0" y="0"/>
+            <a:ext cx="164592" cy="6858000"/>
+          </a:xfrm>
+          <a:prstGeom prst="rect">
+            <a:avLst/>
+          </a:prstGeom>
+          <a:solidFill>
+            <a:srgbClr val="1D68C0"/>
+          </a:solidFill>
+          <a:ln>
+            <a:noFill/>
+          </a:ln>
+          <a:effectLst/>
+        </p:spPr>
+        <p:style>
+          <a:lnRef idx="1">
+            <a:schemeClr val="accent1"/>
+          </a:lnRef>
+          <a:fillRef idx="3">
+            <a:schemeClr val="accent1"/>
+          </a:fillRef>
+          <a:effectRef idx="2">
+            <a:schemeClr val="accent1"/>
+          </a:effectRef>
+          <a:fontRef idx="minor">
+            <a:schemeClr val="lt1"/>
+          </a:fontRef>
+        </p:style>
+        <p:txBody>
+          <a:bodyPr rtlCol="0" anchor="ctr"/>
+          <a:lstStyle/>
+          <a:p>
+            <a:pPr algn="ctr"/>
+          </a:p>
+        </p:txBody>
+      </p:sp>
+      <p:sp>
+        <p:nvSpPr>
+          <p:cNvPr id="3" name="TextBox 2"/>
+          <p:cNvSpPr txBox="1"/>
+          <p:nvPr/>
+        </p:nvSpPr>
+        <p:spPr>
+          <a:xfrm>
+            <a:off x="868680" y="2286000"/>
+            <a:ext cx="1828800" cy="1097280"/>
+          </a:xfrm>
+          <a:prstGeom prst="rect">
+            <a:avLst/>
+          </a:prstGeom>
+          <a:noFill/>
+        </p:spPr>
+        <p:txBody>
+          <a:bodyPr wrap="square" anchor="t" lIns="0" rIns="0" tIns="0" bIns="0">
+            <a:spAutoFit/>
+          </a:bodyPr>
+          <a:lstStyle/>
+          <a:p>
+            <a:pPr algn="l">
+              <a:lnSpc>
+                <a:spcPct val="115000"/>
+              </a:lnSpc>
+            </a:pPr>
+            <a:r>
+              <a:rPr sz="6400" b="1">
+                <a:solidFill>
+                  <a:srgbClr val="4E9BF0"/>
+                </a:solidFill>
+                <a:latin typeface="Helvetica Neue"/>
+              </a:rPr>
+              <a:t>02</a:t>
+            </a:r>
+          </a:p>
+        </p:txBody>
+      </p:sp>
+      <p:sp>
+        <p:nvSpPr>
+          <p:cNvPr id="4" name="TextBox 3"/>
+          <p:cNvSpPr txBox="1"/>
+          <p:nvPr/>
+        </p:nvSpPr>
+        <p:spPr>
+          <a:xfrm>
+            <a:off x="896112" y="2103120"/>
             <a:ext cx="7315200" cy="365760"/>
           </a:xfrm>
           <a:prstGeom prst="rect">
@@ -10700,21 +10772,21 @@
                 </a:solidFill>
                 <a:latin typeface="Helvetica Neue"/>
               </a:rPr>
-              <a:t>WELCOME</a:t>
-            </a:r>
-          </a:p>
-        </p:txBody>
-      </p:sp>
-      <p:sp>
-        <p:nvSpPr>
-          <p:cNvPr id="3" name="TextBox 2"/>
-          <p:cNvSpPr txBox="1"/>
-          <p:nvPr/>
-        </p:nvSpPr>
-        <p:spPr>
-          <a:xfrm>
-            <a:off x="685800" y="868680"/>
-            <a:ext cx="10515600" cy="640080"/>
+              <a:t>YOUR ROLE</a:t>
+            </a:r>
+          </a:p>
+        </p:txBody>
+      </p:sp>
+      <p:sp>
+        <p:nvSpPr>
+          <p:cNvPr id="5" name="TextBox 4"/>
+          <p:cNvSpPr txBox="1"/>
+          <p:nvPr/>
+        </p:nvSpPr>
+        <p:spPr>
+          <a:xfrm>
+            <a:off x="868680" y="3429000"/>
+            <a:ext cx="9875520" cy="1097280"/>
           </a:xfrm>
           <a:prstGeom prst="rect">
             <a:avLst/>
@@ -10733,20 +10805,59 @@
               </a:lnSpc>
             </a:pPr>
             <a:r>
-              <a:rPr sz="2700" b="1">
+              <a:rPr sz="3400" b="1">
                 <a:solidFill>
                   <a:srgbClr val="FFFFFF"/>
                 </a:solidFill>
                 <a:latin typeface="Helvetica Neue"/>
               </a:rPr>
-              <a:t>The creative direction</a:t>
+              <a:t>What you're signing up for</a:t>
+            </a:r>
+          </a:p>
+        </p:txBody>
+      </p:sp>
+      <p:sp>
+        <p:nvSpPr>
+          <p:cNvPr id="6" name="TextBox 5"/>
+          <p:cNvSpPr txBox="1"/>
+          <p:nvPr/>
+        </p:nvSpPr>
+        <p:spPr>
+          <a:xfrm>
+            <a:off x="868680" y="4251960"/>
+            <a:ext cx="8412480" cy="1097280"/>
+          </a:xfrm>
+          <a:prstGeom prst="rect">
+            <a:avLst/>
+          </a:prstGeom>
+          <a:noFill/>
+        </p:spPr>
+        <p:txBody>
+          <a:bodyPr wrap="square" anchor="t" lIns="0" rIns="0" tIns="0" bIns="0">
+            <a:spAutoFit/>
+          </a:bodyPr>
+          <a:lstStyle/>
+          <a:p>
+            <a:pPr algn="l">
+              <a:lnSpc>
+                <a:spcPct val="135000"/>
+              </a:lnSpc>
+            </a:pPr>
+            <a:r>
+              <a:rPr sz="1550" b="0">
+                <a:solidFill>
+                  <a:srgbClr val="A6ACBA"/>
+                </a:solidFill>
+                <a:latin typeface="Helvetica Neue"/>
+              </a:rPr>
+              <a:t>Position, responsibilities, and what "good" looks like.</a:t>
             </a:r>
           </a:p>
         </p:txBody>
       </p:sp>
       <p:pic>
         <p:nvPicPr>
-          <p:cNvPr id="4" name="Picture 3" descr="fash1.jpg"/>
+          <p:cNvPr id="7" name="Picture 6" descr="logo-head.png"/>
           <p:cNvPicPr>
             <a:picLocks noChangeAspect="1"/>
           </p:cNvPicPr>
@@ -10760,117 +10871,6 @@
         </p:blipFill>
         <p:spPr>
           <a:xfrm>
-            <a:off x="685800" y="1691640"/>
-            <a:ext cx="3496056" cy="3794760"/>
-          </a:xfrm>
-          <a:prstGeom prst="rect">
-            <a:avLst/>
-          </a:prstGeom>
-        </p:spPr>
-      </p:pic>
-      <p:pic>
-        <p:nvPicPr>
-          <p:cNvPr id="5" name="Picture 4" descr="fash2.jpg"/>
-          <p:cNvPicPr>
-            <a:picLocks noChangeAspect="1"/>
-          </p:cNvPicPr>
-          <p:nvPr/>
-        </p:nvPicPr>
-        <p:blipFill>
-          <a:blip r:embed="rId3"/>
-          <a:stretch>
-            <a:fillRect/>
-          </a:stretch>
-        </p:blipFill>
-        <p:spPr>
-          <a:xfrm>
-            <a:off x="4346448" y="1691640"/>
-            <a:ext cx="3496056" cy="3794760"/>
-          </a:xfrm>
-          <a:prstGeom prst="rect">
-            <a:avLst/>
-          </a:prstGeom>
-        </p:spPr>
-      </p:pic>
-      <p:pic>
-        <p:nvPicPr>
-          <p:cNvPr id="6" name="Picture 5" descr="fash3.jpg"/>
-          <p:cNvPicPr>
-            <a:picLocks noChangeAspect="1"/>
-          </p:cNvPicPr>
-          <p:nvPr/>
-        </p:nvPicPr>
-        <p:blipFill>
-          <a:blip r:embed="rId4"/>
-          <a:stretch>
-            <a:fillRect/>
-          </a:stretch>
-        </p:blipFill>
-        <p:spPr>
-          <a:xfrm>
-            <a:off x="8007096" y="1691640"/>
-            <a:ext cx="3496056" cy="3794760"/>
-          </a:xfrm>
-          <a:prstGeom prst="rect">
-            <a:avLst/>
-          </a:prstGeom>
-        </p:spPr>
-      </p:pic>
-      <p:sp>
-        <p:nvSpPr>
-          <p:cNvPr id="7" name="TextBox 6"/>
-          <p:cNvSpPr txBox="1"/>
-          <p:nvPr/>
-        </p:nvSpPr>
-        <p:spPr>
-          <a:xfrm>
-            <a:off x="685800" y="5623560"/>
-            <a:ext cx="10424160" cy="548640"/>
-          </a:xfrm>
-          <a:prstGeom prst="rect">
-            <a:avLst/>
-          </a:prstGeom>
-          <a:noFill/>
-        </p:spPr>
-        <p:txBody>
-          <a:bodyPr wrap="square" anchor="t" lIns="0" rIns="0" tIns="0" bIns="0">
-            <a:spAutoFit/>
-          </a:bodyPr>
-          <a:lstStyle/>
-          <a:p>
-            <a:pPr algn="l">
-              <a:lnSpc>
-                <a:spcPct val="130000"/>
-              </a:lnSpc>
-            </a:pPr>
-            <a:r>
-              <a:rPr sz="1250" b="0">
-                <a:solidFill>
-                  <a:srgbClr val="A6ACBA"/>
-                </a:solidFill>
-                <a:latin typeface="Helvetica Neue"/>
-              </a:rPr>
-              <a:t>Reference styling for the Fashion vertical — animal-inspired patterns and textures reinterpreted for a premium line. Full mood board to follow as product development continues.</a:t>
-            </a:r>
-          </a:p>
-        </p:txBody>
-      </p:sp>
-      <p:pic>
-        <p:nvPicPr>
-          <p:cNvPr id="8" name="Picture 7" descr="logo-head.png"/>
-          <p:cNvPicPr>
-            <a:picLocks noChangeAspect="1"/>
-          </p:cNvPicPr>
-          <p:nvPr/>
-        </p:nvPicPr>
-        <p:blipFill>
-          <a:blip r:embed="rId5"/>
-          <a:stretch>
-            <a:fillRect/>
-          </a:stretch>
-        </p:blipFill>
-        <p:spPr>
-          <a:xfrm>
             <a:off x="685800" y="6382512"/>
             <a:ext cx="170028" cy="219456"/>
           </a:xfrm>
@@ -10881,7 +10881,7 @@
       </p:pic>
       <p:sp>
         <p:nvSpPr>
-          <p:cNvPr id="9" name="TextBox 8"/>
+          <p:cNvPr id="8" name="TextBox 7"/>
           <p:cNvSpPr txBox="1"/>
           <p:nvPr/>
         </p:nvSpPr>
@@ -10920,7 +10920,7 @@
       </p:sp>
       <p:sp>
         <p:nvSpPr>
-          <p:cNvPr id="10" name="TextBox 9"/>
+          <p:cNvPr id="9" name="TextBox 8"/>
           <p:cNvSpPr txBox="1"/>
           <p:nvPr/>
         </p:nvSpPr>
@@ -10952,14 +10952,14 @@
                 </a:solidFill>
                 <a:latin typeface="Helvetica Neue"/>
               </a:rPr>
-              <a:t>Welcome   ·   05 / 20</a:t>
+              <a:t>Your Role   ·   05 / 20</a:t>
             </a:r>
           </a:p>
         </p:txBody>
       </p:sp>
       <p:cxnSp>
         <p:nvCxnSpPr>
-          <p:cNvPr id="11" name="Connector 10"/>
+          <p:cNvPr id="10" name="Connector 9"/>
           <p:cNvCxnSpPr/>
           <p:nvPr/>
         </p:nvCxnSpPr>
@@ -11006,7 +11006,7 @@
     <p:bg>
       <p:bgPr>
         <a:solidFill>
-          <a:srgbClr val="141720"/>
+          <a:srgbClr val="0B0D12"/>
         </a:solidFill>
         <a:effectLst/>
       </p:bgPr>
@@ -11020,207 +11020,283 @@
       <p:grpSpPr/>
       <p:sp>
         <p:nvSpPr>
-          <p:cNvPr id="2" name="Rectangle 1"/>
-          <p:cNvSpPr/>
-          <p:nvPr/>
-        </p:nvSpPr>
-        <p:spPr>
-          <a:xfrm>
-            <a:off x="0" y="0"/>
-            <a:ext cx="164592" cy="6858000"/>
-          </a:xfrm>
-          <a:prstGeom prst="rect">
-            <a:avLst/>
-          </a:prstGeom>
-          <a:solidFill>
-            <a:srgbClr val="1D68C0"/>
-          </a:solidFill>
-          <a:ln>
-            <a:noFill/>
+          <p:cNvPr id="2" name="TextBox 1"/>
+          <p:cNvSpPr txBox="1"/>
+          <p:nvPr/>
+        </p:nvSpPr>
+        <p:spPr>
+          <a:xfrm>
+            <a:off x="685800" y="502920"/>
+            <a:ext cx="7315200" cy="365760"/>
+          </a:xfrm>
+          <a:prstGeom prst="rect">
+            <a:avLst/>
+          </a:prstGeom>
+          <a:noFill/>
+        </p:spPr>
+        <p:txBody>
+          <a:bodyPr wrap="square" anchor="t" lIns="0" rIns="0" tIns="0" bIns="0">
+            <a:spAutoFit/>
+          </a:bodyPr>
+          <a:lstStyle/>
+          <a:p>
+            <a:pPr algn="l">
+              <a:lnSpc>
+                <a:spcPct val="115000"/>
+              </a:lnSpc>
+            </a:pPr>
+            <a:r>
+              <a:rPr sz="1250" b="1">
+                <a:solidFill>
+                  <a:srgbClr val="4E9BF0"/>
+                </a:solidFill>
+                <a:latin typeface="Helvetica Neue"/>
+              </a:rPr>
+              <a:t>YOUR ROLE</a:t>
+            </a:r>
+          </a:p>
+        </p:txBody>
+      </p:sp>
+      <p:sp>
+        <p:nvSpPr>
+          <p:cNvPr id="3" name="TextBox 2"/>
+          <p:cNvSpPr txBox="1"/>
+          <p:nvPr/>
+        </p:nvSpPr>
+        <p:spPr>
+          <a:xfrm>
+            <a:off x="685800" y="868680"/>
+            <a:ext cx="10515600" cy="914400"/>
+          </a:xfrm>
+          <a:prstGeom prst="rect">
+            <a:avLst/>
+          </a:prstGeom>
+          <a:noFill/>
+        </p:spPr>
+        <p:txBody>
+          <a:bodyPr wrap="square" anchor="t" lIns="0" rIns="0" tIns="0" bIns="0">
+            <a:spAutoFit/>
+          </a:bodyPr>
+          <a:lstStyle/>
+          <a:p>
+            <a:pPr algn="l">
+              <a:lnSpc>
+                <a:spcPct val="105000"/>
+              </a:lnSpc>
+            </a:pPr>
+            <a:r>
+              <a:rPr sz="2700" b="1">
+                <a:solidFill>
+                  <a:srgbClr val="FFFFFF"/>
+                </a:solidFill>
+                <a:latin typeface="Helvetica Neue"/>
+              </a:rPr>
+              <a:t>Your position</a:t>
+            </a:r>
+          </a:p>
+        </p:txBody>
+      </p:sp>
+      <p:cxnSp>
+        <p:nvCxnSpPr>
+          <p:cNvPr id="4" name="Connector 3"/>
+          <p:cNvCxnSpPr/>
+          <p:nvPr/>
+        </p:nvCxnSpPr>
+        <p:spPr>
+          <a:xfrm>
+            <a:off x="685800" y="1691640"/>
+            <a:ext cx="10817352" cy="0"/>
+          </a:xfrm>
+          <a:prstGeom prst="line">
+            <a:avLst/>
+          </a:prstGeom>
+          <a:ln w="12700">
+            <a:solidFill>
+              <a:srgbClr val="2A2E3A"/>
+            </a:solidFill>
           </a:ln>
-          <a:effectLst/>
         </p:spPr>
         <p:style>
-          <a:lnRef idx="1">
+          <a:lnRef idx="2">
             <a:schemeClr val="accent1"/>
           </a:lnRef>
-          <a:fillRef idx="3">
+          <a:fillRef idx="0">
             <a:schemeClr val="accent1"/>
           </a:fillRef>
-          <a:effectRef idx="2">
+          <a:effectRef idx="1">
             <a:schemeClr val="accent1"/>
           </a:effectRef>
           <a:fontRef idx="minor">
-            <a:schemeClr val="lt1"/>
+            <a:schemeClr val="tx1"/>
           </a:fontRef>
         </p:style>
-        <p:txBody>
-          <a:bodyPr rtlCol="0" anchor="ctr"/>
-          <a:lstStyle/>
-          <a:p>
-            <a:pPr algn="ctr"/>
-          </a:p>
-        </p:txBody>
-      </p:sp>
-      <p:sp>
-        <p:nvSpPr>
-          <p:cNvPr id="3" name="TextBox 2"/>
-          <p:cNvSpPr txBox="1"/>
-          <p:nvPr/>
-        </p:nvSpPr>
-        <p:spPr>
-          <a:xfrm>
-            <a:off x="868680" y="2286000"/>
-            <a:ext cx="1828800" cy="1097280"/>
-          </a:xfrm>
-          <a:prstGeom prst="rect">
-            <a:avLst/>
-          </a:prstGeom>
-          <a:noFill/>
-        </p:spPr>
-        <p:txBody>
-          <a:bodyPr wrap="square" anchor="t" lIns="0" rIns="0" tIns="0" bIns="0">
-            <a:spAutoFit/>
-          </a:bodyPr>
-          <a:lstStyle/>
-          <a:p>
-            <a:pPr algn="l">
-              <a:lnSpc>
-                <a:spcPct val="115000"/>
-              </a:lnSpc>
-            </a:pPr>
-            <a:r>
-              <a:rPr sz="6400" b="1">
+      </p:cxnSp>
+      <p:sp>
+        <p:nvSpPr>
+          <p:cNvPr id="5" name="TextBox 4"/>
+          <p:cNvSpPr txBox="1"/>
+          <p:nvPr/>
+        </p:nvSpPr>
+        <p:spPr>
+          <a:xfrm>
+            <a:off x="685800" y="1965960"/>
+            <a:ext cx="10424160" cy="3931920"/>
+          </a:xfrm>
+          <a:prstGeom prst="rect">
+            <a:avLst/>
+          </a:prstGeom>
+          <a:noFill/>
+        </p:spPr>
+        <p:txBody>
+          <a:bodyPr wrap="square" lIns="0" rIns="0">
+            <a:spAutoFit/>
+          </a:bodyPr>
+          <a:lstStyle/>
+          <a:p>
+            <a:pPr>
+              <a:lnSpc>
+                <a:spcPct val="125000"/>
+              </a:lnSpc>
+              <a:spcAft>
+                <a:spcPts val="1000"/>
+              </a:spcAft>
+            </a:pPr>
+            <a:r>
+              <a:rPr sz="1550" b="1">
                 <a:solidFill>
                   <a:srgbClr val="4E9BF0"/>
                 </a:solidFill>
                 <a:latin typeface="Helvetica Neue"/>
               </a:rPr>
-              <a:t>02</a:t>
-            </a:r>
-          </a:p>
-        </p:txBody>
-      </p:sp>
-      <p:sp>
-        <p:nvSpPr>
-          <p:cNvPr id="4" name="TextBox 3"/>
-          <p:cNvSpPr txBox="1"/>
-          <p:nvPr/>
-        </p:nvSpPr>
-        <p:spPr>
-          <a:xfrm>
-            <a:off x="896112" y="2103120"/>
-            <a:ext cx="7315200" cy="365760"/>
-          </a:xfrm>
-          <a:prstGeom prst="rect">
-            <a:avLst/>
-          </a:prstGeom>
-          <a:noFill/>
-        </p:spPr>
-        <p:txBody>
-          <a:bodyPr wrap="square" anchor="t" lIns="0" rIns="0" tIns="0" bIns="0">
-            <a:spAutoFit/>
-          </a:bodyPr>
-          <a:lstStyle/>
-          <a:p>
-            <a:pPr algn="l">
-              <a:lnSpc>
-                <a:spcPct val="115000"/>
-              </a:lnSpc>
-            </a:pPr>
-            <a:r>
-              <a:rPr sz="1250" b="1">
+              <a:t>—  </a:t>
+            </a:r>
+            <a:r>
+              <a:rPr sz="1550">
+                <a:solidFill>
+                  <a:srgbClr val="FFFFFF"/>
+                </a:solidFill>
+                <a:latin typeface="Helvetica Neue"/>
+              </a:rPr>
+              <a:t>Position: Zebraish Official Collaboration Partner.</a:t>
+            </a:r>
+          </a:p>
+          <a:p>
+            <a:pPr>
+              <a:lnSpc>
+                <a:spcPct val="125000"/>
+              </a:lnSpc>
+              <a:spcAft>
+                <a:spcPts val="1000"/>
+              </a:spcAft>
+            </a:pPr>
+            <a:r>
+              <a:rPr sz="1550" b="1">
                 <a:solidFill>
                   <a:srgbClr val="4E9BF0"/>
                 </a:solidFill>
                 <a:latin typeface="Helvetica Neue"/>
               </a:rPr>
-              <a:t>YOUR ROLE</a:t>
-            </a:r>
-          </a:p>
-        </p:txBody>
-      </p:sp>
-      <p:sp>
-        <p:nvSpPr>
-          <p:cNvPr id="5" name="TextBox 4"/>
-          <p:cNvSpPr txBox="1"/>
-          <p:nvPr/>
-        </p:nvSpPr>
-        <p:spPr>
-          <a:xfrm>
-            <a:off x="868680" y="3429000"/>
-            <a:ext cx="9875520" cy="1097280"/>
-          </a:xfrm>
-          <a:prstGeom prst="rect">
-            <a:avLst/>
-          </a:prstGeom>
-          <a:noFill/>
-        </p:spPr>
-        <p:txBody>
-          <a:bodyPr wrap="square" anchor="t" lIns="0" rIns="0" tIns="0" bIns="0">
-            <a:spAutoFit/>
-          </a:bodyPr>
-          <a:lstStyle/>
-          <a:p>
-            <a:pPr algn="l">
-              <a:lnSpc>
-                <a:spcPct val="115000"/>
-              </a:lnSpc>
-            </a:pPr>
-            <a:r>
-              <a:rPr sz="3400" b="1">
+              <a:t>—  </a:t>
+            </a:r>
+            <a:r>
+              <a:rPr sz="1550">
                 <a:solidFill>
                   <a:srgbClr val="FFFFFF"/>
                 </a:solidFill>
                 <a:latin typeface="Helvetica Neue"/>
               </a:rPr>
-              <a:t>What you're signing up for</a:t>
-            </a:r>
-          </a:p>
-        </p:txBody>
-      </p:sp>
-      <p:sp>
-        <p:nvSpPr>
-          <p:cNvPr id="6" name="TextBox 5"/>
-          <p:cNvSpPr txBox="1"/>
-          <p:nvPr/>
-        </p:nvSpPr>
-        <p:spPr>
-          <a:xfrm>
-            <a:off x="868680" y="4251960"/>
-            <a:ext cx="8412480" cy="1097280"/>
-          </a:xfrm>
-          <a:prstGeom prst="rect">
-            <a:avLst/>
-          </a:prstGeom>
-          <a:noFill/>
-        </p:spPr>
-        <p:txBody>
-          <a:bodyPr wrap="square" anchor="t" lIns="0" rIns="0" tIns="0" bIns="0">
-            <a:spAutoFit/>
-          </a:bodyPr>
-          <a:lstStyle/>
-          <a:p>
-            <a:pPr algn="l">
-              <a:lnSpc>
-                <a:spcPct val="135000"/>
-              </a:lnSpc>
-            </a:pPr>
-            <a:r>
-              <a:rPr sz="1550" b="0">
-                <a:solidFill>
-                  <a:srgbClr val="A6ACBA"/>
-                </a:solidFill>
-                <a:latin typeface="Helvetica Neue"/>
-              </a:rPr>
-              <a:t>Position, responsibilities, and what "good" looks like.</a:t>
+              <a:t>Current focus: promoting Zebraish Studio and bringing in customers for it — that's the priority for the length of this Term.</a:t>
+            </a:r>
+          </a:p>
+          <a:p>
+            <a:pPr>
+              <a:lnSpc>
+                <a:spcPct val="125000"/>
+              </a:lnSpc>
+              <a:spcAft>
+                <a:spcPts val="1000"/>
+              </a:spcAft>
+            </a:pPr>
+            <a:r>
+              <a:rPr sz="1550" b="1">
+                <a:solidFill>
+                  <a:srgbClr val="4E9BF0"/>
+                </a:solidFill>
+                <a:latin typeface="Helvetica Neue"/>
+              </a:rPr>
+              <a:t>—  </a:t>
+            </a:r>
+            <a:r>
+              <a:rPr sz="1550">
+                <a:solidFill>
+                  <a:srgbClr val="FFFFFF"/>
+                </a:solidFill>
+                <a:latin typeface="Helvetica Neue"/>
+              </a:rPr>
+              <a:t>Non-exclusive — you're free to work with, promote, or represent other brands during the Term, as long as it doesn't conflict with your Zebraish obligations.</a:t>
+            </a:r>
+          </a:p>
+          <a:p>
+            <a:pPr>
+              <a:lnSpc>
+                <a:spcPct val="125000"/>
+              </a:lnSpc>
+              <a:spcAft>
+                <a:spcPts val="1000"/>
+              </a:spcAft>
+            </a:pPr>
+            <a:r>
+              <a:rPr sz="1550" b="1">
+                <a:solidFill>
+                  <a:srgbClr val="4E9BF0"/>
+                </a:solidFill>
+                <a:latin typeface="Helvetica Neue"/>
+              </a:rPr>
+              <a:t>—  </a:t>
+            </a:r>
+            <a:r>
+              <a:rPr sz="1550">
+                <a:solidFill>
+                  <a:srgbClr val="FFFFFF"/>
+                </a:solidFill>
+                <a:latin typeface="Helvetica Neue"/>
+              </a:rPr>
+              <a:t>Initial Term: 3 months from the date you both sign, renewable by mutual written agreement.</a:t>
+            </a:r>
+          </a:p>
+          <a:p>
+            <a:pPr>
+              <a:lnSpc>
+                <a:spcPct val="125000"/>
+              </a:lnSpc>
+              <a:spcAft>
+                <a:spcPts val="1000"/>
+              </a:spcAft>
+            </a:pPr>
+            <a:r>
+              <a:rPr sz="1550" b="1">
+                <a:solidFill>
+                  <a:srgbClr val="4E9BF0"/>
+                </a:solidFill>
+                <a:latin typeface="Helvetica Neue"/>
+              </a:rPr>
+              <a:t>—  </a:t>
+            </a:r>
+            <a:r>
+              <a:rPr sz="1550">
+                <a:solidFill>
+                  <a:srgbClr val="FFFFFF"/>
+                </a:solidFill>
+                <a:latin typeface="Helvetica Neue"/>
+              </a:rPr>
+              <a:t>You represent Zebraish, build brand awareness, create content, and introduce potential clients — all detailed in the Agreement itself.</a:t>
             </a:r>
           </a:p>
         </p:txBody>
       </p:sp>
       <p:pic>
         <p:nvPicPr>
-          <p:cNvPr id="7" name="Picture 6" descr="logo-head.png"/>
+          <p:cNvPr id="6" name="Picture 5" descr="logo-head.png"/>
           <p:cNvPicPr>
             <a:picLocks noChangeAspect="1"/>
           </p:cNvPicPr>
@@ -11244,7 +11320,7 @@
       </p:pic>
       <p:sp>
         <p:nvSpPr>
-          <p:cNvPr id="8" name="TextBox 7"/>
+          <p:cNvPr id="7" name="TextBox 6"/>
           <p:cNvSpPr txBox="1"/>
           <p:nvPr/>
         </p:nvSpPr>
@@ -11283,7 +11359,7 @@
       </p:sp>
       <p:sp>
         <p:nvSpPr>
-          <p:cNvPr id="9" name="TextBox 8"/>
+          <p:cNvPr id="8" name="TextBox 7"/>
           <p:cNvSpPr txBox="1"/>
           <p:nvPr/>
         </p:nvSpPr>
@@ -11322,7 +11398,7 @@
       </p:sp>
       <p:cxnSp>
         <p:nvCxnSpPr>
-          <p:cNvPr id="10" name="Connector 9"/>
+          <p:cNvPr id="9" name="Connector 8"/>
           <p:cNvCxnSpPr/>
           <p:nvPr/>
         </p:nvCxnSpPr>
@@ -11454,7 +11530,7 @@
                 </a:solidFill>
                 <a:latin typeface="Helvetica Neue"/>
               </a:rPr>
-              <a:t>Your position</a:t>
+              <a:t>Outreach responsibilities</a:t>
             </a:r>
           </a:p>
         </p:txBody>
@@ -11540,7 +11616,7 @@
                 </a:solidFill>
                 <a:latin typeface="Helvetica Neue"/>
               </a:rPr>
-              <a:t>Position: Zebraish Official Collaboration Partner.</a:t>
+              <a:t>Proactively identify and approach potential Zebraish Studio clients within your own network and audience — anyone who could use what Studio builds — through DMs, in-person introductions, social engagement, whatever fits.</a:t>
             </a:r>
           </a:p>
           <a:p>
@@ -11568,7 +11644,7 @@
                 </a:solidFill>
                 <a:latin typeface="Helvetica Neue"/>
               </a:rPr>
-              <a:t>Non-exclusive — you're free to work with, promote, or represent other brands during the Term, as long as it doesn't conflict with your Zebraish obligations.</a:t>
+              <a:t>Represent Zebraish's offering accurately when you do.</a:t>
             </a:r>
           </a:p>
           <a:p>
@@ -11596,7 +11672,7 @@
                 </a:solidFill>
                 <a:latin typeface="Helvetica Neue"/>
               </a:rPr>
-              <a:t>Initial Term: 3 months from the date you both sign, renewable by mutual written agreement.</a:t>
+              <a:t>Direct anyone interested to Joshua directly, or to the Zebraish Project &amp; Payment Portal once it's live, so a project gets opened properly.</a:t>
             </a:r>
           </a:p>
           <a:p>
@@ -11624,7 +11700,7 @@
                 </a:solidFill>
                 <a:latin typeface="Helvetica Neue"/>
               </a:rPr>
-              <a:t>You represent Zebraish, build brand awareness, create content, and introduce potential clients — all detailed in the Agreement itself.</a:t>
+              <a:t>This is the core of how commission gets generated — outreach is part of the job, not an optional extra.</a:t>
             </a:r>
           </a:p>
         </p:txBody>
@@ -11855,7 +11931,7 @@
           <a:p>
             <a:pPr algn="l">
               <a:lnSpc>
-                <a:spcPct val="105000"/>
+                <a:spcPct val="115000"/>
               </a:lnSpc>
             </a:pPr>
             <a:r>
@@ -11865,7 +11941,7 @@
                 </a:solidFill>
                 <a:latin typeface="Helvetica Neue"/>
               </a:rPr>
-              <a:t>Outreach responsibilities</a:t>
+              <a:t>Social media minimums</a:t>
             </a:r>
           </a:p>
         </p:txBody>
@@ -11913,136 +11989,807 @@
         </p:nvSpPr>
         <p:spPr>
           <a:xfrm>
-            <a:off x="685800" y="1965960"/>
-            <a:ext cx="10424160" cy="3931920"/>
-          </a:xfrm>
-          <a:prstGeom prst="rect">
-            <a:avLst/>
-          </a:prstGeom>
-          <a:noFill/>
-        </p:spPr>
-        <p:txBody>
-          <a:bodyPr wrap="square" lIns="0" rIns="0">
-            <a:spAutoFit/>
-          </a:bodyPr>
-          <a:lstStyle/>
-          <a:p>
-            <a:pPr>
-              <a:lnSpc>
-                <a:spcPct val="125000"/>
-              </a:lnSpc>
-              <a:spcAft>
-                <a:spcPts val="1000"/>
-              </a:spcAft>
-            </a:pPr>
-            <a:r>
-              <a:rPr sz="1550" b="1">
-                <a:solidFill>
-                  <a:srgbClr val="4E9BF0"/>
-                </a:solidFill>
-                <a:latin typeface="Helvetica Neue"/>
-              </a:rPr>
-              <a:t>—  </a:t>
-            </a:r>
-            <a:r>
-              <a:rPr sz="1550">
+            <a:off x="685800" y="1783080"/>
+            <a:ext cx="10332720" cy="320040"/>
+          </a:xfrm>
+          <a:prstGeom prst="rect">
+            <a:avLst/>
+          </a:prstGeom>
+          <a:noFill/>
+        </p:spPr>
+        <p:txBody>
+          <a:bodyPr wrap="square" anchor="t" lIns="0" rIns="0" tIns="0" bIns="0">
+            <a:spAutoFit/>
+          </a:bodyPr>
+          <a:lstStyle/>
+          <a:p>
+            <a:pPr algn="l">
+              <a:lnSpc>
+                <a:spcPct val="115000"/>
+              </a:lnSpc>
+            </a:pPr>
+            <a:r>
+              <a:rPr sz="1250" b="0">
+                <a:solidFill>
+                  <a:srgbClr val="A6ACBA"/>
+                </a:solidFill>
+                <a:latin typeface="Helvetica Neue"/>
+              </a:rPr>
+              <a:t>Content focus is Zebraish Studio for now — Fashion content joins once the line launches.</a:t>
+            </a:r>
+          </a:p>
+        </p:txBody>
+      </p:sp>
+      <p:sp>
+        <p:nvSpPr>
+          <p:cNvPr id="6" name="Rectangle 5"/>
+          <p:cNvSpPr/>
+          <p:nvPr/>
+        </p:nvSpPr>
+        <p:spPr>
+          <a:xfrm>
+            <a:off x="685800" y="2212848"/>
+            <a:ext cx="10817352" cy="621792"/>
+          </a:xfrm>
+          <a:prstGeom prst="rect">
+            <a:avLst/>
+          </a:prstGeom>
+          <a:solidFill>
+            <a:srgbClr val="1D68C0"/>
+          </a:solidFill>
+          <a:ln>
+            <a:noFill/>
+          </a:ln>
+          <a:effectLst/>
+        </p:spPr>
+        <p:style>
+          <a:lnRef idx="1">
+            <a:schemeClr val="accent1"/>
+          </a:lnRef>
+          <a:fillRef idx="3">
+            <a:schemeClr val="accent1"/>
+          </a:fillRef>
+          <a:effectRef idx="2">
+            <a:schemeClr val="accent1"/>
+          </a:effectRef>
+          <a:fontRef idx="minor">
+            <a:schemeClr val="lt1"/>
+          </a:fontRef>
+        </p:style>
+        <p:txBody>
+          <a:bodyPr rtlCol="0" anchor="ctr"/>
+          <a:lstStyle/>
+          <a:p>
+            <a:pPr algn="ctr"/>
+          </a:p>
+        </p:txBody>
+      </p:sp>
+      <p:sp>
+        <p:nvSpPr>
+          <p:cNvPr id="7" name="TextBox 6"/>
+          <p:cNvSpPr txBox="1"/>
+          <p:nvPr/>
+        </p:nvSpPr>
+        <p:spPr>
+          <a:xfrm>
+            <a:off x="868680" y="2322576"/>
+            <a:ext cx="4846320" cy="621792"/>
+          </a:xfrm>
+          <a:prstGeom prst="rect">
+            <a:avLst/>
+          </a:prstGeom>
+          <a:noFill/>
+        </p:spPr>
+        <p:txBody>
+          <a:bodyPr wrap="square" anchor="t" lIns="0" rIns="0" tIns="0" bIns="0">
+            <a:spAutoFit/>
+          </a:bodyPr>
+          <a:lstStyle/>
+          <a:p>
+            <a:pPr algn="l">
+              <a:lnSpc>
+                <a:spcPct val="115000"/>
+              </a:lnSpc>
+            </a:pPr>
+            <a:r>
+              <a:rPr sz="1250" b="1">
                 <a:solidFill>
                   <a:srgbClr val="FFFFFF"/>
                 </a:solidFill>
                 <a:latin typeface="Helvetica Neue"/>
               </a:rPr>
-              <a:t>Proactively identify and approach potential clients within your own network and audience — DMs, in-person introductions, social engagement, whatever fits.</a:t>
-            </a:r>
-          </a:p>
-          <a:p>
-            <a:pPr>
-              <a:lnSpc>
-                <a:spcPct val="125000"/>
-              </a:lnSpc>
-              <a:spcAft>
-                <a:spcPts val="1000"/>
-              </a:spcAft>
-            </a:pPr>
-            <a:r>
-              <a:rPr sz="1550" b="1">
-                <a:solidFill>
-                  <a:srgbClr val="4E9BF0"/>
-                </a:solidFill>
-                <a:latin typeface="Helvetica Neue"/>
-              </a:rPr>
-              <a:t>—  </a:t>
-            </a:r>
-            <a:r>
-              <a:rPr sz="1550">
+              <a:t>Deliverable</a:t>
+            </a:r>
+          </a:p>
+        </p:txBody>
+      </p:sp>
+      <p:sp>
+        <p:nvSpPr>
+          <p:cNvPr id="8" name="TextBox 7"/>
+          <p:cNvSpPr txBox="1"/>
+          <p:nvPr/>
+        </p:nvSpPr>
+        <p:spPr>
+          <a:xfrm>
+            <a:off x="5989320" y="2322576"/>
+            <a:ext cx="5422392" cy="621792"/>
+          </a:xfrm>
+          <a:prstGeom prst="rect">
+            <a:avLst/>
+          </a:prstGeom>
+          <a:noFill/>
+        </p:spPr>
+        <p:txBody>
+          <a:bodyPr wrap="square" anchor="t" lIns="0" rIns="0" tIns="0" bIns="0">
+            <a:spAutoFit/>
+          </a:bodyPr>
+          <a:lstStyle/>
+          <a:p>
+            <a:pPr algn="l">
+              <a:lnSpc>
+                <a:spcPct val="115000"/>
+              </a:lnSpc>
+            </a:pPr>
+            <a:r>
+              <a:rPr sz="1250" b="1">
                 <a:solidFill>
                   <a:srgbClr val="FFFFFF"/>
                 </a:solidFill>
                 <a:latin typeface="Helvetica Neue"/>
               </a:rPr>
-              <a:t>Represent Zebraish's offering accurately when you do.</a:t>
-            </a:r>
-          </a:p>
-          <a:p>
-            <a:pPr>
-              <a:lnSpc>
-                <a:spcPct val="125000"/>
-              </a:lnSpc>
-              <a:spcAft>
-                <a:spcPts val="1000"/>
-              </a:spcAft>
-            </a:pPr>
-            <a:r>
-              <a:rPr sz="1550" b="1">
-                <a:solidFill>
-                  <a:srgbClr val="4E9BF0"/>
-                </a:solidFill>
-                <a:latin typeface="Helvetica Neue"/>
-              </a:rPr>
-              <a:t>—  </a:t>
-            </a:r>
-            <a:r>
-              <a:rPr sz="1550">
+              <a:t>Requirement</a:t>
+            </a:r>
+          </a:p>
+        </p:txBody>
+      </p:sp>
+      <p:sp>
+        <p:nvSpPr>
+          <p:cNvPr id="9" name="Rectangle 8"/>
+          <p:cNvSpPr/>
+          <p:nvPr/>
+        </p:nvSpPr>
+        <p:spPr>
+          <a:xfrm>
+            <a:off x="685800" y="2834640"/>
+            <a:ext cx="10817352" cy="621792"/>
+          </a:xfrm>
+          <a:prstGeom prst="rect">
+            <a:avLst/>
+          </a:prstGeom>
+          <a:solidFill>
+            <a:srgbClr val="141720"/>
+          </a:solidFill>
+          <a:ln>
+            <a:noFill/>
+          </a:ln>
+          <a:effectLst/>
+        </p:spPr>
+        <p:style>
+          <a:lnRef idx="1">
+            <a:schemeClr val="accent1"/>
+          </a:lnRef>
+          <a:fillRef idx="3">
+            <a:schemeClr val="accent1"/>
+          </a:fillRef>
+          <a:effectRef idx="2">
+            <a:schemeClr val="accent1"/>
+          </a:effectRef>
+          <a:fontRef idx="minor">
+            <a:schemeClr val="lt1"/>
+          </a:fontRef>
+        </p:style>
+        <p:txBody>
+          <a:bodyPr rtlCol="0" anchor="ctr"/>
+          <a:lstStyle/>
+          <a:p>
+            <a:pPr algn="ctr"/>
+          </a:p>
+        </p:txBody>
+      </p:sp>
+      <p:sp>
+        <p:nvSpPr>
+          <p:cNvPr id="10" name="TextBox 9"/>
+          <p:cNvSpPr txBox="1"/>
+          <p:nvPr/>
+        </p:nvSpPr>
+        <p:spPr>
+          <a:xfrm>
+            <a:off x="868680" y="2926080"/>
+            <a:ext cx="4846320" cy="621792"/>
+          </a:xfrm>
+          <a:prstGeom prst="rect">
+            <a:avLst/>
+          </a:prstGeom>
+          <a:noFill/>
+        </p:spPr>
+        <p:txBody>
+          <a:bodyPr wrap="square" anchor="t" lIns="0" rIns="0" tIns="0" bIns="0">
+            <a:spAutoFit/>
+          </a:bodyPr>
+          <a:lstStyle/>
+          <a:p>
+            <a:pPr algn="l">
+              <a:lnSpc>
+                <a:spcPct val="115000"/>
+              </a:lnSpc>
+            </a:pPr>
+            <a:r>
+              <a:rPr sz="1300" b="1">
                 <a:solidFill>
                   <a:srgbClr val="FFFFFF"/>
                 </a:solidFill>
                 <a:latin typeface="Helvetica Neue"/>
               </a:rPr>
-              <a:t>Direct anyone interested to Joshua directly, or to the Zebraish Project &amp; Payment Portal once it's live, so a project gets opened properly.</a:t>
-            </a:r>
-          </a:p>
-          <a:p>
-            <a:pPr>
-              <a:lnSpc>
-                <a:spcPct val="125000"/>
-              </a:lnSpc>
-              <a:spcAft>
-                <a:spcPts val="1000"/>
-              </a:spcAft>
-            </a:pPr>
-            <a:r>
-              <a:rPr sz="1550" b="1">
-                <a:solidFill>
-                  <a:srgbClr val="4E9BF0"/>
-                </a:solidFill>
-                <a:latin typeface="Helvetica Neue"/>
-              </a:rPr>
-              <a:t>—  </a:t>
-            </a:r>
-            <a:r>
-              <a:rPr sz="1550">
+              <a:t>Instagram posts / Reels</a:t>
+            </a:r>
+          </a:p>
+        </p:txBody>
+      </p:sp>
+      <p:sp>
+        <p:nvSpPr>
+          <p:cNvPr id="11" name="TextBox 10"/>
+          <p:cNvSpPr txBox="1"/>
+          <p:nvPr/>
+        </p:nvSpPr>
+        <p:spPr>
+          <a:xfrm>
+            <a:off x="5989320" y="2926080"/>
+            <a:ext cx="5422392" cy="621792"/>
+          </a:xfrm>
+          <a:prstGeom prst="rect">
+            <a:avLst/>
+          </a:prstGeom>
+          <a:noFill/>
+        </p:spPr>
+        <p:txBody>
+          <a:bodyPr wrap="square" anchor="t" lIns="0" rIns="0" tIns="0" bIns="0">
+            <a:spAutoFit/>
+          </a:bodyPr>
+          <a:lstStyle/>
+          <a:p>
+            <a:pPr algn="l">
+              <a:lnSpc>
+                <a:spcPct val="115000"/>
+              </a:lnSpc>
+            </a:pPr>
+            <a:r>
+              <a:rPr sz="1300" b="0">
+                <a:solidFill>
+                  <a:srgbClr val="A6ACBA"/>
+                </a:solidFill>
+                <a:latin typeface="Helvetica Neue"/>
+              </a:rPr>
+              <a:t>2 per week</a:t>
+            </a:r>
+          </a:p>
+        </p:txBody>
+      </p:sp>
+      <p:sp>
+        <p:nvSpPr>
+          <p:cNvPr id="12" name="Rectangle 11"/>
+          <p:cNvSpPr/>
+          <p:nvPr/>
+        </p:nvSpPr>
+        <p:spPr>
+          <a:xfrm>
+            <a:off x="685800" y="3456432"/>
+            <a:ext cx="10817352" cy="621792"/>
+          </a:xfrm>
+          <a:prstGeom prst="rect">
+            <a:avLst/>
+          </a:prstGeom>
+          <a:solidFill>
+            <a:srgbClr val="0B0D12"/>
+          </a:solidFill>
+          <a:ln>
+            <a:noFill/>
+          </a:ln>
+          <a:effectLst/>
+        </p:spPr>
+        <p:style>
+          <a:lnRef idx="1">
+            <a:schemeClr val="accent1"/>
+          </a:lnRef>
+          <a:fillRef idx="3">
+            <a:schemeClr val="accent1"/>
+          </a:fillRef>
+          <a:effectRef idx="2">
+            <a:schemeClr val="accent1"/>
+          </a:effectRef>
+          <a:fontRef idx="minor">
+            <a:schemeClr val="lt1"/>
+          </a:fontRef>
+        </p:style>
+        <p:txBody>
+          <a:bodyPr rtlCol="0" anchor="ctr"/>
+          <a:lstStyle/>
+          <a:p>
+            <a:pPr algn="ctr"/>
+          </a:p>
+        </p:txBody>
+      </p:sp>
+      <p:sp>
+        <p:nvSpPr>
+          <p:cNvPr id="13" name="TextBox 12"/>
+          <p:cNvSpPr txBox="1"/>
+          <p:nvPr/>
+        </p:nvSpPr>
+        <p:spPr>
+          <a:xfrm>
+            <a:off x="868680" y="3547872"/>
+            <a:ext cx="4846320" cy="621792"/>
+          </a:xfrm>
+          <a:prstGeom prst="rect">
+            <a:avLst/>
+          </a:prstGeom>
+          <a:noFill/>
+        </p:spPr>
+        <p:txBody>
+          <a:bodyPr wrap="square" anchor="t" lIns="0" rIns="0" tIns="0" bIns="0">
+            <a:spAutoFit/>
+          </a:bodyPr>
+          <a:lstStyle/>
+          <a:p>
+            <a:pPr algn="l">
+              <a:lnSpc>
+                <a:spcPct val="115000"/>
+              </a:lnSpc>
+            </a:pPr>
+            <a:r>
+              <a:rPr sz="1300" b="1">
                 <a:solidFill>
                   <a:srgbClr val="FFFFFF"/>
                 </a:solidFill>
                 <a:latin typeface="Helvetica Neue"/>
               </a:rPr>
-              <a:t>This is the core of how commission gets generated — outreach is part of the job, not an optional extra.</a:t>
-            </a:r>
-          </a:p>
-        </p:txBody>
-      </p:sp>
+              <a:t>Instagram Stories</a:t>
+            </a:r>
+          </a:p>
+        </p:txBody>
+      </p:sp>
+      <p:sp>
+        <p:nvSpPr>
+          <p:cNvPr id="14" name="TextBox 13"/>
+          <p:cNvSpPr txBox="1"/>
+          <p:nvPr/>
+        </p:nvSpPr>
+        <p:spPr>
+          <a:xfrm>
+            <a:off x="5989320" y="3547872"/>
+            <a:ext cx="5422392" cy="621792"/>
+          </a:xfrm>
+          <a:prstGeom prst="rect">
+            <a:avLst/>
+          </a:prstGeom>
+          <a:noFill/>
+        </p:spPr>
+        <p:txBody>
+          <a:bodyPr wrap="square" anchor="t" lIns="0" rIns="0" tIns="0" bIns="0">
+            <a:spAutoFit/>
+          </a:bodyPr>
+          <a:lstStyle/>
+          <a:p>
+            <a:pPr algn="l">
+              <a:lnSpc>
+                <a:spcPct val="115000"/>
+              </a:lnSpc>
+            </a:pPr>
+            <a:r>
+              <a:rPr sz="1300" b="0">
+                <a:solidFill>
+                  <a:srgbClr val="A6ACBA"/>
+                </a:solidFill>
+                <a:latin typeface="Helvetica Neue"/>
+              </a:rPr>
+              <a:t>3 per week</a:t>
+            </a:r>
+          </a:p>
+        </p:txBody>
+      </p:sp>
+      <p:sp>
+        <p:nvSpPr>
+          <p:cNvPr id="15" name="Rectangle 14"/>
+          <p:cNvSpPr/>
+          <p:nvPr/>
+        </p:nvSpPr>
+        <p:spPr>
+          <a:xfrm>
+            <a:off x="685800" y="4078224"/>
+            <a:ext cx="10817352" cy="621792"/>
+          </a:xfrm>
+          <a:prstGeom prst="rect">
+            <a:avLst/>
+          </a:prstGeom>
+          <a:solidFill>
+            <a:srgbClr val="141720"/>
+          </a:solidFill>
+          <a:ln>
+            <a:noFill/>
+          </a:ln>
+          <a:effectLst/>
+        </p:spPr>
+        <p:style>
+          <a:lnRef idx="1">
+            <a:schemeClr val="accent1"/>
+          </a:lnRef>
+          <a:fillRef idx="3">
+            <a:schemeClr val="accent1"/>
+          </a:fillRef>
+          <a:effectRef idx="2">
+            <a:schemeClr val="accent1"/>
+          </a:effectRef>
+          <a:fontRef idx="minor">
+            <a:schemeClr val="lt1"/>
+          </a:fontRef>
+        </p:style>
+        <p:txBody>
+          <a:bodyPr rtlCol="0" anchor="ctr"/>
+          <a:lstStyle/>
+          <a:p>
+            <a:pPr algn="ctr"/>
+          </a:p>
+        </p:txBody>
+      </p:sp>
+      <p:sp>
+        <p:nvSpPr>
+          <p:cNvPr id="16" name="TextBox 15"/>
+          <p:cNvSpPr txBox="1"/>
+          <p:nvPr/>
+        </p:nvSpPr>
+        <p:spPr>
+          <a:xfrm>
+            <a:off x="868680" y="4169664"/>
+            <a:ext cx="4846320" cy="621792"/>
+          </a:xfrm>
+          <a:prstGeom prst="rect">
+            <a:avLst/>
+          </a:prstGeom>
+          <a:noFill/>
+        </p:spPr>
+        <p:txBody>
+          <a:bodyPr wrap="square" anchor="t" lIns="0" rIns="0" tIns="0" bIns="0">
+            <a:spAutoFit/>
+          </a:bodyPr>
+          <a:lstStyle/>
+          <a:p>
+            <a:pPr algn="l">
+              <a:lnSpc>
+                <a:spcPct val="115000"/>
+              </a:lnSpc>
+            </a:pPr>
+            <a:r>
+              <a:rPr sz="1300" b="1">
+                <a:solidFill>
+                  <a:srgbClr val="FFFFFF"/>
+                </a:solidFill>
+                <a:latin typeface="Helvetica Neue"/>
+              </a:rPr>
+              <a:t>TikTok videos</a:t>
+            </a:r>
+          </a:p>
+        </p:txBody>
+      </p:sp>
+      <p:sp>
+        <p:nvSpPr>
+          <p:cNvPr id="17" name="TextBox 16"/>
+          <p:cNvSpPr txBox="1"/>
+          <p:nvPr/>
+        </p:nvSpPr>
+        <p:spPr>
+          <a:xfrm>
+            <a:off x="5989320" y="4169664"/>
+            <a:ext cx="5422392" cy="621792"/>
+          </a:xfrm>
+          <a:prstGeom prst="rect">
+            <a:avLst/>
+          </a:prstGeom>
+          <a:noFill/>
+        </p:spPr>
+        <p:txBody>
+          <a:bodyPr wrap="square" anchor="t" lIns="0" rIns="0" tIns="0" bIns="0">
+            <a:spAutoFit/>
+          </a:bodyPr>
+          <a:lstStyle/>
+          <a:p>
+            <a:pPr algn="l">
+              <a:lnSpc>
+                <a:spcPct val="115000"/>
+              </a:lnSpc>
+            </a:pPr>
+            <a:r>
+              <a:rPr sz="1300" b="0">
+                <a:solidFill>
+                  <a:srgbClr val="A6ACBA"/>
+                </a:solidFill>
+                <a:latin typeface="Helvetica Neue"/>
+              </a:rPr>
+              <a:t>1 per week</a:t>
+            </a:r>
+          </a:p>
+        </p:txBody>
+      </p:sp>
+      <p:sp>
+        <p:nvSpPr>
+          <p:cNvPr id="18" name="Rectangle 17"/>
+          <p:cNvSpPr/>
+          <p:nvPr/>
+        </p:nvSpPr>
+        <p:spPr>
+          <a:xfrm>
+            <a:off x="685800" y="4700016"/>
+            <a:ext cx="10817352" cy="621792"/>
+          </a:xfrm>
+          <a:prstGeom prst="rect">
+            <a:avLst/>
+          </a:prstGeom>
+          <a:solidFill>
+            <a:srgbClr val="0B0D12"/>
+          </a:solidFill>
+          <a:ln>
+            <a:noFill/>
+          </a:ln>
+          <a:effectLst/>
+        </p:spPr>
+        <p:style>
+          <a:lnRef idx="1">
+            <a:schemeClr val="accent1"/>
+          </a:lnRef>
+          <a:fillRef idx="3">
+            <a:schemeClr val="accent1"/>
+          </a:fillRef>
+          <a:effectRef idx="2">
+            <a:schemeClr val="accent1"/>
+          </a:effectRef>
+          <a:fontRef idx="minor">
+            <a:schemeClr val="lt1"/>
+          </a:fontRef>
+        </p:style>
+        <p:txBody>
+          <a:bodyPr rtlCol="0" anchor="ctr"/>
+          <a:lstStyle/>
+          <a:p>
+            <a:pPr algn="ctr"/>
+          </a:p>
+        </p:txBody>
+      </p:sp>
+      <p:sp>
+        <p:nvSpPr>
+          <p:cNvPr id="19" name="TextBox 18"/>
+          <p:cNvSpPr txBox="1"/>
+          <p:nvPr/>
+        </p:nvSpPr>
+        <p:spPr>
+          <a:xfrm>
+            <a:off x="868680" y="4791456"/>
+            <a:ext cx="4846320" cy="621792"/>
+          </a:xfrm>
+          <a:prstGeom prst="rect">
+            <a:avLst/>
+          </a:prstGeom>
+          <a:noFill/>
+        </p:spPr>
+        <p:txBody>
+          <a:bodyPr wrap="square" anchor="t" lIns="0" rIns="0" tIns="0" bIns="0">
+            <a:spAutoFit/>
+          </a:bodyPr>
+          <a:lstStyle/>
+          <a:p>
+            <a:pPr algn="l">
+              <a:lnSpc>
+                <a:spcPct val="115000"/>
+              </a:lnSpc>
+            </a:pPr>
+            <a:r>
+              <a:rPr sz="1300" b="1">
+                <a:solidFill>
+                  <a:srgbClr val="FFFFFF"/>
+                </a:solidFill>
+                <a:latin typeface="Helvetica Neue"/>
+              </a:rPr>
+              <a:t>Campaign participation</a:t>
+            </a:r>
+          </a:p>
+        </p:txBody>
+      </p:sp>
+      <p:sp>
+        <p:nvSpPr>
+          <p:cNvPr id="20" name="TextBox 19"/>
+          <p:cNvSpPr txBox="1"/>
+          <p:nvPr/>
+        </p:nvSpPr>
+        <p:spPr>
+          <a:xfrm>
+            <a:off x="5989320" y="4791456"/>
+            <a:ext cx="5422392" cy="621792"/>
+          </a:xfrm>
+          <a:prstGeom prst="rect">
+            <a:avLst/>
+          </a:prstGeom>
+          <a:noFill/>
+        </p:spPr>
+        <p:txBody>
+          <a:bodyPr wrap="square" anchor="t" lIns="0" rIns="0" tIns="0" bIns="0">
+            <a:spAutoFit/>
+          </a:bodyPr>
+          <a:lstStyle/>
+          <a:p>
+            <a:pPr algn="l">
+              <a:lnSpc>
+                <a:spcPct val="115000"/>
+              </a:lnSpc>
+            </a:pPr>
+            <a:r>
+              <a:rPr sz="1300" b="0">
+                <a:solidFill>
+                  <a:srgbClr val="A6ACBA"/>
+                </a:solidFill>
+                <a:latin typeface="Helvetica Neue"/>
+              </a:rPr>
+              <a:t>As reasonably requested</a:t>
+            </a:r>
+          </a:p>
+        </p:txBody>
+      </p:sp>
+      <p:sp>
+        <p:nvSpPr>
+          <p:cNvPr id="21" name="Rectangle 20"/>
+          <p:cNvSpPr/>
+          <p:nvPr/>
+        </p:nvSpPr>
+        <p:spPr>
+          <a:xfrm>
+            <a:off x="685800" y="5321808"/>
+            <a:ext cx="10817352" cy="621792"/>
+          </a:xfrm>
+          <a:prstGeom prst="rect">
+            <a:avLst/>
+          </a:prstGeom>
+          <a:solidFill>
+            <a:srgbClr val="141720"/>
+          </a:solidFill>
+          <a:ln>
+            <a:noFill/>
+          </a:ln>
+          <a:effectLst/>
+        </p:spPr>
+        <p:style>
+          <a:lnRef idx="1">
+            <a:schemeClr val="accent1"/>
+          </a:lnRef>
+          <a:fillRef idx="3">
+            <a:schemeClr val="accent1"/>
+          </a:fillRef>
+          <a:effectRef idx="2">
+            <a:schemeClr val="accent1"/>
+          </a:effectRef>
+          <a:fontRef idx="minor">
+            <a:schemeClr val="lt1"/>
+          </a:fontRef>
+        </p:style>
+        <p:txBody>
+          <a:bodyPr rtlCol="0" anchor="ctr"/>
+          <a:lstStyle/>
+          <a:p>
+            <a:pPr algn="ctr"/>
+          </a:p>
+        </p:txBody>
+      </p:sp>
+      <p:sp>
+        <p:nvSpPr>
+          <p:cNvPr id="22" name="TextBox 21"/>
+          <p:cNvSpPr txBox="1"/>
+          <p:nvPr/>
+        </p:nvSpPr>
+        <p:spPr>
+          <a:xfrm>
+            <a:off x="868680" y="5413248"/>
+            <a:ext cx="4846320" cy="621792"/>
+          </a:xfrm>
+          <a:prstGeom prst="rect">
+            <a:avLst/>
+          </a:prstGeom>
+          <a:noFill/>
+        </p:spPr>
+        <p:txBody>
+          <a:bodyPr wrap="square" anchor="t" lIns="0" rIns="0" tIns="0" bIns="0">
+            <a:spAutoFit/>
+          </a:bodyPr>
+          <a:lstStyle/>
+          <a:p>
+            <a:pPr algn="l">
+              <a:lnSpc>
+                <a:spcPct val="115000"/>
+              </a:lnSpc>
+            </a:pPr>
+            <a:r>
+              <a:rPr sz="1300" b="1">
+                <a:solidFill>
+                  <a:srgbClr val="FFFFFF"/>
+                </a:solidFill>
+                <a:latin typeface="Helvetica Neue"/>
+              </a:rPr>
+              <a:t>Content approval</a:t>
+            </a:r>
+          </a:p>
+        </p:txBody>
+      </p:sp>
+      <p:sp>
+        <p:nvSpPr>
+          <p:cNvPr id="23" name="TextBox 22"/>
+          <p:cNvSpPr txBox="1"/>
+          <p:nvPr/>
+        </p:nvSpPr>
+        <p:spPr>
+          <a:xfrm>
+            <a:off x="5989320" y="5413248"/>
+            <a:ext cx="5422392" cy="621792"/>
+          </a:xfrm>
+          <a:prstGeom prst="rect">
+            <a:avLst/>
+          </a:prstGeom>
+          <a:noFill/>
+        </p:spPr>
+        <p:txBody>
+          <a:bodyPr wrap="square" anchor="t" lIns="0" rIns="0" tIns="0" bIns="0">
+            <a:spAutoFit/>
+          </a:bodyPr>
+          <a:lstStyle/>
+          <a:p>
+            <a:pPr algn="l">
+              <a:lnSpc>
+                <a:spcPct val="115000"/>
+              </a:lnSpc>
+            </a:pPr>
+            <a:r>
+              <a:rPr sz="1300" b="0">
+                <a:solidFill>
+                  <a:srgbClr val="A6ACBA"/>
+                </a:solidFill>
+                <a:latin typeface="Helvetica Neue"/>
+              </a:rPr>
+              <a:t>Required in advance only for specific flagged campaigns</a:t>
+            </a:r>
+          </a:p>
+        </p:txBody>
+      </p:sp>
+      <p:cxnSp>
+        <p:nvCxnSpPr>
+          <p:cNvPr id="24" name="Connector 23"/>
+          <p:cNvCxnSpPr/>
+          <p:nvPr/>
+        </p:nvCxnSpPr>
+        <p:spPr>
+          <a:xfrm>
+            <a:off x="685800" y="2212848"/>
+            <a:ext cx="10817352" cy="0"/>
+          </a:xfrm>
+          <a:prstGeom prst="line">
+            <a:avLst/>
+          </a:prstGeom>
+          <a:ln w="12700">
+            <a:solidFill>
+              <a:srgbClr val="2A2E3A"/>
+            </a:solidFill>
+          </a:ln>
+        </p:spPr>
+        <p:style>
+          <a:lnRef idx="2">
+            <a:schemeClr val="accent1"/>
+          </a:lnRef>
+          <a:fillRef idx="0">
+            <a:schemeClr val="accent1"/>
+          </a:fillRef>
+          <a:effectRef idx="1">
+            <a:schemeClr val="accent1"/>
+          </a:effectRef>
+          <a:fontRef idx="minor">
+            <a:schemeClr val="tx1"/>
+          </a:fontRef>
+        </p:style>
+      </p:cxnSp>
       <p:pic>
         <p:nvPicPr>
-          <p:cNvPr id="6" name="Picture 5" descr="logo-head.png"/>
+          <p:cNvPr id="25" name="Picture 24" descr="logo-head.png"/>
           <p:cNvPicPr>
             <a:picLocks noChangeAspect="1"/>
           </p:cNvPicPr>
@@ -12066,7 +12813,7 @@
       </p:pic>
       <p:sp>
         <p:nvSpPr>
-          <p:cNvPr id="7" name="TextBox 6"/>
+          <p:cNvPr id="26" name="TextBox 25"/>
           <p:cNvSpPr txBox="1"/>
           <p:nvPr/>
         </p:nvSpPr>
@@ -12105,7 +12852,7 @@
       </p:sp>
       <p:sp>
         <p:nvSpPr>
-          <p:cNvPr id="8" name="TextBox 7"/>
+          <p:cNvPr id="27" name="TextBox 26"/>
           <p:cNvSpPr txBox="1"/>
           <p:nvPr/>
         </p:nvSpPr>
@@ -12144,7 +12891,7 @@
       </p:sp>
       <p:cxnSp>
         <p:nvCxnSpPr>
-          <p:cNvPr id="9" name="Connector 8"/>
+          <p:cNvPr id="28" name="Connector 27"/>
           <p:cNvCxnSpPr/>
           <p:nvPr/>
         </p:nvCxnSpPr>
@@ -12191,7 +12938,7 @@
     <p:bg>
       <p:bgPr>
         <a:solidFill>
-          <a:srgbClr val="0B0D12"/>
+          <a:srgbClr val="141720"/>
         </a:solidFill>
         <a:effectLst/>
       </p:bgPr>
@@ -12205,127 +12952,14 @@
       <p:grpSpPr/>
       <p:sp>
         <p:nvSpPr>
-          <p:cNvPr id="2" name="TextBox 1"/>
-          <p:cNvSpPr txBox="1"/>
-          <p:nvPr/>
-        </p:nvSpPr>
-        <p:spPr>
-          <a:xfrm>
-            <a:off x="685800" y="502920"/>
-            <a:ext cx="7315200" cy="365760"/>
-          </a:xfrm>
-          <a:prstGeom prst="rect">
-            <a:avLst/>
-          </a:prstGeom>
-          <a:noFill/>
-        </p:spPr>
-        <p:txBody>
-          <a:bodyPr wrap="square" anchor="t" lIns="0" rIns="0" tIns="0" bIns="0">
-            <a:spAutoFit/>
-          </a:bodyPr>
-          <a:lstStyle/>
-          <a:p>
-            <a:pPr algn="l">
-              <a:lnSpc>
-                <a:spcPct val="115000"/>
-              </a:lnSpc>
-            </a:pPr>
-            <a:r>
-              <a:rPr sz="1250" b="1">
-                <a:solidFill>
-                  <a:srgbClr val="4E9BF0"/>
-                </a:solidFill>
-                <a:latin typeface="Helvetica Neue"/>
-              </a:rPr>
-              <a:t>YOUR ROLE</a:t>
-            </a:r>
-          </a:p>
-        </p:txBody>
-      </p:sp>
-      <p:sp>
-        <p:nvSpPr>
-          <p:cNvPr id="3" name="TextBox 2"/>
-          <p:cNvSpPr txBox="1"/>
-          <p:nvPr/>
-        </p:nvSpPr>
-        <p:spPr>
-          <a:xfrm>
-            <a:off x="685800" y="868680"/>
-            <a:ext cx="10515600" cy="914400"/>
-          </a:xfrm>
-          <a:prstGeom prst="rect">
-            <a:avLst/>
-          </a:prstGeom>
-          <a:noFill/>
-        </p:spPr>
-        <p:txBody>
-          <a:bodyPr wrap="square" anchor="t" lIns="0" rIns="0" tIns="0" bIns="0">
-            <a:spAutoFit/>
-          </a:bodyPr>
-          <a:lstStyle/>
-          <a:p>
-            <a:pPr algn="l">
-              <a:lnSpc>
-                <a:spcPct val="115000"/>
-              </a:lnSpc>
-            </a:pPr>
-            <a:r>
-              <a:rPr sz="2700" b="1">
-                <a:solidFill>
-                  <a:srgbClr val="FFFFFF"/>
-                </a:solidFill>
-                <a:latin typeface="Helvetica Neue"/>
-              </a:rPr>
-              <a:t>Social media minimums</a:t>
-            </a:r>
-          </a:p>
-        </p:txBody>
-      </p:sp>
-      <p:cxnSp>
-        <p:nvCxnSpPr>
-          <p:cNvPr id="4" name="Connector 3"/>
-          <p:cNvCxnSpPr/>
-          <p:nvPr/>
-        </p:nvCxnSpPr>
-        <p:spPr>
-          <a:xfrm>
-            <a:off x="685800" y="1691640"/>
-            <a:ext cx="10817352" cy="0"/>
-          </a:xfrm>
-          <a:prstGeom prst="line">
-            <a:avLst/>
-          </a:prstGeom>
-          <a:ln w="12700">
-            <a:solidFill>
-              <a:srgbClr val="2A2E3A"/>
-            </a:solidFill>
-          </a:ln>
-        </p:spPr>
-        <p:style>
-          <a:lnRef idx="2">
-            <a:schemeClr val="accent1"/>
-          </a:lnRef>
-          <a:fillRef idx="0">
-            <a:schemeClr val="accent1"/>
-          </a:fillRef>
-          <a:effectRef idx="1">
-            <a:schemeClr val="accent1"/>
-          </a:effectRef>
-          <a:fontRef idx="minor">
-            <a:schemeClr val="tx1"/>
-          </a:fontRef>
-        </p:style>
-      </p:cxnSp>
-      <p:sp>
-        <p:nvSpPr>
-          <p:cNvPr id="5" name="Rectangle 4"/>
+          <p:cNvPr id="2" name="Rectangle 1"/>
           <p:cNvSpPr/>
           <p:nvPr/>
         </p:nvSpPr>
         <p:spPr>
           <a:xfrm>
-            <a:off x="685800" y="1920240"/>
-            <a:ext cx="10817352" cy="621792"/>
+            <a:off x="0" y="0"/>
+            <a:ext cx="164592" cy="6858000"/>
           </a:xfrm>
           <a:prstGeom prst="rect">
             <a:avLst/>
@@ -12362,14 +12996,131 @@
       </p:sp>
       <p:sp>
         <p:nvSpPr>
+          <p:cNvPr id="3" name="TextBox 2"/>
+          <p:cNvSpPr txBox="1"/>
+          <p:nvPr/>
+        </p:nvSpPr>
+        <p:spPr>
+          <a:xfrm>
+            <a:off x="868680" y="2286000"/>
+            <a:ext cx="1828800" cy="1097280"/>
+          </a:xfrm>
+          <a:prstGeom prst="rect">
+            <a:avLst/>
+          </a:prstGeom>
+          <a:noFill/>
+        </p:spPr>
+        <p:txBody>
+          <a:bodyPr wrap="square" anchor="t" lIns="0" rIns="0" tIns="0" bIns="0">
+            <a:spAutoFit/>
+          </a:bodyPr>
+          <a:lstStyle/>
+          <a:p>
+            <a:pPr algn="l">
+              <a:lnSpc>
+                <a:spcPct val="115000"/>
+              </a:lnSpc>
+            </a:pPr>
+            <a:r>
+              <a:rPr sz="6400" b="1">
+                <a:solidFill>
+                  <a:srgbClr val="4E9BF0"/>
+                </a:solidFill>
+                <a:latin typeface="Helvetica Neue"/>
+              </a:rPr>
+              <a:t>03</a:t>
+            </a:r>
+          </a:p>
+        </p:txBody>
+      </p:sp>
+      <p:sp>
+        <p:nvSpPr>
+          <p:cNvPr id="4" name="TextBox 3"/>
+          <p:cNvSpPr txBox="1"/>
+          <p:nvPr/>
+        </p:nvSpPr>
+        <p:spPr>
+          <a:xfrm>
+            <a:off x="896112" y="2103120"/>
+            <a:ext cx="7315200" cy="365760"/>
+          </a:xfrm>
+          <a:prstGeom prst="rect">
+            <a:avLst/>
+          </a:prstGeom>
+          <a:noFill/>
+        </p:spPr>
+        <p:txBody>
+          <a:bodyPr wrap="square" anchor="t" lIns="0" rIns="0" tIns="0" bIns="0">
+            <a:spAutoFit/>
+          </a:bodyPr>
+          <a:lstStyle/>
+          <a:p>
+            <a:pPr algn="l">
+              <a:lnSpc>
+                <a:spcPct val="115000"/>
+              </a:lnSpc>
+            </a:pPr>
+            <a:r>
+              <a:rPr sz="1250" b="1">
+                <a:solidFill>
+                  <a:srgbClr val="4E9BF0"/>
+                </a:solidFill>
+                <a:latin typeface="Helvetica Neue"/>
+              </a:rPr>
+              <a:t>COMMISSION &amp; PAYMENTS</a:t>
+            </a:r>
+          </a:p>
+        </p:txBody>
+      </p:sp>
+      <p:sp>
+        <p:nvSpPr>
+          <p:cNvPr id="5" name="TextBox 4"/>
+          <p:cNvSpPr txBox="1"/>
+          <p:nvPr/>
+        </p:nvSpPr>
+        <p:spPr>
+          <a:xfrm>
+            <a:off x="868680" y="3429000"/>
+            <a:ext cx="9875520" cy="1097280"/>
+          </a:xfrm>
+          <a:prstGeom prst="rect">
+            <a:avLst/>
+          </a:prstGeom>
+          <a:noFill/>
+        </p:spPr>
+        <p:txBody>
+          <a:bodyPr wrap="square" anchor="t" lIns="0" rIns="0" tIns="0" bIns="0">
+            <a:spAutoFit/>
+          </a:bodyPr>
+          <a:lstStyle/>
+          <a:p>
+            <a:pPr algn="l">
+              <a:lnSpc>
+                <a:spcPct val="115000"/>
+              </a:lnSpc>
+            </a:pPr>
+            <a:r>
+              <a:rPr sz="3400" b="1">
+                <a:solidFill>
+                  <a:srgbClr val="FFFFFF"/>
+                </a:solidFill>
+                <a:latin typeface="Helvetica Neue"/>
+              </a:rPr>
+              <a:t>How money moves</a:t>
+            </a:r>
+          </a:p>
+        </p:txBody>
+      </p:sp>
+      <p:sp>
+        <p:nvSpPr>
           <p:cNvPr id="6" name="TextBox 5"/>
           <p:cNvSpPr txBox="1"/>
           <p:nvPr/>
         </p:nvSpPr>
         <p:spPr>
           <a:xfrm>
-            <a:off x="868680" y="2029968"/>
-            <a:ext cx="4846320" cy="621792"/>
+            <a:off x="868680" y="4251960"/>
+            <a:ext cx="8412480" cy="1097280"/>
           </a:xfrm>
           <a:prstGeom prst="rect">
             <a:avLst/>
@@ -12384,708 +13135,24 @@
           <a:p>
             <a:pPr algn="l">
               <a:lnSpc>
-                <a:spcPct val="115000"/>
-              </a:lnSpc>
-            </a:pPr>
-            <a:r>
-              <a:rPr sz="1250" b="1">
-                <a:solidFill>
-                  <a:srgbClr val="FFFFFF"/>
-                </a:solidFill>
-                <a:latin typeface="Helvetica Neue"/>
-              </a:rPr>
-              <a:t>Deliverable</a:t>
-            </a:r>
-          </a:p>
-        </p:txBody>
-      </p:sp>
-      <p:sp>
-        <p:nvSpPr>
-          <p:cNvPr id="7" name="TextBox 6"/>
-          <p:cNvSpPr txBox="1"/>
-          <p:nvPr/>
-        </p:nvSpPr>
-        <p:spPr>
-          <a:xfrm>
-            <a:off x="5989320" y="2029968"/>
-            <a:ext cx="5422392" cy="621792"/>
-          </a:xfrm>
-          <a:prstGeom prst="rect">
-            <a:avLst/>
-          </a:prstGeom>
-          <a:noFill/>
-        </p:spPr>
-        <p:txBody>
-          <a:bodyPr wrap="square" anchor="t" lIns="0" rIns="0" tIns="0" bIns="0">
-            <a:spAutoFit/>
-          </a:bodyPr>
-          <a:lstStyle/>
-          <a:p>
-            <a:pPr algn="l">
-              <a:lnSpc>
-                <a:spcPct val="115000"/>
-              </a:lnSpc>
-            </a:pPr>
-            <a:r>
-              <a:rPr sz="1250" b="1">
-                <a:solidFill>
-                  <a:srgbClr val="FFFFFF"/>
-                </a:solidFill>
-                <a:latin typeface="Helvetica Neue"/>
-              </a:rPr>
-              <a:t>Requirement</a:t>
-            </a:r>
-          </a:p>
-        </p:txBody>
-      </p:sp>
-      <p:sp>
-        <p:nvSpPr>
-          <p:cNvPr id="8" name="Rectangle 7"/>
-          <p:cNvSpPr/>
-          <p:nvPr/>
-        </p:nvSpPr>
-        <p:spPr>
-          <a:xfrm>
-            <a:off x="685800" y="2542032"/>
-            <a:ext cx="10817352" cy="621792"/>
-          </a:xfrm>
-          <a:prstGeom prst="rect">
-            <a:avLst/>
-          </a:prstGeom>
-          <a:solidFill>
-            <a:srgbClr val="141720"/>
-          </a:solidFill>
-          <a:ln>
-            <a:noFill/>
-          </a:ln>
-          <a:effectLst/>
-        </p:spPr>
-        <p:style>
-          <a:lnRef idx="1">
-            <a:schemeClr val="accent1"/>
-          </a:lnRef>
-          <a:fillRef idx="3">
-            <a:schemeClr val="accent1"/>
-          </a:fillRef>
-          <a:effectRef idx="2">
-            <a:schemeClr val="accent1"/>
-          </a:effectRef>
-          <a:fontRef idx="minor">
-            <a:schemeClr val="lt1"/>
-          </a:fontRef>
-        </p:style>
-        <p:txBody>
-          <a:bodyPr rtlCol="0" anchor="ctr"/>
-          <a:lstStyle/>
-          <a:p>
-            <a:pPr algn="ctr"/>
-          </a:p>
-        </p:txBody>
-      </p:sp>
-      <p:sp>
-        <p:nvSpPr>
-          <p:cNvPr id="9" name="TextBox 8"/>
-          <p:cNvSpPr txBox="1"/>
-          <p:nvPr/>
-        </p:nvSpPr>
-        <p:spPr>
-          <a:xfrm>
-            <a:off x="868680" y="2633472"/>
-            <a:ext cx="4846320" cy="621792"/>
-          </a:xfrm>
-          <a:prstGeom prst="rect">
-            <a:avLst/>
-          </a:prstGeom>
-          <a:noFill/>
-        </p:spPr>
-        <p:txBody>
-          <a:bodyPr wrap="square" anchor="t" lIns="0" rIns="0" tIns="0" bIns="0">
-            <a:spAutoFit/>
-          </a:bodyPr>
-          <a:lstStyle/>
-          <a:p>
-            <a:pPr algn="l">
-              <a:lnSpc>
-                <a:spcPct val="115000"/>
-              </a:lnSpc>
-            </a:pPr>
-            <a:r>
-              <a:rPr sz="1300" b="1">
-                <a:solidFill>
-                  <a:srgbClr val="FFFFFF"/>
-                </a:solidFill>
-                <a:latin typeface="Helvetica Neue"/>
-              </a:rPr>
-              <a:t>Instagram posts / Reels</a:t>
-            </a:r>
-          </a:p>
-        </p:txBody>
-      </p:sp>
-      <p:sp>
-        <p:nvSpPr>
-          <p:cNvPr id="10" name="TextBox 9"/>
-          <p:cNvSpPr txBox="1"/>
-          <p:nvPr/>
-        </p:nvSpPr>
-        <p:spPr>
-          <a:xfrm>
-            <a:off x="5989320" y="2633472"/>
-            <a:ext cx="5422392" cy="621792"/>
-          </a:xfrm>
-          <a:prstGeom prst="rect">
-            <a:avLst/>
-          </a:prstGeom>
-          <a:noFill/>
-        </p:spPr>
-        <p:txBody>
-          <a:bodyPr wrap="square" anchor="t" lIns="0" rIns="0" tIns="0" bIns="0">
-            <a:spAutoFit/>
-          </a:bodyPr>
-          <a:lstStyle/>
-          <a:p>
-            <a:pPr algn="l">
-              <a:lnSpc>
-                <a:spcPct val="115000"/>
-              </a:lnSpc>
-            </a:pPr>
-            <a:r>
-              <a:rPr sz="1300" b="0">
+                <a:spcPct val="135000"/>
+              </a:lnSpc>
+            </a:pPr>
+            <a:r>
+              <a:rPr sz="1550" b="0">
                 <a:solidFill>
                   <a:srgbClr val="A6ACBA"/>
                 </a:solidFill>
                 <a:latin typeface="Helvetica Neue"/>
               </a:rPr>
-              <a:t>2 per week</a:t>
-            </a:r>
-          </a:p>
-        </p:txBody>
-      </p:sp>
-      <p:sp>
-        <p:nvSpPr>
-          <p:cNvPr id="11" name="Rectangle 10"/>
-          <p:cNvSpPr/>
-          <p:nvPr/>
-        </p:nvSpPr>
-        <p:spPr>
-          <a:xfrm>
-            <a:off x="685800" y="3163824"/>
-            <a:ext cx="10817352" cy="621792"/>
-          </a:xfrm>
-          <a:prstGeom prst="rect">
-            <a:avLst/>
-          </a:prstGeom>
-          <a:solidFill>
-            <a:srgbClr val="0B0D12"/>
-          </a:solidFill>
-          <a:ln>
-            <a:noFill/>
-          </a:ln>
-          <a:effectLst/>
-        </p:spPr>
-        <p:style>
-          <a:lnRef idx="1">
-            <a:schemeClr val="accent1"/>
-          </a:lnRef>
-          <a:fillRef idx="3">
-            <a:schemeClr val="accent1"/>
-          </a:fillRef>
-          <a:effectRef idx="2">
-            <a:schemeClr val="accent1"/>
-          </a:effectRef>
-          <a:fontRef idx="minor">
-            <a:schemeClr val="lt1"/>
-          </a:fontRef>
-        </p:style>
-        <p:txBody>
-          <a:bodyPr rtlCol="0" anchor="ctr"/>
-          <a:lstStyle/>
-          <a:p>
-            <a:pPr algn="ctr"/>
-          </a:p>
-        </p:txBody>
-      </p:sp>
-      <p:sp>
-        <p:nvSpPr>
-          <p:cNvPr id="12" name="TextBox 11"/>
-          <p:cNvSpPr txBox="1"/>
-          <p:nvPr/>
-        </p:nvSpPr>
-        <p:spPr>
-          <a:xfrm>
-            <a:off x="868680" y="3255264"/>
-            <a:ext cx="4846320" cy="621792"/>
-          </a:xfrm>
-          <a:prstGeom prst="rect">
-            <a:avLst/>
-          </a:prstGeom>
-          <a:noFill/>
-        </p:spPr>
-        <p:txBody>
-          <a:bodyPr wrap="square" anchor="t" lIns="0" rIns="0" tIns="0" bIns="0">
-            <a:spAutoFit/>
-          </a:bodyPr>
-          <a:lstStyle/>
-          <a:p>
-            <a:pPr algn="l">
-              <a:lnSpc>
-                <a:spcPct val="115000"/>
-              </a:lnSpc>
-            </a:pPr>
-            <a:r>
-              <a:rPr sz="1300" b="1">
-                <a:solidFill>
-                  <a:srgbClr val="FFFFFF"/>
-                </a:solidFill>
-                <a:latin typeface="Helvetica Neue"/>
-              </a:rPr>
-              <a:t>Instagram Stories</a:t>
-            </a:r>
-          </a:p>
-        </p:txBody>
-      </p:sp>
-      <p:sp>
-        <p:nvSpPr>
-          <p:cNvPr id="13" name="TextBox 12"/>
-          <p:cNvSpPr txBox="1"/>
-          <p:nvPr/>
-        </p:nvSpPr>
-        <p:spPr>
-          <a:xfrm>
-            <a:off x="5989320" y="3255264"/>
-            <a:ext cx="5422392" cy="621792"/>
-          </a:xfrm>
-          <a:prstGeom prst="rect">
-            <a:avLst/>
-          </a:prstGeom>
-          <a:noFill/>
-        </p:spPr>
-        <p:txBody>
-          <a:bodyPr wrap="square" anchor="t" lIns="0" rIns="0" tIns="0" bIns="0">
-            <a:spAutoFit/>
-          </a:bodyPr>
-          <a:lstStyle/>
-          <a:p>
-            <a:pPr algn="l">
-              <a:lnSpc>
-                <a:spcPct val="115000"/>
-              </a:lnSpc>
-            </a:pPr>
-            <a:r>
-              <a:rPr sz="1300" b="0">
-                <a:solidFill>
-                  <a:srgbClr val="A6ACBA"/>
-                </a:solidFill>
-                <a:latin typeface="Helvetica Neue"/>
-              </a:rPr>
-              <a:t>3 per week</a:t>
-            </a:r>
-          </a:p>
-        </p:txBody>
-      </p:sp>
-      <p:sp>
-        <p:nvSpPr>
-          <p:cNvPr id="14" name="Rectangle 13"/>
-          <p:cNvSpPr/>
-          <p:nvPr/>
-        </p:nvSpPr>
-        <p:spPr>
-          <a:xfrm>
-            <a:off x="685800" y="3785616"/>
-            <a:ext cx="10817352" cy="621792"/>
-          </a:xfrm>
-          <a:prstGeom prst="rect">
-            <a:avLst/>
-          </a:prstGeom>
-          <a:solidFill>
-            <a:srgbClr val="141720"/>
-          </a:solidFill>
-          <a:ln>
-            <a:noFill/>
-          </a:ln>
-          <a:effectLst/>
-        </p:spPr>
-        <p:style>
-          <a:lnRef idx="1">
-            <a:schemeClr val="accent1"/>
-          </a:lnRef>
-          <a:fillRef idx="3">
-            <a:schemeClr val="accent1"/>
-          </a:fillRef>
-          <a:effectRef idx="2">
-            <a:schemeClr val="accent1"/>
-          </a:effectRef>
-          <a:fontRef idx="minor">
-            <a:schemeClr val="lt1"/>
-          </a:fontRef>
-        </p:style>
-        <p:txBody>
-          <a:bodyPr rtlCol="0" anchor="ctr"/>
-          <a:lstStyle/>
-          <a:p>
-            <a:pPr algn="ctr"/>
-          </a:p>
-        </p:txBody>
-      </p:sp>
-      <p:sp>
-        <p:nvSpPr>
-          <p:cNvPr id="15" name="TextBox 14"/>
-          <p:cNvSpPr txBox="1"/>
-          <p:nvPr/>
-        </p:nvSpPr>
-        <p:spPr>
-          <a:xfrm>
-            <a:off x="868680" y="3877056"/>
-            <a:ext cx="4846320" cy="621792"/>
-          </a:xfrm>
-          <a:prstGeom prst="rect">
-            <a:avLst/>
-          </a:prstGeom>
-          <a:noFill/>
-        </p:spPr>
-        <p:txBody>
-          <a:bodyPr wrap="square" anchor="t" lIns="0" rIns="0" tIns="0" bIns="0">
-            <a:spAutoFit/>
-          </a:bodyPr>
-          <a:lstStyle/>
-          <a:p>
-            <a:pPr algn="l">
-              <a:lnSpc>
-                <a:spcPct val="115000"/>
-              </a:lnSpc>
-            </a:pPr>
-            <a:r>
-              <a:rPr sz="1300" b="1">
-                <a:solidFill>
-                  <a:srgbClr val="FFFFFF"/>
-                </a:solidFill>
-                <a:latin typeface="Helvetica Neue"/>
-              </a:rPr>
-              <a:t>TikTok videos</a:t>
-            </a:r>
-          </a:p>
-        </p:txBody>
-      </p:sp>
-      <p:sp>
-        <p:nvSpPr>
-          <p:cNvPr id="16" name="TextBox 15"/>
-          <p:cNvSpPr txBox="1"/>
-          <p:nvPr/>
-        </p:nvSpPr>
-        <p:spPr>
-          <a:xfrm>
-            <a:off x="5989320" y="3877056"/>
-            <a:ext cx="5422392" cy="621792"/>
-          </a:xfrm>
-          <a:prstGeom prst="rect">
-            <a:avLst/>
-          </a:prstGeom>
-          <a:noFill/>
-        </p:spPr>
-        <p:txBody>
-          <a:bodyPr wrap="square" anchor="t" lIns="0" rIns="0" tIns="0" bIns="0">
-            <a:spAutoFit/>
-          </a:bodyPr>
-          <a:lstStyle/>
-          <a:p>
-            <a:pPr algn="l">
-              <a:lnSpc>
-                <a:spcPct val="115000"/>
-              </a:lnSpc>
-            </a:pPr>
-            <a:r>
-              <a:rPr sz="1300" b="0">
-                <a:solidFill>
-                  <a:srgbClr val="A6ACBA"/>
-                </a:solidFill>
-                <a:latin typeface="Helvetica Neue"/>
-              </a:rPr>
-              <a:t>1 per week</a:t>
-            </a:r>
-          </a:p>
-        </p:txBody>
-      </p:sp>
-      <p:sp>
-        <p:nvSpPr>
-          <p:cNvPr id="17" name="Rectangle 16"/>
-          <p:cNvSpPr/>
-          <p:nvPr/>
-        </p:nvSpPr>
-        <p:spPr>
-          <a:xfrm>
-            <a:off x="685800" y="4407408"/>
-            <a:ext cx="10817352" cy="621792"/>
-          </a:xfrm>
-          <a:prstGeom prst="rect">
-            <a:avLst/>
-          </a:prstGeom>
-          <a:solidFill>
-            <a:srgbClr val="0B0D12"/>
-          </a:solidFill>
-          <a:ln>
-            <a:noFill/>
-          </a:ln>
-          <a:effectLst/>
-        </p:spPr>
-        <p:style>
-          <a:lnRef idx="1">
-            <a:schemeClr val="accent1"/>
-          </a:lnRef>
-          <a:fillRef idx="3">
-            <a:schemeClr val="accent1"/>
-          </a:fillRef>
-          <a:effectRef idx="2">
-            <a:schemeClr val="accent1"/>
-          </a:effectRef>
-          <a:fontRef idx="minor">
-            <a:schemeClr val="lt1"/>
-          </a:fontRef>
-        </p:style>
-        <p:txBody>
-          <a:bodyPr rtlCol="0" anchor="ctr"/>
-          <a:lstStyle/>
-          <a:p>
-            <a:pPr algn="ctr"/>
-          </a:p>
-        </p:txBody>
-      </p:sp>
-      <p:sp>
-        <p:nvSpPr>
-          <p:cNvPr id="18" name="TextBox 17"/>
-          <p:cNvSpPr txBox="1"/>
-          <p:nvPr/>
-        </p:nvSpPr>
-        <p:spPr>
-          <a:xfrm>
-            <a:off x="868680" y="4498848"/>
-            <a:ext cx="4846320" cy="621792"/>
-          </a:xfrm>
-          <a:prstGeom prst="rect">
-            <a:avLst/>
-          </a:prstGeom>
-          <a:noFill/>
-        </p:spPr>
-        <p:txBody>
-          <a:bodyPr wrap="square" anchor="t" lIns="0" rIns="0" tIns="0" bIns="0">
-            <a:spAutoFit/>
-          </a:bodyPr>
-          <a:lstStyle/>
-          <a:p>
-            <a:pPr algn="l">
-              <a:lnSpc>
-                <a:spcPct val="115000"/>
-              </a:lnSpc>
-            </a:pPr>
-            <a:r>
-              <a:rPr sz="1300" b="1">
-                <a:solidFill>
-                  <a:srgbClr val="FFFFFF"/>
-                </a:solidFill>
-                <a:latin typeface="Helvetica Neue"/>
-              </a:rPr>
-              <a:t>Campaign participation</a:t>
-            </a:r>
-          </a:p>
-        </p:txBody>
-      </p:sp>
-      <p:sp>
-        <p:nvSpPr>
-          <p:cNvPr id="19" name="TextBox 18"/>
-          <p:cNvSpPr txBox="1"/>
-          <p:nvPr/>
-        </p:nvSpPr>
-        <p:spPr>
-          <a:xfrm>
-            <a:off x="5989320" y="4498848"/>
-            <a:ext cx="5422392" cy="621792"/>
-          </a:xfrm>
-          <a:prstGeom prst="rect">
-            <a:avLst/>
-          </a:prstGeom>
-          <a:noFill/>
-        </p:spPr>
-        <p:txBody>
-          <a:bodyPr wrap="square" anchor="t" lIns="0" rIns="0" tIns="0" bIns="0">
-            <a:spAutoFit/>
-          </a:bodyPr>
-          <a:lstStyle/>
-          <a:p>
-            <a:pPr algn="l">
-              <a:lnSpc>
-                <a:spcPct val="115000"/>
-              </a:lnSpc>
-            </a:pPr>
-            <a:r>
-              <a:rPr sz="1300" b="0">
-                <a:solidFill>
-                  <a:srgbClr val="A6ACBA"/>
-                </a:solidFill>
-                <a:latin typeface="Helvetica Neue"/>
-              </a:rPr>
-              <a:t>As reasonably requested</a:t>
-            </a:r>
-          </a:p>
-        </p:txBody>
-      </p:sp>
-      <p:sp>
-        <p:nvSpPr>
-          <p:cNvPr id="20" name="Rectangle 19"/>
-          <p:cNvSpPr/>
-          <p:nvPr/>
-        </p:nvSpPr>
-        <p:spPr>
-          <a:xfrm>
-            <a:off x="685800" y="5029200"/>
-            <a:ext cx="10817352" cy="621792"/>
-          </a:xfrm>
-          <a:prstGeom prst="rect">
-            <a:avLst/>
-          </a:prstGeom>
-          <a:solidFill>
-            <a:srgbClr val="141720"/>
-          </a:solidFill>
-          <a:ln>
-            <a:noFill/>
-          </a:ln>
-          <a:effectLst/>
-        </p:spPr>
-        <p:style>
-          <a:lnRef idx="1">
-            <a:schemeClr val="accent1"/>
-          </a:lnRef>
-          <a:fillRef idx="3">
-            <a:schemeClr val="accent1"/>
-          </a:fillRef>
-          <a:effectRef idx="2">
-            <a:schemeClr val="accent1"/>
-          </a:effectRef>
-          <a:fontRef idx="minor">
-            <a:schemeClr val="lt1"/>
-          </a:fontRef>
-        </p:style>
-        <p:txBody>
-          <a:bodyPr rtlCol="0" anchor="ctr"/>
-          <a:lstStyle/>
-          <a:p>
-            <a:pPr algn="ctr"/>
-          </a:p>
-        </p:txBody>
-      </p:sp>
-      <p:sp>
-        <p:nvSpPr>
-          <p:cNvPr id="21" name="TextBox 20"/>
-          <p:cNvSpPr txBox="1"/>
-          <p:nvPr/>
-        </p:nvSpPr>
-        <p:spPr>
-          <a:xfrm>
-            <a:off x="868680" y="5120640"/>
-            <a:ext cx="4846320" cy="621792"/>
-          </a:xfrm>
-          <a:prstGeom prst="rect">
-            <a:avLst/>
-          </a:prstGeom>
-          <a:noFill/>
-        </p:spPr>
-        <p:txBody>
-          <a:bodyPr wrap="square" anchor="t" lIns="0" rIns="0" tIns="0" bIns="0">
-            <a:spAutoFit/>
-          </a:bodyPr>
-          <a:lstStyle/>
-          <a:p>
-            <a:pPr algn="l">
-              <a:lnSpc>
-                <a:spcPct val="115000"/>
-              </a:lnSpc>
-            </a:pPr>
-            <a:r>
-              <a:rPr sz="1300" b="1">
-                <a:solidFill>
-                  <a:srgbClr val="FFFFFF"/>
-                </a:solidFill>
-                <a:latin typeface="Helvetica Neue"/>
-              </a:rPr>
-              <a:t>Content approval</a:t>
-            </a:r>
-          </a:p>
-        </p:txBody>
-      </p:sp>
-      <p:sp>
-        <p:nvSpPr>
-          <p:cNvPr id="22" name="TextBox 21"/>
-          <p:cNvSpPr txBox="1"/>
-          <p:nvPr/>
-        </p:nvSpPr>
-        <p:spPr>
-          <a:xfrm>
-            <a:off x="5989320" y="5120640"/>
-            <a:ext cx="5422392" cy="621792"/>
-          </a:xfrm>
-          <a:prstGeom prst="rect">
-            <a:avLst/>
-          </a:prstGeom>
-          <a:noFill/>
-        </p:spPr>
-        <p:txBody>
-          <a:bodyPr wrap="square" anchor="t" lIns="0" rIns="0" tIns="0" bIns="0">
-            <a:spAutoFit/>
-          </a:bodyPr>
-          <a:lstStyle/>
-          <a:p>
-            <a:pPr algn="l">
-              <a:lnSpc>
-                <a:spcPct val="115000"/>
-              </a:lnSpc>
-            </a:pPr>
-            <a:r>
-              <a:rPr sz="1300" b="0">
-                <a:solidFill>
-                  <a:srgbClr val="A6ACBA"/>
-                </a:solidFill>
-                <a:latin typeface="Helvetica Neue"/>
-              </a:rPr>
-              <a:t>Required in advance only for specific flagged campaigns</a:t>
-            </a:r>
-          </a:p>
-        </p:txBody>
-      </p:sp>
-      <p:cxnSp>
-        <p:nvCxnSpPr>
-          <p:cNvPr id="23" name="Connector 22"/>
-          <p:cNvCxnSpPr/>
-          <p:nvPr/>
-        </p:nvCxnSpPr>
-        <p:spPr>
-          <a:xfrm>
-            <a:off x="685800" y="1920240"/>
-            <a:ext cx="10817352" cy="0"/>
-          </a:xfrm>
-          <a:prstGeom prst="line">
-            <a:avLst/>
-          </a:prstGeom>
-          <a:ln w="12700">
-            <a:solidFill>
-              <a:srgbClr val="2A2E3A"/>
-            </a:solidFill>
-          </a:ln>
-        </p:spPr>
-        <p:style>
-          <a:lnRef idx="2">
-            <a:schemeClr val="accent1"/>
-          </a:lnRef>
-          <a:fillRef idx="0">
-            <a:schemeClr val="accent1"/>
-          </a:fillRef>
-          <a:effectRef idx="1">
-            <a:schemeClr val="accent1"/>
-          </a:effectRef>
-          <a:fontRef idx="minor">
-            <a:schemeClr val="tx1"/>
-          </a:fontRef>
-        </p:style>
-      </p:cxnSp>
+              <a:t>Client introductions, commission, and the weekly payout — in plain terms.</a:t>
+            </a:r>
+          </a:p>
+        </p:txBody>
+      </p:sp>
       <p:pic>
         <p:nvPicPr>
-          <p:cNvPr id="24" name="Picture 23" descr="logo-head.png"/>
+          <p:cNvPr id="7" name="Picture 6" descr="logo-head.png"/>
           <p:cNvPicPr>
             <a:picLocks noChangeAspect="1"/>
           </p:cNvPicPr>
@@ -13109,7 +13176,7 @@
       </p:pic>
       <p:sp>
         <p:nvSpPr>
-          <p:cNvPr id="25" name="TextBox 24"/>
+          <p:cNvPr id="8" name="TextBox 7"/>
           <p:cNvSpPr txBox="1"/>
           <p:nvPr/>
         </p:nvSpPr>
@@ -13148,7 +13215,7 @@
       </p:sp>
       <p:sp>
         <p:nvSpPr>
-          <p:cNvPr id="26" name="TextBox 25"/>
+          <p:cNvPr id="9" name="TextBox 8"/>
           <p:cNvSpPr txBox="1"/>
           <p:nvPr/>
         </p:nvSpPr>
@@ -13180,14 +13247,14 @@
                 </a:solidFill>
                 <a:latin typeface="Helvetica Neue"/>
               </a:rPr>
-              <a:t>Your Role   ·   09 / 20</a:t>
+              <a:t>Commission &amp; Payments   ·   09 / 20</a:t>
             </a:r>
           </a:p>
         </p:txBody>
       </p:sp>
       <p:cxnSp>
         <p:nvCxnSpPr>
-          <p:cNvPr id="27" name="Connector 26"/>
+          <p:cNvPr id="10" name="Connector 9"/>
           <p:cNvCxnSpPr/>
           <p:nvPr/>
         </p:nvCxnSpPr>

--- a/zebraish-christian-onboarding-en.pptx
+++ b/zebraish-christian-onboarding-en.pptx
@@ -3267,7 +3267,7 @@
                 </a:solidFill>
                 <a:latin typeface="Helvetica Neue"/>
               </a:rPr>
-              <a:t>Everything you need to know about the brand, your role, and how the collaboration works day to day — before you sign anything.</a:t>
+              <a:t>Everything you need to know about the brand, your role, and how the collaboration works day to day, before you sign anything.</a:t>
             </a:r>
           </a:p>
         </p:txBody>
@@ -3536,7 +3536,7 @@
                 </a:solidFill>
                 <a:latin typeface="Helvetica Neue"/>
               </a:rPr>
-              <a:t>Onboarding presentation — companion to the Official Collaboration Agreement</a:t>
+              <a:t>Onboarding presentation, companion to the Official Collaboration Agreement</a:t>
             </a:r>
           </a:p>
         </p:txBody>
@@ -3640,7 +3640,7 @@
                 </a:solidFill>
                 <a:latin typeface="Helvetica Neue"/>
               </a:rPr>
-              <a:t>Client introductions — no referral code needed</a:t>
+              <a:t>Client introductions: no referral code needed</a:t>
             </a:r>
           </a:p>
         </p:txBody>
@@ -3717,7 +3717,7 @@
                 </a:solidFill>
                 <a:latin typeface="Helvetica Neue"/>
               </a:rPr>
-              <a:t>—  </a:t>
+              <a:t>•  </a:t>
             </a:r>
             <a:r>
               <a:rPr sz="1550">
@@ -3726,7 +3726,7 @@
                 </a:solidFill>
                 <a:latin typeface="Helvetica Neue"/>
               </a:rPr>
-              <a:t>When you introduce a client, the project gets opened through the Zebraish Project &amp; Payment Portal (or you just tell Joshua directly and he opens it) — it gets a unique Project ID, like ZB-00017.</a:t>
+              <a:t>When you introduce a client, the project gets opened through the Zebraish Project &amp; Payment Portal (or you just tell Joshua directly and he opens it), and it gets a unique Project ID, like ZB-00017.</a:t>
             </a:r>
           </a:p>
           <a:p>
@@ -3745,7 +3745,7 @@
                 </a:solidFill>
                 <a:latin typeface="Helvetica Neue"/>
               </a:rPr>
-              <a:t>—  </a:t>
+              <a:t>•  </a:t>
             </a:r>
             <a:r>
               <a:rPr sz="1550">
@@ -3773,7 +3773,7 @@
                 </a:solidFill>
                 <a:latin typeface="Helvetica Neue"/>
               </a:rPr>
-              <a:t>—  </a:t>
+              <a:t>•  </a:t>
             </a:r>
             <a:r>
               <a:rPr sz="1550">
@@ -3782,7 +3782,7 @@
                 </a:solidFill>
                 <a:latin typeface="Helvetica Neue"/>
               </a:rPr>
-              <a:t>Commission isn't calculated by matching individual clients to you — it's based on all qualifying Zebraish payments received during your Term.</a:t>
+              <a:t>Commission isn't calculated by matching individual clients to you: it's based on all qualifying Zebraish payments received during your Term.</a:t>
             </a:r>
           </a:p>
         </p:txBody>
@@ -4292,7 +4292,7 @@
                 </a:solidFill>
                 <a:latin typeface="Helvetica Neue"/>
               </a:rPr>
-              <a:t>payout day — reviewed and sent by bank transfer</a:t>
+              <a:t>payout day, reviewed and sent by bank transfer</a:t>
             </a:r>
           </a:p>
         </p:txBody>
@@ -4375,7 +4375,7 @@
                 </a:solidFill>
                 <a:latin typeface="Helvetica Neue"/>
               </a:rPr>
-              <a:t>No arbitrary cap on what you can earn, and no fixed salary — compensation is commission-based for the Initial Term.</a:t>
+              <a:t>No arbitrary cap on what you can earn, and no fixed salary: compensation is commission-based for the Initial Term.</a:t>
             </a:r>
           </a:p>
         </p:txBody>
@@ -4616,7 +4616,7 @@
                 </a:solidFill>
                 <a:latin typeface="Helvetica Neue"/>
               </a:rPr>
-              <a:t>Weekly payout — how it works</a:t>
+              <a:t>Weekly payout: how it works</a:t>
             </a:r>
           </a:p>
         </p:txBody>
@@ -5736,7 +5736,7 @@
                 </a:solidFill>
                 <a:latin typeface="Helvetica Neue"/>
               </a:rPr>
-              <a:t>—  </a:t>
+              <a:t>•  </a:t>
             </a:r>
             <a:r>
               <a:rPr sz="1550">
@@ -5745,7 +5745,7 @@
                 </a:solidFill>
                 <a:latin typeface="Helvetica Neue"/>
               </a:rPr>
-              <a:t>A private view of your weekly commission — Project IDs, amounts, and PAID / PENDING status.</a:t>
+              <a:t>A private view of your weekly commission: Project IDs, amounts, and PAID / PENDING status.</a:t>
             </a:r>
           </a:p>
           <a:p>
@@ -5764,7 +5764,7 @@
                 </a:solidFill>
                 <a:latin typeface="Helvetica Neue"/>
               </a:rPr>
-              <a:t>—  </a:t>
+              <a:t>•  </a:t>
             </a:r>
             <a:r>
               <a:rPr sz="1550">
@@ -5792,7 +5792,7 @@
                 </a:solidFill>
                 <a:latin typeface="Helvetica Neue"/>
               </a:rPr>
-              <a:t>—  </a:t>
+              <a:t>•  </a:t>
             </a:r>
             <a:r>
               <a:rPr sz="1550">
@@ -5801,7 +5801,7 @@
                 </a:solidFill>
                 <a:latin typeface="Helvetica Neue"/>
               </a:rPr>
-              <a:t>This is being built alongside the Project Portal — Joshua will confirm once it's live; a written weekly summary works as a bridge until then.</a:t>
+              <a:t>This is being built alongside the Project Portal. Joshua will confirm once it's live; a written weekly summary works as a bridge until then.</a:t>
             </a:r>
           </a:p>
         </p:txBody>
@@ -6482,7 +6482,7 @@
                 </a:solidFill>
                 <a:latin typeface="Helvetica Neue"/>
               </a:rPr>
-              <a:t>—  </a:t>
+              <a:t>•  </a:t>
             </a:r>
             <a:r>
               <a:rPr sz="1550">
@@ -6510,7 +6510,7 @@
                 </a:solidFill>
                 <a:latin typeface="Helvetica Neue"/>
               </a:rPr>
-              <a:t>—  </a:t>
+              <a:t>•  </a:t>
             </a:r>
             <a:r>
               <a:rPr sz="1550">
@@ -6538,7 +6538,7 @@
                 </a:solidFill>
                 <a:latin typeface="Helvetica Neue"/>
               </a:rPr>
-              <a:t>—  </a:t>
+              <a:t>•  </a:t>
             </a:r>
             <a:r>
               <a:rPr sz="1550">
@@ -6566,7 +6566,7 @@
                 </a:solidFill>
                 <a:latin typeface="Helvetica Neue"/>
               </a:rPr>
-              <a:t>—  </a:t>
+              <a:t>•  </a:t>
             </a:r>
             <a:r>
               <a:rPr sz="1550">
@@ -6594,7 +6594,7 @@
                 </a:solidFill>
                 <a:latin typeface="Helvetica Neue"/>
               </a:rPr>
-              <a:t>—  </a:t>
+              <a:t>•  </a:t>
             </a:r>
             <a:r>
               <a:rPr sz="1550">
@@ -6921,7 +6921,7 @@
                 </a:solidFill>
                 <a:latin typeface="Helvetica Neue"/>
               </a:rPr>
-              <a:t>—  </a:t>
+              <a:t>•  </a:t>
             </a:r>
             <a:r>
               <a:rPr sz="1550">
@@ -6930,7 +6930,7 @@
                 </a:solidFill>
                 <a:latin typeface="Helvetica Neue"/>
               </a:rPr>
-              <a:t>You keep full ownership of your identity, image, and likeness — always.</a:t>
+              <a:t>You keep full ownership of your identity, image, and likeness, always.</a:t>
             </a:r>
           </a:p>
           <a:p>
@@ -6949,7 +6949,7 @@
                 </a:solidFill>
                 <a:latin typeface="Helvetica Neue"/>
               </a:rPr>
-              <a:t>—  </a:t>
+              <a:t>•  </a:t>
             </a:r>
             <a:r>
               <a:rPr sz="1550">
@@ -6977,7 +6977,7 @@
                 </a:solidFill>
                 <a:latin typeface="Helvetica Neue"/>
               </a:rPr>
-              <a:t>—  </a:t>
+              <a:t>•  </a:t>
             </a:r>
             <a:r>
               <a:rPr sz="1550">
@@ -6986,7 +6986,7 @@
                 </a:solidFill>
                 <a:latin typeface="Helvetica Neue"/>
               </a:rPr>
-              <a:t>That license runs during the Term, plus 6 months after it ends — for archival and portfolio use only, not new campaigns.</a:t>
+              <a:t>That license runs during the Term, plus 6 months after it ends, for archival and portfolio use only, not new campaigns.</a:t>
             </a:r>
           </a:p>
           <a:p>
@@ -7005,7 +7005,7 @@
                 </a:solidFill>
                 <a:latin typeface="Helvetica Neue"/>
               </a:rPr>
-              <a:t>—  </a:t>
+              <a:t>•  </a:t>
             </a:r>
             <a:r>
               <a:rPr sz="1550">
@@ -7014,7 +7014,7 @@
                 </a:solidFill>
                 <a:latin typeface="Helvetica Neue"/>
               </a:rPr>
-              <a:t>Confidential Zebraish information (products, pricing, strategy) stays confidential — during and after the Term.</a:t>
+              <a:t>Confidential Zebraish information (products, pricing, strategy) stays confidential, during and after the Term.</a:t>
             </a:r>
           </a:p>
         </p:txBody>
@@ -7656,7 +7656,7 @@
                 </a:solidFill>
                 <a:latin typeface="Helvetica Neue"/>
               </a:rPr>
-              <a:t>Only by mutual written agreement — otherwise it ends automatically</a:t>
+              <a:t>Only by mutual written agreement; otherwise it ends automatically</a:t>
             </a:r>
           </a:p>
         </p:txBody>
@@ -8375,7 +8375,7 @@
                 </a:solidFill>
                 <a:latin typeface="Helvetica Neue"/>
               </a:rPr>
-              <a:t>—  </a:t>
+              <a:t>•  </a:t>
             </a:r>
             <a:r>
               <a:rPr sz="1550">
@@ -8384,7 +8384,7 @@
                 </a:solidFill>
                 <a:latin typeface="Helvetica Neue"/>
               </a:rPr>
-              <a:t>If paid ads or boosted posts make sense, Joshua funds and confirms the budget in writing before anything's spent — you never commit Zebraish's money without sign-off.</a:t>
+              <a:t>If paid ads or boosted posts make sense, Joshua funds and confirms the budget in writing before anything's spent. You never commit Zebraish's money without sign-off.</a:t>
             </a:r>
           </a:p>
           <a:p>
@@ -8403,7 +8403,7 @@
                 </a:solidFill>
                 <a:latin typeface="Helvetica Neue"/>
               </a:rPr>
-              <a:t>—  </a:t>
+              <a:t>•  </a:t>
             </a:r>
             <a:r>
               <a:rPr sz="1550">
@@ -8431,7 +8431,7 @@
                 </a:solidFill>
                 <a:latin typeface="Helvetica Neue"/>
               </a:rPr>
-              <a:t>—  </a:t>
+              <a:t>•  </a:t>
             </a:r>
             <a:r>
               <a:rPr sz="1550">
@@ -8440,7 +8440,7 @@
                 </a:solidFill>
                 <a:latin typeface="Helvetica Neue"/>
               </a:rPr>
-              <a:t>Informal, low-friction — a call or a message is enough. It keeps both sides aligned without needing to touch the Agreement itself.</a:t>
+              <a:t>Informal, low-friction: a call or a message is enough. It keeps both sides aligned without needing to touch the Agreement itself.</a:t>
             </a:r>
           </a:p>
         </p:txBody>
@@ -8792,7 +8792,7 @@
                 </a:solidFill>
                 <a:latin typeface="Helvetica Neue"/>
               </a:rPr>
-              <a:t>A preview, not the current job — reference styling for the Fashion line, launching soon. Animal-inspired patterns and textures reinterpreted for a premium range. Your role expands to include this once it's live; for now, the focus is Zebraish Studio.</a:t>
+              <a:t>A preview, not the current job: reference styling for the Fashion line, launching soon. Animal-inspired patterns and textures reinterpreted for a premium range. Your role expands to include this once it's live; for now, the focus is Zebraish Studio.</a:t>
             </a:r>
           </a:p>
         </p:txBody>
@@ -9459,7 +9459,7 @@
                 </a:solidFill>
                 <a:latin typeface="Helvetica Neue"/>
               </a:rPr>
-              <a:t>This presentation is context. The Official Collaboration Agreement is the document that makes it binding — read it, ask anything, and sign when you're ready.</a:t>
+              <a:t>This presentation is context. The Official Collaboration Agreement is the document that makes it binding. Read it, ask anything, and sign when you're ready.</a:t>
             </a:r>
           </a:p>
         </p:txBody>
@@ -9537,7 +9537,7 @@
                 </a:solidFill>
                 <a:latin typeface="Helvetica Neue"/>
               </a:rPr>
-              <a:t>Joshua Bankole — j0shbankole19@gmail.com — +234 816 532 0780</a:t>
+              <a:t>Joshua Bankole · j0shbankole19@gmail.com · +234 816 532 0780</a:t>
             </a:r>
           </a:p>
         </p:txBody>
@@ -9615,7 +9615,7 @@
                 </a:solidFill>
                 <a:latin typeface="Helvetica Neue"/>
               </a:rPr>
-              <a:t>Christian Prieto — +34 631 53 71 36 — Barcelona, Spain</a:t>
+              <a:t>Christian Prieto · +34 631 53 71 36 · Barcelona, Spain</a:t>
             </a:r>
           </a:p>
         </p:txBody>
@@ -10011,7 +10011,7 @@
                 </a:solidFill>
                 <a:latin typeface="Helvetica Neue"/>
               </a:rPr>
-              <a:t>—  </a:t>
+              <a:t>•  </a:t>
             </a:r>
             <a:r>
               <a:rPr sz="1550">
@@ -10039,7 +10039,7 @@
                 </a:solidFill>
                 <a:latin typeface="Helvetica Neue"/>
               </a:rPr>
-              <a:t>—  </a:t>
+              <a:t>•  </a:t>
             </a:r>
             <a:r>
               <a:rPr sz="1550">
@@ -10048,7 +10048,7 @@
                 </a:solidFill>
                 <a:latin typeface="Helvetica Neue"/>
               </a:rPr>
-              <a:t>Studio and The Board are where the tech and product work happens — building, prototyping, and shipping ideas. This is what's live right now, and it's what Zebraish is launching with.</a:t>
+              <a:t>Studio and The Board are where the tech and product work happens: building, prototyping, and shipping ideas. This is what's live right now, and it's what Zebraish is launching with.</a:t>
             </a:r>
           </a:p>
           <a:p>
@@ -10067,7 +10067,7 @@
                 </a:solidFill>
                 <a:latin typeface="Helvetica Neue"/>
               </a:rPr>
-              <a:t>—  </a:t>
+              <a:t>•  </a:t>
             </a:r>
             <a:r>
               <a:rPr sz="1550">
@@ -10076,7 +10076,7 @@
                 </a:solidFill>
                 <a:latin typeface="Helvetica Neue"/>
               </a:rPr>
-              <a:t>Fashion is the creative expression of the same brand — apparel and style built around a distinct, animal-inspired aesthetic. It's coming soon, but the product line isn't public yet.</a:t>
+              <a:t>Fashion is the creative expression of the same brand: apparel and style built around a distinct, animal-inspired aesthetic. It's coming soon, but the product line isn't public yet.</a:t>
             </a:r>
           </a:p>
           <a:p>
@@ -10095,7 +10095,7 @@
                 </a:solidFill>
                 <a:latin typeface="Helvetica Neue"/>
               </a:rPr>
-              <a:t>—  </a:t>
+              <a:t>•  </a:t>
             </a:r>
             <a:r>
               <a:rPr sz="1550">
@@ -10422,7 +10422,7 @@
                 </a:solidFill>
                 <a:latin typeface="Helvetica Neue"/>
               </a:rPr>
-              <a:t>—  </a:t>
+              <a:t>•  </a:t>
             </a:r>
             <a:r>
               <a:rPr sz="1550">
@@ -10431,7 +10431,7 @@
                 </a:solidFill>
                 <a:latin typeface="Helvetica Neue"/>
               </a:rPr>
-              <a:t>You're joining as Zebraish's Official Collaboration Partner — and right now, your job is Studio: representing it, building awareness for it, and actively bringing in customers for it, because that's what Zebraish is starting with.</a:t>
+              <a:t>You're joining as Zebraish's Official Collaboration Partner, and right now, your job is Studio: representing it, building awareness for it, and actively bringing in customers for it, because that's what Zebraish is starting with.</a:t>
             </a:r>
           </a:p>
           <a:p>
@@ -10450,7 +10450,7 @@
                 </a:solidFill>
                 <a:latin typeface="Helvetica Neue"/>
               </a:rPr>
-              <a:t>—  </a:t>
+              <a:t>•  </a:t>
             </a:r>
             <a:r>
               <a:rPr sz="1550">
@@ -10459,7 +10459,7 @@
                 </a:solidFill>
                 <a:latin typeface="Helvetica Neue"/>
               </a:rPr>
-              <a:t>You don't need to be a tech person to do this well. Your audience trusts you — that's the asset. Point people toward Zebraish Studio, explain what it does in plain terms, and make the introduction.</a:t>
+              <a:t>You don't need to be a tech person to do this well. Your audience trusts you. That's the asset. Point people toward Zebraish Studio, explain what it does in plain terms, and make the introduction.</a:t>
             </a:r>
           </a:p>
           <a:p>
@@ -10478,7 +10478,7 @@
                 </a:solidFill>
                 <a:latin typeface="Helvetica Neue"/>
               </a:rPr>
-              <a:t>—  </a:t>
+              <a:t>•  </a:t>
             </a:r>
             <a:r>
               <a:rPr sz="1550">
@@ -10487,7 +10487,7 @@
                 </a:solidFill>
                 <a:latin typeface="Helvetica Neue"/>
               </a:rPr>
-              <a:t>Fashion joins your role once the clothing line actually launches, which is coming soon. When it does, it'll likely be an even more natural fit for you — but the work starts with Studio.</a:t>
+              <a:t>Fashion joins your role once the clothing line actually launches, which is coming soon. When it does, it'll likely be an even more natural fit for you, but the work starts with Studio.</a:t>
             </a:r>
           </a:p>
         </p:txBody>
@@ -11168,7 +11168,7 @@
                 </a:solidFill>
                 <a:latin typeface="Helvetica Neue"/>
               </a:rPr>
-              <a:t>—  </a:t>
+              <a:t>•  </a:t>
             </a:r>
             <a:r>
               <a:rPr sz="1550">
@@ -11196,7 +11196,7 @@
                 </a:solidFill>
                 <a:latin typeface="Helvetica Neue"/>
               </a:rPr>
-              <a:t>—  </a:t>
+              <a:t>•  </a:t>
             </a:r>
             <a:r>
               <a:rPr sz="1550">
@@ -11205,7 +11205,7 @@
                 </a:solidFill>
                 <a:latin typeface="Helvetica Neue"/>
               </a:rPr>
-              <a:t>Current focus: promoting Zebraish Studio and bringing in customers for it — that's the priority for the length of this Term.</a:t>
+              <a:t>Current focus: promoting Zebraish Studio and bringing in customers for it. That's the priority for the length of this Term.</a:t>
             </a:r>
           </a:p>
           <a:p>
@@ -11224,7 +11224,7 @@
                 </a:solidFill>
                 <a:latin typeface="Helvetica Neue"/>
               </a:rPr>
-              <a:t>—  </a:t>
+              <a:t>•  </a:t>
             </a:r>
             <a:r>
               <a:rPr sz="1550">
@@ -11233,7 +11233,7 @@
                 </a:solidFill>
                 <a:latin typeface="Helvetica Neue"/>
               </a:rPr>
-              <a:t>Non-exclusive — you're free to work with, promote, or represent other brands during the Term, as long as it doesn't conflict with your Zebraish obligations.</a:t>
+              <a:t>Non-exclusive: you're free to work with, promote, or represent other brands during the Term, as long as it doesn't conflict with your Zebraish obligations.</a:t>
             </a:r>
           </a:p>
           <a:p>
@@ -11252,7 +11252,7 @@
                 </a:solidFill>
                 <a:latin typeface="Helvetica Neue"/>
               </a:rPr>
-              <a:t>—  </a:t>
+              <a:t>•  </a:t>
             </a:r>
             <a:r>
               <a:rPr sz="1550">
@@ -11280,7 +11280,7 @@
                 </a:solidFill>
                 <a:latin typeface="Helvetica Neue"/>
               </a:rPr>
-              <a:t>—  </a:t>
+              <a:t>•  </a:t>
             </a:r>
             <a:r>
               <a:rPr sz="1550">
@@ -11289,7 +11289,7 @@
                 </a:solidFill>
                 <a:latin typeface="Helvetica Neue"/>
               </a:rPr>
-              <a:t>You represent Zebraish, build brand awareness, create content, and introduce potential clients — all detailed in the Agreement itself.</a:t>
+              <a:t>You represent Zebraish, build brand awareness, create content, and introduce potential clients, all detailed in the Agreement itself.</a:t>
             </a:r>
           </a:p>
         </p:txBody>
@@ -11607,7 +11607,7 @@
                 </a:solidFill>
                 <a:latin typeface="Helvetica Neue"/>
               </a:rPr>
-              <a:t>—  </a:t>
+              <a:t>•  </a:t>
             </a:r>
             <a:r>
               <a:rPr sz="1550">
@@ -11616,7 +11616,7 @@
                 </a:solidFill>
                 <a:latin typeface="Helvetica Neue"/>
               </a:rPr>
-              <a:t>Proactively identify and approach potential Zebraish Studio clients within your own network and audience — anyone who could use what Studio builds — through DMs, in-person introductions, social engagement, whatever fits.</a:t>
+              <a:t>Proactively identify and approach potential Zebraish Studio clients within your own network and audience (anyone who could use what Studio builds) through DMs, in-person introductions, social engagement, whatever fits.</a:t>
             </a:r>
           </a:p>
           <a:p>
@@ -11635,7 +11635,7 @@
                 </a:solidFill>
                 <a:latin typeface="Helvetica Neue"/>
               </a:rPr>
-              <a:t>—  </a:t>
+              <a:t>•  </a:t>
             </a:r>
             <a:r>
               <a:rPr sz="1550">
@@ -11663,7 +11663,7 @@
                 </a:solidFill>
                 <a:latin typeface="Helvetica Neue"/>
               </a:rPr>
-              <a:t>—  </a:t>
+              <a:t>•  </a:t>
             </a:r>
             <a:r>
               <a:rPr sz="1550">
@@ -11691,7 +11691,7 @@
                 </a:solidFill>
                 <a:latin typeface="Helvetica Neue"/>
               </a:rPr>
-              <a:t>—  </a:t>
+              <a:t>•  </a:t>
             </a:r>
             <a:r>
               <a:rPr sz="1550">
@@ -11700,7 +11700,7 @@
                 </a:solidFill>
                 <a:latin typeface="Helvetica Neue"/>
               </a:rPr>
-              <a:t>This is the core of how commission gets generated — outreach is part of the job, not an optional extra.</a:t>
+              <a:t>This is the core of how commission gets generated: outreach is part of the job, not an optional extra.</a:t>
             </a:r>
           </a:p>
         </p:txBody>
@@ -12015,7 +12015,7 @@
                 </a:solidFill>
                 <a:latin typeface="Helvetica Neue"/>
               </a:rPr>
-              <a:t>Content focus is Zebraish Studio for now — Fashion content joins once the line launches.</a:t>
+              <a:t>Content focus is Zebraish Studio for now. Fashion content joins once the line launches.</a:t>
             </a:r>
           </a:p>
         </p:txBody>
@@ -13145,7 +13145,7 @@
                 </a:solidFill>
                 <a:latin typeface="Helvetica Neue"/>
               </a:rPr>
-              <a:t>Client introductions, commission, and the weekly payout — in plain terms.</a:t>
+              <a:t>Client introductions, commission, and the weekly payout, in plain terms.</a:t>
             </a:r>
           </a:p>
         </p:txBody>
